--- a/assets/FLIGHT_Praesentation.pptx
+++ b/assets/FLIGHT_Praesentation.pptx
@@ -2,19 +2,27 @@
 <file path=ppt/presentation.xml><?xml version="1.0" encoding="utf-8"?>
 <p:presentation xmlns:p="http://schemas.openxmlformats.org/presentationml/2006/main">
   <p:sldMasterIdLst>
-    <p:sldMasterId xmlns:r="http://schemas.openxmlformats.org/officeDocument/2006/relationships" id="2147483648" r:id="R7ee805b7fe274499"/>
+    <p:sldMasterId xmlns:r="http://schemas.openxmlformats.org/officeDocument/2006/relationships" id="2147483648" r:id="R52fa55b16a76441b"/>
   </p:sldMasterIdLst>
   <p:notesMasterIdLst>
-    <p:notesMasterId xmlns:r="http://schemas.openxmlformats.org/officeDocument/2006/relationships" r:id="Rbd6d9917f4d040ba"/>
+    <p:notesMasterId xmlns:r="http://schemas.openxmlformats.org/officeDocument/2006/relationships" r:id="R6c5ad9acf01b4972"/>
   </p:notesMasterIdLst>
   <p:sldIdLst>
-    <p:sldId xmlns:r="http://schemas.openxmlformats.org/officeDocument/2006/relationships" id="256" r:id="Rd1715c70ce7d46d3"/>
-    <p:sldId xmlns:r="http://schemas.openxmlformats.org/officeDocument/2006/relationships" id="257" r:id="Rd20b202b861a4a13"/>
-    <p:sldId xmlns:r="http://schemas.openxmlformats.org/officeDocument/2006/relationships" id="258" r:id="R18d4a28fa70c413e"/>
-    <p:sldId xmlns:r="http://schemas.openxmlformats.org/officeDocument/2006/relationships" id="259" r:id="Re70ef9f79ce44734"/>
-    <p:sldId xmlns:r="http://schemas.openxmlformats.org/officeDocument/2006/relationships" id="260" r:id="R07fd473d08744135"/>
-    <p:sldId xmlns:r="http://schemas.openxmlformats.org/officeDocument/2006/relationships" id="261" r:id="R94193d6f0ca34328"/>
-    <p:sldId xmlns:r="http://schemas.openxmlformats.org/officeDocument/2006/relationships" id="262" r:id="Rc9b5426952144c14"/>
+    <p:sldId xmlns:r="http://schemas.openxmlformats.org/officeDocument/2006/relationships" id="256" r:id="R07c37ff5986b409c"/>
+    <p:sldId xmlns:r="http://schemas.openxmlformats.org/officeDocument/2006/relationships" id="257" r:id="R0a6392ac73174a41"/>
+    <p:sldId xmlns:r="http://schemas.openxmlformats.org/officeDocument/2006/relationships" id="258" r:id="R159dbfc308d04033"/>
+    <p:sldId xmlns:r="http://schemas.openxmlformats.org/officeDocument/2006/relationships" id="259" r:id="Rdd19419b39b24336"/>
+    <p:sldId xmlns:r="http://schemas.openxmlformats.org/officeDocument/2006/relationships" id="260" r:id="R6fff5b258c11489e"/>
+    <p:sldId xmlns:r="http://schemas.openxmlformats.org/officeDocument/2006/relationships" id="261" r:id="R5150ff26e3a643f5"/>
+    <p:sldId xmlns:r="http://schemas.openxmlformats.org/officeDocument/2006/relationships" id="262" r:id="R04e74d2bc9214887"/>
+    <p:sldId xmlns:r="http://schemas.openxmlformats.org/officeDocument/2006/relationships" id="263" r:id="R43d8d7f75aa1411d"/>
+    <p:sldId xmlns:r="http://schemas.openxmlformats.org/officeDocument/2006/relationships" id="264" r:id="R1dec25fc10aa4def"/>
+    <p:sldId xmlns:r="http://schemas.openxmlformats.org/officeDocument/2006/relationships" id="265" r:id="R0fbac8f8342048c6"/>
+    <p:sldId xmlns:r="http://schemas.openxmlformats.org/officeDocument/2006/relationships" id="266" r:id="Rbb0a93bf7fec4a71"/>
+    <p:sldId xmlns:r="http://schemas.openxmlformats.org/officeDocument/2006/relationships" id="267" r:id="R35022bcf3cbc42db"/>
+    <p:sldId xmlns:r="http://schemas.openxmlformats.org/officeDocument/2006/relationships" id="268" r:id="Rcaf8c169677b41fc"/>
+    <p:sldId xmlns:r="http://schemas.openxmlformats.org/officeDocument/2006/relationships" id="269" r:id="Re473c8b0e72f4a6f"/>
+    <p:sldId xmlns:r="http://schemas.openxmlformats.org/officeDocument/2006/relationships" id="270" r:id="R02dac05ea7c14e22"/>
   </p:sldIdLst>
   <p:sldSz cx="12192000" cy="6858000"/>
   <p:notesSz cx="6858000" cy="9144000"/>
@@ -478,6 +486,426 @@
 </p:notes>
 </file>
 
+<file path=ppt/notesSlides/notesSlide10.xml><?xml version="1.0" encoding="utf-8"?>
+<p:notes xmlns:p="http://schemas.openxmlformats.org/presentationml/2006/main">
+  <p:cSld>
+    <p:spTree>
+      <p:nvGrpSpPr>
+        <p:cNvPr id="1" name=""/>
+        <p:cNvGrpSpPr/>
+        <p:nvPr/>
+      </p:nvGrpSpPr>
+      <p:grpSpPr>
+        <a:xfrm xmlns:a="http://schemas.openxmlformats.org/drawingml/2006/main"/>
+      </p:grpSpPr>
+      <p:sp>
+        <p:nvSpPr>
+          <p:cNvPr id="2" name="Slide Image Placeholder 1"/>
+          <p:cNvSpPr>
+            <a:spLocks xmlns:a="http://schemas.openxmlformats.org/drawingml/2006/main" noGrp="1"/>
+          </p:cNvSpPr>
+          <p:nvPr>
+            <p:ph type="sldImg" idx="0"/>
+          </p:nvPr>
+        </p:nvSpPr>
+        <p:spPr/>
+      </p:sp>
+      <p:sp>
+        <p:nvSpPr>
+          <p:cNvPr id="3" name="Notes Placeholder 2"/>
+          <p:cNvSpPr>
+            <a:spLocks xmlns:a="http://schemas.openxmlformats.org/drawingml/2006/main" noGrp="1"/>
+          </p:cNvSpPr>
+          <p:nvPr>
+            <p:ph type="body" idx="1"/>
+          </p:nvPr>
+        </p:nvSpPr>
+        <p:spPr/>
+        <p:txBody>
+          <a:bodyPr xmlns:a="http://schemas.openxmlformats.org/drawingml/2006/main"/>
+          <a:lstStyle xmlns:a="http://schemas.openxmlformats.org/drawingml/2006/main"/>
+          <a:p xmlns:a="http://schemas.openxmlformats.org/drawingml/2006/main">
+            <a:r>
+              <a:t>Projektstand: kompakte ausführbare Implementierungen und Simulationen. Kein Nachweis kommerzieller Wirkung. Öffentliche Quellen: https://www.kaggle.com/datasets/retailrocket/ecommerce-dataset ; https://rees46.com/en/datasets ; https://github.com/HaitaoMao/Amazon-M2-Session-Recommendation ; https://amazon-reviews-2023.github.io/ ; https://github.com/amazon-science/esci-data ; https://huggingface.co/datasets/criteo/criteo-uplift ; https://developers.openai.com/api/docs/guides/tools ; https://platform.claude.com/docs/en/agents-and-tools/tool-use/how-tool-use-works . Modelle und Daten benötigen getrennte Evaluation. Portfolio von Amit Steinberg.</a:t>
+            </a:r>
+          </a:p>
+        </p:txBody>
+      </p:sp>
+      <p:sp>
+        <p:nvSpPr>
+          <p:cNvPr id="4" name="Slide Number Placeholder 3"/>
+          <p:cNvSpPr>
+            <a:spLocks xmlns:a="http://schemas.openxmlformats.org/drawingml/2006/main" noGrp="1"/>
+          </p:cNvSpPr>
+          <p:nvPr>
+            <p:ph type="sldNum" idx="5"/>
+          </p:nvPr>
+        </p:nvSpPr>
+        <p:spPr/>
+        <p:txBody>
+          <a:bodyPr xmlns:a="http://schemas.openxmlformats.org/drawingml/2006/main"/>
+          <a:lstStyle xmlns:a="http://schemas.openxmlformats.org/drawingml/2006/main"/>
+          <a:p xmlns:a="http://schemas.openxmlformats.org/drawingml/2006/main"/>
+        </p:txBody>
+      </p:sp>
+    </p:spTree>
+  </p:cSld>
+  <p:clrMapOvr>
+    <a:masterClrMapping xmlns:a="http://schemas.openxmlformats.org/drawingml/2006/main"/>
+  </p:clrMapOvr>
+</p:notes>
+</file>
+
+<file path=ppt/notesSlides/notesSlide11.xml><?xml version="1.0" encoding="utf-8"?>
+<p:notes xmlns:p="http://schemas.openxmlformats.org/presentationml/2006/main">
+  <p:cSld>
+    <p:spTree>
+      <p:nvGrpSpPr>
+        <p:cNvPr id="1" name=""/>
+        <p:cNvGrpSpPr/>
+        <p:nvPr/>
+      </p:nvGrpSpPr>
+      <p:grpSpPr>
+        <a:xfrm xmlns:a="http://schemas.openxmlformats.org/drawingml/2006/main"/>
+      </p:grpSpPr>
+      <p:sp>
+        <p:nvSpPr>
+          <p:cNvPr id="2" name="Slide Image Placeholder 1"/>
+          <p:cNvSpPr>
+            <a:spLocks xmlns:a="http://schemas.openxmlformats.org/drawingml/2006/main" noGrp="1"/>
+          </p:cNvSpPr>
+          <p:nvPr>
+            <p:ph type="sldImg" idx="0"/>
+          </p:nvPr>
+        </p:nvSpPr>
+        <p:spPr/>
+      </p:sp>
+      <p:sp>
+        <p:nvSpPr>
+          <p:cNvPr id="3" name="Notes Placeholder 2"/>
+          <p:cNvSpPr>
+            <a:spLocks xmlns:a="http://schemas.openxmlformats.org/drawingml/2006/main" noGrp="1"/>
+          </p:cNvSpPr>
+          <p:nvPr>
+            <p:ph type="body" idx="1"/>
+          </p:nvPr>
+        </p:nvSpPr>
+        <p:spPr/>
+        <p:txBody>
+          <a:bodyPr xmlns:a="http://schemas.openxmlformats.org/drawingml/2006/main"/>
+          <a:lstStyle xmlns:a="http://schemas.openxmlformats.org/drawingml/2006/main"/>
+          <a:p xmlns:a="http://schemas.openxmlformats.org/drawingml/2006/main">
+            <a:r>
+              <a:t>Projektstand: kompakte ausführbare Implementierungen und Simulationen. Kein Nachweis kommerzieller Wirkung. Öffentliche Quellen: https://www.kaggle.com/datasets/retailrocket/ecommerce-dataset ; https://rees46.com/en/datasets ; https://github.com/HaitaoMao/Amazon-M2-Session-Recommendation ; https://amazon-reviews-2023.github.io/ ; https://github.com/amazon-science/esci-data ; https://huggingface.co/datasets/criteo/criteo-uplift ; https://developers.openai.com/api/docs/guides/tools ; https://platform.claude.com/docs/en/agents-and-tools/tool-use/how-tool-use-works . Modelle und Daten benötigen getrennte Evaluation. Portfolio von Amit Steinberg.</a:t>
+            </a:r>
+          </a:p>
+        </p:txBody>
+      </p:sp>
+      <p:sp>
+        <p:nvSpPr>
+          <p:cNvPr id="4" name="Slide Number Placeholder 3"/>
+          <p:cNvSpPr>
+            <a:spLocks xmlns:a="http://schemas.openxmlformats.org/drawingml/2006/main" noGrp="1"/>
+          </p:cNvSpPr>
+          <p:nvPr>
+            <p:ph type="sldNum" idx="5"/>
+          </p:nvPr>
+        </p:nvSpPr>
+        <p:spPr/>
+        <p:txBody>
+          <a:bodyPr xmlns:a="http://schemas.openxmlformats.org/drawingml/2006/main"/>
+          <a:lstStyle xmlns:a="http://schemas.openxmlformats.org/drawingml/2006/main"/>
+          <a:p xmlns:a="http://schemas.openxmlformats.org/drawingml/2006/main"/>
+        </p:txBody>
+      </p:sp>
+    </p:spTree>
+  </p:cSld>
+  <p:clrMapOvr>
+    <a:masterClrMapping xmlns:a="http://schemas.openxmlformats.org/drawingml/2006/main"/>
+  </p:clrMapOvr>
+</p:notes>
+</file>
+
+<file path=ppt/notesSlides/notesSlide12.xml><?xml version="1.0" encoding="utf-8"?>
+<p:notes xmlns:p="http://schemas.openxmlformats.org/presentationml/2006/main">
+  <p:cSld>
+    <p:spTree>
+      <p:nvGrpSpPr>
+        <p:cNvPr id="1" name=""/>
+        <p:cNvGrpSpPr/>
+        <p:nvPr/>
+      </p:nvGrpSpPr>
+      <p:grpSpPr>
+        <a:xfrm xmlns:a="http://schemas.openxmlformats.org/drawingml/2006/main"/>
+      </p:grpSpPr>
+      <p:sp>
+        <p:nvSpPr>
+          <p:cNvPr id="2" name="Slide Image Placeholder 1"/>
+          <p:cNvSpPr>
+            <a:spLocks xmlns:a="http://schemas.openxmlformats.org/drawingml/2006/main" noGrp="1"/>
+          </p:cNvSpPr>
+          <p:nvPr>
+            <p:ph type="sldImg" idx="0"/>
+          </p:nvPr>
+        </p:nvSpPr>
+        <p:spPr/>
+      </p:sp>
+      <p:sp>
+        <p:nvSpPr>
+          <p:cNvPr id="3" name="Notes Placeholder 2"/>
+          <p:cNvSpPr>
+            <a:spLocks xmlns:a="http://schemas.openxmlformats.org/drawingml/2006/main" noGrp="1"/>
+          </p:cNvSpPr>
+          <p:nvPr>
+            <p:ph type="body" idx="1"/>
+          </p:nvPr>
+        </p:nvSpPr>
+        <p:spPr/>
+        <p:txBody>
+          <a:bodyPr xmlns:a="http://schemas.openxmlformats.org/drawingml/2006/main"/>
+          <a:lstStyle xmlns:a="http://schemas.openxmlformats.org/drawingml/2006/main"/>
+          <a:p xmlns:a="http://schemas.openxmlformats.org/drawingml/2006/main">
+            <a:r>
+              <a:t>Projektstand: kompakte ausführbare Implementierungen und Simulationen. Kein Nachweis kommerzieller Wirkung. Öffentliche Quellen: https://www.kaggle.com/datasets/retailrocket/ecommerce-dataset ; https://rees46.com/en/datasets ; https://github.com/HaitaoMao/Amazon-M2-Session-Recommendation ; https://amazon-reviews-2023.github.io/ ; https://github.com/amazon-science/esci-data ; https://huggingface.co/datasets/criteo/criteo-uplift ; https://developers.openai.com/api/docs/guides/tools ; https://platform.claude.com/docs/en/agents-and-tools/tool-use/how-tool-use-works . Modelle und Daten benötigen getrennte Evaluation. Portfolio von Amit Steinberg.</a:t>
+            </a:r>
+          </a:p>
+        </p:txBody>
+      </p:sp>
+      <p:sp>
+        <p:nvSpPr>
+          <p:cNvPr id="4" name="Slide Number Placeholder 3"/>
+          <p:cNvSpPr>
+            <a:spLocks xmlns:a="http://schemas.openxmlformats.org/drawingml/2006/main" noGrp="1"/>
+          </p:cNvSpPr>
+          <p:nvPr>
+            <p:ph type="sldNum" idx="5"/>
+          </p:nvPr>
+        </p:nvSpPr>
+        <p:spPr/>
+        <p:txBody>
+          <a:bodyPr xmlns:a="http://schemas.openxmlformats.org/drawingml/2006/main"/>
+          <a:lstStyle xmlns:a="http://schemas.openxmlformats.org/drawingml/2006/main"/>
+          <a:p xmlns:a="http://schemas.openxmlformats.org/drawingml/2006/main"/>
+        </p:txBody>
+      </p:sp>
+    </p:spTree>
+  </p:cSld>
+  <p:clrMapOvr>
+    <a:masterClrMapping xmlns:a="http://schemas.openxmlformats.org/drawingml/2006/main"/>
+  </p:clrMapOvr>
+</p:notes>
+</file>
+
+<file path=ppt/notesSlides/notesSlide13.xml><?xml version="1.0" encoding="utf-8"?>
+<p:notes xmlns:p="http://schemas.openxmlformats.org/presentationml/2006/main">
+  <p:cSld>
+    <p:spTree>
+      <p:nvGrpSpPr>
+        <p:cNvPr id="1" name=""/>
+        <p:cNvGrpSpPr/>
+        <p:nvPr/>
+      </p:nvGrpSpPr>
+      <p:grpSpPr>
+        <a:xfrm xmlns:a="http://schemas.openxmlformats.org/drawingml/2006/main"/>
+      </p:grpSpPr>
+      <p:sp>
+        <p:nvSpPr>
+          <p:cNvPr id="2" name="Slide Image Placeholder 1"/>
+          <p:cNvSpPr>
+            <a:spLocks xmlns:a="http://schemas.openxmlformats.org/drawingml/2006/main" noGrp="1"/>
+          </p:cNvSpPr>
+          <p:nvPr>
+            <p:ph type="sldImg" idx="0"/>
+          </p:nvPr>
+        </p:nvSpPr>
+        <p:spPr/>
+      </p:sp>
+      <p:sp>
+        <p:nvSpPr>
+          <p:cNvPr id="3" name="Notes Placeholder 2"/>
+          <p:cNvSpPr>
+            <a:spLocks xmlns:a="http://schemas.openxmlformats.org/drawingml/2006/main" noGrp="1"/>
+          </p:cNvSpPr>
+          <p:nvPr>
+            <p:ph type="body" idx="1"/>
+          </p:nvPr>
+        </p:nvSpPr>
+        <p:spPr/>
+        <p:txBody>
+          <a:bodyPr xmlns:a="http://schemas.openxmlformats.org/drawingml/2006/main"/>
+          <a:lstStyle xmlns:a="http://schemas.openxmlformats.org/drawingml/2006/main"/>
+          <a:p xmlns:a="http://schemas.openxmlformats.org/drawingml/2006/main">
+            <a:r>
+              <a:t>Projektstand: kompakte ausführbare Implementierungen und Simulationen. Kein Nachweis kommerzieller Wirkung. Öffentliche Quellen: https://www.kaggle.com/datasets/retailrocket/ecommerce-dataset ; https://rees46.com/en/datasets ; https://github.com/HaitaoMao/Amazon-M2-Session-Recommendation ; https://amazon-reviews-2023.github.io/ ; https://github.com/amazon-science/esci-data ; https://huggingface.co/datasets/criteo/criteo-uplift ; https://developers.openai.com/api/docs/guides/tools ; https://platform.claude.com/docs/en/agents-and-tools/tool-use/how-tool-use-works . Modelle und Daten benötigen getrennte Evaluation. Portfolio von Amit Steinberg.</a:t>
+            </a:r>
+          </a:p>
+        </p:txBody>
+      </p:sp>
+      <p:sp>
+        <p:nvSpPr>
+          <p:cNvPr id="4" name="Slide Number Placeholder 3"/>
+          <p:cNvSpPr>
+            <a:spLocks xmlns:a="http://schemas.openxmlformats.org/drawingml/2006/main" noGrp="1"/>
+          </p:cNvSpPr>
+          <p:nvPr>
+            <p:ph type="sldNum" idx="5"/>
+          </p:nvPr>
+        </p:nvSpPr>
+        <p:spPr/>
+        <p:txBody>
+          <a:bodyPr xmlns:a="http://schemas.openxmlformats.org/drawingml/2006/main"/>
+          <a:lstStyle xmlns:a="http://schemas.openxmlformats.org/drawingml/2006/main"/>
+          <a:p xmlns:a="http://schemas.openxmlformats.org/drawingml/2006/main"/>
+        </p:txBody>
+      </p:sp>
+    </p:spTree>
+  </p:cSld>
+  <p:clrMapOvr>
+    <a:masterClrMapping xmlns:a="http://schemas.openxmlformats.org/drawingml/2006/main"/>
+  </p:clrMapOvr>
+</p:notes>
+</file>
+
+<file path=ppt/notesSlides/notesSlide14.xml><?xml version="1.0" encoding="utf-8"?>
+<p:notes xmlns:p="http://schemas.openxmlformats.org/presentationml/2006/main">
+  <p:cSld>
+    <p:spTree>
+      <p:nvGrpSpPr>
+        <p:cNvPr id="1" name=""/>
+        <p:cNvGrpSpPr/>
+        <p:nvPr/>
+      </p:nvGrpSpPr>
+      <p:grpSpPr>
+        <a:xfrm xmlns:a="http://schemas.openxmlformats.org/drawingml/2006/main"/>
+      </p:grpSpPr>
+      <p:sp>
+        <p:nvSpPr>
+          <p:cNvPr id="2" name="Slide Image Placeholder 1"/>
+          <p:cNvSpPr>
+            <a:spLocks xmlns:a="http://schemas.openxmlformats.org/drawingml/2006/main" noGrp="1"/>
+          </p:cNvSpPr>
+          <p:nvPr>
+            <p:ph type="sldImg" idx="0"/>
+          </p:nvPr>
+        </p:nvSpPr>
+        <p:spPr/>
+      </p:sp>
+      <p:sp>
+        <p:nvSpPr>
+          <p:cNvPr id="3" name="Notes Placeholder 2"/>
+          <p:cNvSpPr>
+            <a:spLocks xmlns:a="http://schemas.openxmlformats.org/drawingml/2006/main" noGrp="1"/>
+          </p:cNvSpPr>
+          <p:nvPr>
+            <p:ph type="body" idx="1"/>
+          </p:nvPr>
+        </p:nvSpPr>
+        <p:spPr/>
+        <p:txBody>
+          <a:bodyPr xmlns:a="http://schemas.openxmlformats.org/drawingml/2006/main"/>
+          <a:lstStyle xmlns:a="http://schemas.openxmlformats.org/drawingml/2006/main"/>
+          <a:p xmlns:a="http://schemas.openxmlformats.org/drawingml/2006/main">
+            <a:r>
+              <a:t>Projektstand: kompakte ausführbare Implementierungen und Simulationen. Kein Nachweis kommerzieller Wirkung. Öffentliche Quellen: https://www.kaggle.com/datasets/retailrocket/ecommerce-dataset ; https://rees46.com/en/datasets ; https://github.com/HaitaoMao/Amazon-M2-Session-Recommendation ; https://amazon-reviews-2023.github.io/ ; https://github.com/amazon-science/esci-data ; https://huggingface.co/datasets/criteo/criteo-uplift ; https://developers.openai.com/api/docs/guides/tools ; https://platform.claude.com/docs/en/agents-and-tools/tool-use/how-tool-use-works . Modelle und Daten benötigen getrennte Evaluation. Portfolio von Amit Steinberg.</a:t>
+            </a:r>
+          </a:p>
+        </p:txBody>
+      </p:sp>
+      <p:sp>
+        <p:nvSpPr>
+          <p:cNvPr id="4" name="Slide Number Placeholder 3"/>
+          <p:cNvSpPr>
+            <a:spLocks xmlns:a="http://schemas.openxmlformats.org/drawingml/2006/main" noGrp="1"/>
+          </p:cNvSpPr>
+          <p:nvPr>
+            <p:ph type="sldNum" idx="5"/>
+          </p:nvPr>
+        </p:nvSpPr>
+        <p:spPr/>
+        <p:txBody>
+          <a:bodyPr xmlns:a="http://schemas.openxmlformats.org/drawingml/2006/main"/>
+          <a:lstStyle xmlns:a="http://schemas.openxmlformats.org/drawingml/2006/main"/>
+          <a:p xmlns:a="http://schemas.openxmlformats.org/drawingml/2006/main"/>
+        </p:txBody>
+      </p:sp>
+    </p:spTree>
+  </p:cSld>
+  <p:clrMapOvr>
+    <a:masterClrMapping xmlns:a="http://schemas.openxmlformats.org/drawingml/2006/main"/>
+  </p:clrMapOvr>
+</p:notes>
+</file>
+
+<file path=ppt/notesSlides/notesSlide15.xml><?xml version="1.0" encoding="utf-8"?>
+<p:notes xmlns:p="http://schemas.openxmlformats.org/presentationml/2006/main">
+  <p:cSld>
+    <p:spTree>
+      <p:nvGrpSpPr>
+        <p:cNvPr id="1" name=""/>
+        <p:cNvGrpSpPr/>
+        <p:nvPr/>
+      </p:nvGrpSpPr>
+      <p:grpSpPr>
+        <a:xfrm xmlns:a="http://schemas.openxmlformats.org/drawingml/2006/main"/>
+      </p:grpSpPr>
+      <p:sp>
+        <p:nvSpPr>
+          <p:cNvPr id="2" name="Slide Image Placeholder 1"/>
+          <p:cNvSpPr>
+            <a:spLocks xmlns:a="http://schemas.openxmlformats.org/drawingml/2006/main" noGrp="1"/>
+          </p:cNvSpPr>
+          <p:nvPr>
+            <p:ph type="sldImg" idx="0"/>
+          </p:nvPr>
+        </p:nvSpPr>
+        <p:spPr/>
+      </p:sp>
+      <p:sp>
+        <p:nvSpPr>
+          <p:cNvPr id="3" name="Notes Placeholder 2"/>
+          <p:cNvSpPr>
+            <a:spLocks xmlns:a="http://schemas.openxmlformats.org/drawingml/2006/main" noGrp="1"/>
+          </p:cNvSpPr>
+          <p:nvPr>
+            <p:ph type="body" idx="1"/>
+          </p:nvPr>
+        </p:nvSpPr>
+        <p:spPr/>
+        <p:txBody>
+          <a:bodyPr xmlns:a="http://schemas.openxmlformats.org/drawingml/2006/main"/>
+          <a:lstStyle xmlns:a="http://schemas.openxmlformats.org/drawingml/2006/main"/>
+          <a:p xmlns:a="http://schemas.openxmlformats.org/drawingml/2006/main">
+            <a:r>
+              <a:t>Projektstand: kompakte ausführbare Implementierungen und Simulationen. Kein Nachweis kommerzieller Wirkung. Öffentliche Quellen: https://www.kaggle.com/datasets/retailrocket/ecommerce-dataset ; https://rees46.com/en/datasets ; https://github.com/HaitaoMao/Amazon-M2-Session-Recommendation ; https://amazon-reviews-2023.github.io/ ; https://github.com/amazon-science/esci-data ; https://huggingface.co/datasets/criteo/criteo-uplift ; https://developers.openai.com/api/docs/guides/tools ; https://platform.claude.com/docs/en/agents-and-tools/tool-use/how-tool-use-works . Modelle und Daten benötigen getrennte Evaluation. Portfolio von Amit Steinberg.</a:t>
+            </a:r>
+          </a:p>
+        </p:txBody>
+      </p:sp>
+      <p:sp>
+        <p:nvSpPr>
+          <p:cNvPr id="4" name="Slide Number Placeholder 3"/>
+          <p:cNvSpPr>
+            <a:spLocks xmlns:a="http://schemas.openxmlformats.org/drawingml/2006/main" noGrp="1"/>
+          </p:cNvSpPr>
+          <p:nvPr>
+            <p:ph type="sldNum" idx="5"/>
+          </p:nvPr>
+        </p:nvSpPr>
+        <p:spPr/>
+        <p:txBody>
+          <a:bodyPr xmlns:a="http://schemas.openxmlformats.org/drawingml/2006/main"/>
+          <a:lstStyle xmlns:a="http://schemas.openxmlformats.org/drawingml/2006/main"/>
+          <a:p xmlns:a="http://schemas.openxmlformats.org/drawingml/2006/main"/>
+        </p:txBody>
+      </p:sp>
+    </p:spTree>
+  </p:cSld>
+  <p:clrMapOvr>
+    <a:masterClrMapping xmlns:a="http://schemas.openxmlformats.org/drawingml/2006/main"/>
+  </p:clrMapOvr>
+</p:notes>
+</file>
+
 <file path=ppt/notesSlides/notesSlide2.xml><?xml version="1.0" encoding="utf-8"?>
 <p:notes xmlns:p="http://schemas.openxmlformats.org/presentationml/2006/main">
   <p:cSld>
@@ -518,7 +946,7 @@
           <a:lstStyle xmlns:a="http://schemas.openxmlformats.org/drawingml/2006/main"/>
           <a:p xmlns:a="http://schemas.openxmlformats.org/drawingml/2006/main">
             <a:r>
-              <a:t>Projektstand: kompakte ausführbare Implementierungen und Simulationen. Kein Nachweis kommerzieller Wirkung. Öffentliche Quellen: https://www.kaggle.com/datasets/retailrocket/ecommerce-dataset ; https://rees46.com/en/datasets ; https://github.com/HaitaoMao/Amazon-M2-Session-Recommendation ; https://amazon-reviews-2023.github.io/ ; https://github.com/amazon-science/esci-data ; https://huggingface.co/datasets/criteo/criteo-uplift . Modelle und Daten benötigen getrennte Evaluation. Portfolio von Amit Steinberg.</a:t>
+              <a:t>Projektstand: kompakte ausführbare Implementierungen und Simulationen. Kein Nachweis kommerzieller Wirkung. Öffentliche Quellen: https://www.kaggle.com/datasets/retailrocket/ecommerce-dataset ; https://rees46.com/en/datasets ; https://github.com/HaitaoMao/Amazon-M2-Session-Recommendation ; https://amazon-reviews-2023.github.io/ ; https://github.com/amazon-science/esci-data ; https://huggingface.co/datasets/criteo/criteo-uplift ; https://developers.openai.com/api/docs/guides/tools ; https://platform.claude.com/docs/en/agents-and-tools/tool-use/how-tool-use-works . Modelle und Daten benötigen getrennte Evaluation. Portfolio von Amit Steinberg.</a:t>
             </a:r>
           </a:p>
         </p:txBody>
@@ -588,7 +1016,7 @@
           <a:lstStyle xmlns:a="http://schemas.openxmlformats.org/drawingml/2006/main"/>
           <a:p xmlns:a="http://schemas.openxmlformats.org/drawingml/2006/main">
             <a:r>
-              <a:t>Projektstand: kompakte ausführbare Implementierungen und Simulationen. Kein Nachweis kommerzieller Wirkung. Öffentliche Quellen: https://www.kaggle.com/datasets/retailrocket/ecommerce-dataset ; https://rees46.com/en/datasets ; https://github.com/HaitaoMao/Amazon-M2-Session-Recommendation ; https://amazon-reviews-2023.github.io/ ; https://github.com/amazon-science/esci-data ; https://huggingface.co/datasets/criteo/criteo-uplift . Modelle und Daten benötigen getrennte Evaluation. Portfolio von Amit Steinberg.</a:t>
+              <a:t>Projektstand: kompakte ausführbare Implementierungen und Simulationen. Kein Nachweis kommerzieller Wirkung. Öffentliche Quellen: https://www.kaggle.com/datasets/retailrocket/ecommerce-dataset ; https://rees46.com/en/datasets ; https://github.com/HaitaoMao/Amazon-M2-Session-Recommendation ; https://amazon-reviews-2023.github.io/ ; https://github.com/amazon-science/esci-data ; https://huggingface.co/datasets/criteo/criteo-uplift ; https://developers.openai.com/api/docs/guides/tools ; https://platform.claude.com/docs/en/agents-and-tools/tool-use/how-tool-use-works . Modelle und Daten benötigen getrennte Evaluation. Portfolio von Amit Steinberg.</a:t>
             </a:r>
           </a:p>
         </p:txBody>
@@ -658,7 +1086,7 @@
           <a:lstStyle xmlns:a="http://schemas.openxmlformats.org/drawingml/2006/main"/>
           <a:p xmlns:a="http://schemas.openxmlformats.org/drawingml/2006/main">
             <a:r>
-              <a:t>Projektstand: kompakte ausführbare Implementierungen und Simulationen. Kein Nachweis kommerzieller Wirkung. Öffentliche Quellen: https://www.kaggle.com/datasets/retailrocket/ecommerce-dataset ; https://rees46.com/en/datasets ; https://github.com/HaitaoMao/Amazon-M2-Session-Recommendation ; https://amazon-reviews-2023.github.io/ ; https://github.com/amazon-science/esci-data ; https://huggingface.co/datasets/criteo/criteo-uplift . Modelle und Daten benötigen getrennte Evaluation. Portfolio von Amit Steinberg.</a:t>
+              <a:t>Projektstand: kompakte ausführbare Implementierungen und Simulationen. Kein Nachweis kommerzieller Wirkung. Öffentliche Quellen: https://www.kaggle.com/datasets/retailrocket/ecommerce-dataset ; https://rees46.com/en/datasets ; https://github.com/HaitaoMao/Amazon-M2-Session-Recommendation ; https://amazon-reviews-2023.github.io/ ; https://github.com/amazon-science/esci-data ; https://huggingface.co/datasets/criteo/criteo-uplift ; https://developers.openai.com/api/docs/guides/tools ; https://platform.claude.com/docs/en/agents-and-tools/tool-use/how-tool-use-works . Modelle und Daten benötigen getrennte Evaluation. Portfolio von Amit Steinberg.</a:t>
             </a:r>
           </a:p>
         </p:txBody>
@@ -728,7 +1156,7 @@
           <a:lstStyle xmlns:a="http://schemas.openxmlformats.org/drawingml/2006/main"/>
           <a:p xmlns:a="http://schemas.openxmlformats.org/drawingml/2006/main">
             <a:r>
-              <a:t>Projektstand: kompakte ausführbare Implementierungen und Simulationen. Kein Nachweis kommerzieller Wirkung. Öffentliche Quellen: https://www.kaggle.com/datasets/retailrocket/ecommerce-dataset ; https://rees46.com/en/datasets ; https://github.com/HaitaoMao/Amazon-M2-Session-Recommendation ; https://amazon-reviews-2023.github.io/ ; https://github.com/amazon-science/esci-data ; https://huggingface.co/datasets/criteo/criteo-uplift . Modelle und Daten benötigen getrennte Evaluation. Portfolio von Amit Steinberg.</a:t>
+              <a:t>Projektstand: kompakte ausführbare Implementierungen und Simulationen. Kein Nachweis kommerzieller Wirkung. Öffentliche Quellen: https://www.kaggle.com/datasets/retailrocket/ecommerce-dataset ; https://rees46.com/en/datasets ; https://github.com/HaitaoMao/Amazon-M2-Session-Recommendation ; https://amazon-reviews-2023.github.io/ ; https://github.com/amazon-science/esci-data ; https://huggingface.co/datasets/criteo/criteo-uplift ; https://developers.openai.com/api/docs/guides/tools ; https://platform.claude.com/docs/en/agents-and-tools/tool-use/how-tool-use-works . Modelle und Daten benötigen getrennte Evaluation. Portfolio von Amit Steinberg.</a:t>
             </a:r>
           </a:p>
         </p:txBody>
@@ -798,7 +1226,7 @@
           <a:lstStyle xmlns:a="http://schemas.openxmlformats.org/drawingml/2006/main"/>
           <a:p xmlns:a="http://schemas.openxmlformats.org/drawingml/2006/main">
             <a:r>
-              <a:t>Projektstand: kompakte ausführbare Implementierungen und Simulationen. Kein Nachweis kommerzieller Wirkung. Öffentliche Quellen: https://www.kaggle.com/datasets/retailrocket/ecommerce-dataset ; https://rees46.com/en/datasets ; https://github.com/HaitaoMao/Amazon-M2-Session-Recommendation ; https://amazon-reviews-2023.github.io/ ; https://github.com/amazon-science/esci-data ; https://huggingface.co/datasets/criteo/criteo-uplift . Modelle und Daten benötigen getrennte Evaluation. Portfolio von Amit Steinberg.</a:t>
+              <a:t>Projektstand: kompakte ausführbare Implementierungen und Simulationen. Kein Nachweis kommerzieller Wirkung. Öffentliche Quellen: https://www.kaggle.com/datasets/retailrocket/ecommerce-dataset ; https://rees46.com/en/datasets ; https://github.com/HaitaoMao/Amazon-M2-Session-Recommendation ; https://amazon-reviews-2023.github.io/ ; https://github.com/amazon-science/esci-data ; https://huggingface.co/datasets/criteo/criteo-uplift ; https://developers.openai.com/api/docs/guides/tools ; https://platform.claude.com/docs/en/agents-and-tools/tool-use/how-tool-use-works . Modelle und Daten benötigen getrennte Evaluation. Portfolio von Amit Steinberg.</a:t>
             </a:r>
           </a:p>
         </p:txBody>
@@ -868,7 +1296,147 @@
           <a:lstStyle xmlns:a="http://schemas.openxmlformats.org/drawingml/2006/main"/>
           <a:p xmlns:a="http://schemas.openxmlformats.org/drawingml/2006/main">
             <a:r>
-              <a:t>Projektstand: kompakte ausführbare Implementierungen und Simulationen. Kein Nachweis kommerzieller Wirkung. Öffentliche Quellen: https://www.kaggle.com/datasets/retailrocket/ecommerce-dataset ; https://rees46.com/en/datasets ; https://github.com/HaitaoMao/Amazon-M2-Session-Recommendation ; https://amazon-reviews-2023.github.io/ ; https://github.com/amazon-science/esci-data ; https://huggingface.co/datasets/criteo/criteo-uplift . Modelle und Daten benötigen getrennte Evaluation. Portfolio von Amit Steinberg.</a:t>
+              <a:t>Projektstand: kompakte ausführbare Implementierungen und Simulationen. Kein Nachweis kommerzieller Wirkung. Öffentliche Quellen: https://www.kaggle.com/datasets/retailrocket/ecommerce-dataset ; https://rees46.com/en/datasets ; https://github.com/HaitaoMao/Amazon-M2-Session-Recommendation ; https://amazon-reviews-2023.github.io/ ; https://github.com/amazon-science/esci-data ; https://huggingface.co/datasets/criteo/criteo-uplift ; https://developers.openai.com/api/docs/guides/tools ; https://platform.claude.com/docs/en/agents-and-tools/tool-use/how-tool-use-works . Modelle und Daten benötigen getrennte Evaluation. Portfolio von Amit Steinberg.</a:t>
+            </a:r>
+          </a:p>
+        </p:txBody>
+      </p:sp>
+      <p:sp>
+        <p:nvSpPr>
+          <p:cNvPr id="4" name="Slide Number Placeholder 3"/>
+          <p:cNvSpPr>
+            <a:spLocks xmlns:a="http://schemas.openxmlformats.org/drawingml/2006/main" noGrp="1"/>
+          </p:cNvSpPr>
+          <p:nvPr>
+            <p:ph type="sldNum" idx="5"/>
+          </p:nvPr>
+        </p:nvSpPr>
+        <p:spPr/>
+        <p:txBody>
+          <a:bodyPr xmlns:a="http://schemas.openxmlformats.org/drawingml/2006/main"/>
+          <a:lstStyle xmlns:a="http://schemas.openxmlformats.org/drawingml/2006/main"/>
+          <a:p xmlns:a="http://schemas.openxmlformats.org/drawingml/2006/main"/>
+        </p:txBody>
+      </p:sp>
+    </p:spTree>
+  </p:cSld>
+  <p:clrMapOvr>
+    <a:masterClrMapping xmlns:a="http://schemas.openxmlformats.org/drawingml/2006/main"/>
+  </p:clrMapOvr>
+</p:notes>
+</file>
+
+<file path=ppt/notesSlides/notesSlide8.xml><?xml version="1.0" encoding="utf-8"?>
+<p:notes xmlns:p="http://schemas.openxmlformats.org/presentationml/2006/main">
+  <p:cSld>
+    <p:spTree>
+      <p:nvGrpSpPr>
+        <p:cNvPr id="1" name=""/>
+        <p:cNvGrpSpPr/>
+        <p:nvPr/>
+      </p:nvGrpSpPr>
+      <p:grpSpPr>
+        <a:xfrm xmlns:a="http://schemas.openxmlformats.org/drawingml/2006/main"/>
+      </p:grpSpPr>
+      <p:sp>
+        <p:nvSpPr>
+          <p:cNvPr id="2" name="Slide Image Placeholder 1"/>
+          <p:cNvSpPr>
+            <a:spLocks xmlns:a="http://schemas.openxmlformats.org/drawingml/2006/main" noGrp="1"/>
+          </p:cNvSpPr>
+          <p:nvPr>
+            <p:ph type="sldImg" idx="0"/>
+          </p:nvPr>
+        </p:nvSpPr>
+        <p:spPr/>
+      </p:sp>
+      <p:sp>
+        <p:nvSpPr>
+          <p:cNvPr id="3" name="Notes Placeholder 2"/>
+          <p:cNvSpPr>
+            <a:spLocks xmlns:a="http://schemas.openxmlformats.org/drawingml/2006/main" noGrp="1"/>
+          </p:cNvSpPr>
+          <p:nvPr>
+            <p:ph type="body" idx="1"/>
+          </p:nvPr>
+        </p:nvSpPr>
+        <p:spPr/>
+        <p:txBody>
+          <a:bodyPr xmlns:a="http://schemas.openxmlformats.org/drawingml/2006/main"/>
+          <a:lstStyle xmlns:a="http://schemas.openxmlformats.org/drawingml/2006/main"/>
+          <a:p xmlns:a="http://schemas.openxmlformats.org/drawingml/2006/main">
+            <a:r>
+              <a:t>Projektstand: kompakte ausführbare Implementierungen und Simulationen. Kein Nachweis kommerzieller Wirkung. Öffentliche Quellen: https://www.kaggle.com/datasets/retailrocket/ecommerce-dataset ; https://rees46.com/en/datasets ; https://github.com/HaitaoMao/Amazon-M2-Session-Recommendation ; https://amazon-reviews-2023.github.io/ ; https://github.com/amazon-science/esci-data ; https://huggingface.co/datasets/criteo/criteo-uplift ; https://developers.openai.com/api/docs/guides/tools ; https://platform.claude.com/docs/en/agents-and-tools/tool-use/how-tool-use-works . Modelle und Daten benötigen getrennte Evaluation. Portfolio von Amit Steinberg.</a:t>
+            </a:r>
+          </a:p>
+        </p:txBody>
+      </p:sp>
+      <p:sp>
+        <p:nvSpPr>
+          <p:cNvPr id="4" name="Slide Number Placeholder 3"/>
+          <p:cNvSpPr>
+            <a:spLocks xmlns:a="http://schemas.openxmlformats.org/drawingml/2006/main" noGrp="1"/>
+          </p:cNvSpPr>
+          <p:nvPr>
+            <p:ph type="sldNum" idx="5"/>
+          </p:nvPr>
+        </p:nvSpPr>
+        <p:spPr/>
+        <p:txBody>
+          <a:bodyPr xmlns:a="http://schemas.openxmlformats.org/drawingml/2006/main"/>
+          <a:lstStyle xmlns:a="http://schemas.openxmlformats.org/drawingml/2006/main"/>
+          <a:p xmlns:a="http://schemas.openxmlformats.org/drawingml/2006/main"/>
+        </p:txBody>
+      </p:sp>
+    </p:spTree>
+  </p:cSld>
+  <p:clrMapOvr>
+    <a:masterClrMapping xmlns:a="http://schemas.openxmlformats.org/drawingml/2006/main"/>
+  </p:clrMapOvr>
+</p:notes>
+</file>
+
+<file path=ppt/notesSlides/notesSlide9.xml><?xml version="1.0" encoding="utf-8"?>
+<p:notes xmlns:p="http://schemas.openxmlformats.org/presentationml/2006/main">
+  <p:cSld>
+    <p:spTree>
+      <p:nvGrpSpPr>
+        <p:cNvPr id="1" name=""/>
+        <p:cNvGrpSpPr/>
+        <p:nvPr/>
+      </p:nvGrpSpPr>
+      <p:grpSpPr>
+        <a:xfrm xmlns:a="http://schemas.openxmlformats.org/drawingml/2006/main"/>
+      </p:grpSpPr>
+      <p:sp>
+        <p:nvSpPr>
+          <p:cNvPr id="2" name="Slide Image Placeholder 1"/>
+          <p:cNvSpPr>
+            <a:spLocks xmlns:a="http://schemas.openxmlformats.org/drawingml/2006/main" noGrp="1"/>
+          </p:cNvSpPr>
+          <p:nvPr>
+            <p:ph type="sldImg" idx="0"/>
+          </p:nvPr>
+        </p:nvSpPr>
+        <p:spPr/>
+      </p:sp>
+      <p:sp>
+        <p:nvSpPr>
+          <p:cNvPr id="3" name="Notes Placeholder 2"/>
+          <p:cNvSpPr>
+            <a:spLocks xmlns:a="http://schemas.openxmlformats.org/drawingml/2006/main" noGrp="1"/>
+          </p:cNvSpPr>
+          <p:nvPr>
+            <p:ph type="body" idx="1"/>
+          </p:nvPr>
+        </p:nvSpPr>
+        <p:spPr/>
+        <p:txBody>
+          <a:bodyPr xmlns:a="http://schemas.openxmlformats.org/drawingml/2006/main"/>
+          <a:lstStyle xmlns:a="http://schemas.openxmlformats.org/drawingml/2006/main"/>
+          <a:p xmlns:a="http://schemas.openxmlformats.org/drawingml/2006/main">
+            <a:r>
+              <a:t>Projektstand: kompakte ausführbare Implementierungen und Simulationen. Kein Nachweis kommerzieller Wirkung. Öffentliche Quellen: https://www.kaggle.com/datasets/retailrocket/ecommerce-dataset ; https://rees46.com/en/datasets ; https://github.com/HaitaoMao/Amazon-M2-Session-Recommendation ; https://amazon-reviews-2023.github.io/ ; https://github.com/amazon-science/esci-data ; https://huggingface.co/datasets/criteo/criteo-uplift ; https://developers.openai.com/api/docs/guides/tools ; https://platform.claude.com/docs/en/agents-and-tools/tool-use/how-tool-use-works . Modelle und Daten benötigen getrennte Evaluation. Portfolio von Amit Steinberg.</a:t>
             </a:r>
           </a:p>
         </p:txBody>
@@ -915,7 +1483,7 @@
           <p:cNvPr id="3" name="Title">
             <a:extLst xmlns:a="http://schemas.openxmlformats.org/drawingml/2006/main">
               <a:ext uri="{FF2B5EF4-FFF2-40B4-BE49-F238E27FC236}">
-                <a16:creationId xmlns:a16="http://schemas.microsoft.com/office/drawing/2014/main" id="{FF7FBC3E-259D-438C-ADB4-58C7FE902AAE}"/>
+                <a16:creationId xmlns:a16="http://schemas.microsoft.com/office/drawing/2014/main" id="{F2DD40D1-A3CB-45D3-966C-68CBE83D8040}"/>
               </a:ext>
             </a:extLst>
           </p:cNvPr>
@@ -1144,7 +1712,7 @@
           <p:cNvPr id="2" name="Subtitle">
             <a:extLst xmlns:a="http://schemas.openxmlformats.org/drawingml/2006/main">
               <a:ext uri="{FF2B5EF4-FFF2-40B4-BE49-F238E27FC236}">
-                <a16:creationId xmlns:a16="http://schemas.microsoft.com/office/drawing/2014/main" id="{BAC3D119-6F43-4C87-B7EE-6BCF3C15C073}"/>
+                <a16:creationId xmlns:a16="http://schemas.microsoft.com/office/drawing/2014/main" id="{9DE57387-0124-4629-BFB5-C984C6016D2C}"/>
               </a:ext>
             </a:extLst>
           </p:cNvPr>
@@ -1390,7 +1958,7 @@
           <p:cNvPr id="2" name="Section title">
             <a:extLst xmlns:a="http://schemas.openxmlformats.org/drawingml/2006/main">
               <a:ext uri="{FF2B5EF4-FFF2-40B4-BE49-F238E27FC236}">
-                <a16:creationId xmlns:a16="http://schemas.microsoft.com/office/drawing/2014/main" id="{891FB51B-5299-4E68-AB1E-1D9561E564CA}"/>
+                <a16:creationId xmlns:a16="http://schemas.microsoft.com/office/drawing/2014/main" id="{B17AC3CD-3CBC-44EE-8BF9-25878E635303}"/>
               </a:ext>
             </a:extLst>
           </p:cNvPr>
@@ -1636,7 +2204,7 @@
           <p:cNvPr id="3" name="Title">
             <a:extLst xmlns:a="http://schemas.openxmlformats.org/drawingml/2006/main">
               <a:ext uri="{FF2B5EF4-FFF2-40B4-BE49-F238E27FC236}">
-                <a16:creationId xmlns:a16="http://schemas.microsoft.com/office/drawing/2014/main" id="{C833104B-93B2-4CC7-A084-315FD4023AF2}"/>
+                <a16:creationId xmlns:a16="http://schemas.microsoft.com/office/drawing/2014/main" id="{CFACAB04-05A3-45D9-9D6D-7189987CE634}"/>
               </a:ext>
             </a:extLst>
           </p:cNvPr>
@@ -1865,7 +2433,7 @@
           <p:cNvPr id="2" name="Body">
             <a:extLst xmlns:a="http://schemas.openxmlformats.org/drawingml/2006/main">
               <a:ext uri="{FF2B5EF4-FFF2-40B4-BE49-F238E27FC236}">
-                <a16:creationId xmlns:a16="http://schemas.microsoft.com/office/drawing/2014/main" id="{E743DD41-F175-47E3-86E2-907CD1EFEF82}"/>
+                <a16:creationId xmlns:a16="http://schemas.microsoft.com/office/drawing/2014/main" id="{A6B098C7-ADF5-4DE1-967A-85B8C5313AC1}"/>
               </a:ext>
             </a:extLst>
           </p:cNvPr>
@@ -2111,7 +2679,7 @@
           <p:cNvPr id="4" name="Title">
             <a:extLst xmlns:a="http://schemas.openxmlformats.org/drawingml/2006/main">
               <a:ext uri="{FF2B5EF4-FFF2-40B4-BE49-F238E27FC236}">
-                <a16:creationId xmlns:a16="http://schemas.microsoft.com/office/drawing/2014/main" id="{6C798E19-4451-40B4-AC04-CC46D4FF708F}"/>
+                <a16:creationId xmlns:a16="http://schemas.microsoft.com/office/drawing/2014/main" id="{676FCBE3-AD77-4396-B655-762343ABB58C}"/>
               </a:ext>
             </a:extLst>
           </p:cNvPr>
@@ -2340,7 +2908,7 @@
           <p:cNvPr id="2" name="Left column">
             <a:extLst xmlns:a="http://schemas.openxmlformats.org/drawingml/2006/main">
               <a:ext uri="{FF2B5EF4-FFF2-40B4-BE49-F238E27FC236}">
-                <a16:creationId xmlns:a16="http://schemas.microsoft.com/office/drawing/2014/main" id="{844C0F03-F195-475B-85F5-19DEFDFA8F45}"/>
+                <a16:creationId xmlns:a16="http://schemas.microsoft.com/office/drawing/2014/main" id="{EA80B9ED-A217-492D-874B-E222B858FE65}"/>
               </a:ext>
             </a:extLst>
           </p:cNvPr>
@@ -2569,7 +3137,7 @@
           <p:cNvPr id="3" name="Right column">
             <a:extLst xmlns:a="http://schemas.openxmlformats.org/drawingml/2006/main">
               <a:ext uri="{FF2B5EF4-FFF2-40B4-BE49-F238E27FC236}">
-                <a16:creationId xmlns:a16="http://schemas.microsoft.com/office/drawing/2014/main" id="{01125905-591A-4CFA-B0D5-CD8AB8F4C172}"/>
+                <a16:creationId xmlns:a16="http://schemas.microsoft.com/office/drawing/2014/main" id="{8FD6ECE4-210F-4462-A0E5-327E21A28627}"/>
               </a:ext>
             </a:extLst>
           </p:cNvPr>
@@ -2815,7 +3383,7 @@
           <p:cNvPr id="3" name="Title">
             <a:extLst xmlns:a="http://schemas.openxmlformats.org/drawingml/2006/main">
               <a:ext uri="{FF2B5EF4-FFF2-40B4-BE49-F238E27FC236}">
-                <a16:creationId xmlns:a16="http://schemas.microsoft.com/office/drawing/2014/main" id="{10443977-2904-4D1A-B365-A824BF82D751}"/>
+                <a16:creationId xmlns:a16="http://schemas.microsoft.com/office/drawing/2014/main" id="{26D37170-FFEB-4CBC-B87E-92E389F1EA52}"/>
               </a:ext>
             </a:extLst>
           </p:cNvPr>
@@ -3044,7 +3612,7 @@
           <p:cNvPr id="2" name="Left column">
             <a:extLst xmlns:a="http://schemas.openxmlformats.org/drawingml/2006/main">
               <a:ext uri="{FF2B5EF4-FFF2-40B4-BE49-F238E27FC236}">
-                <a16:creationId xmlns:a16="http://schemas.microsoft.com/office/drawing/2014/main" id="{61533CAC-9CEF-40BA-8DE0-3A0363016F73}"/>
+                <a16:creationId xmlns:a16="http://schemas.microsoft.com/office/drawing/2014/main" id="{6193CABA-5730-4B09-A71C-0E2AE03AAE20}"/>
               </a:ext>
             </a:extLst>
           </p:cNvPr>
@@ -3311,12 +3879,12 @@
   </p:cSld>
   <p:clrMap bg1="lt1" tx1="dk1" bg2="lt2" tx2="dk2" accent1="accent1" accent2="accent2" accent3="accent3" accent4="accent4" accent5="accent5" accent6="accent6" hlink="hlink" folHlink="folHlink"/>
   <p:sldLayoutIdLst>
-    <p:sldLayoutId xmlns:r="http://schemas.openxmlformats.org/officeDocument/2006/relationships" id="2147483649" r:id="R183893f19ad0490f"/>
-    <p:sldLayoutId xmlns:r="http://schemas.openxmlformats.org/officeDocument/2006/relationships" id="2147483650" r:id="Raf1c5d8732054071"/>
-    <p:sldLayoutId xmlns:r="http://schemas.openxmlformats.org/officeDocument/2006/relationships" id="2147483651" r:id="R07229905a0fa431f"/>
-    <p:sldLayoutId xmlns:r="http://schemas.openxmlformats.org/officeDocument/2006/relationships" id="2147483652" r:id="R56dbc6cd468a45a5"/>
-    <p:sldLayoutId xmlns:r="http://schemas.openxmlformats.org/officeDocument/2006/relationships" id="2147483653" r:id="R12478d15adea47be"/>
-    <p:sldLayoutId xmlns:r="http://schemas.openxmlformats.org/officeDocument/2006/relationships" id="2147483654" r:id="Rcd690d15a557494e"/>
+    <p:sldLayoutId xmlns:r="http://schemas.openxmlformats.org/officeDocument/2006/relationships" id="2147483649" r:id="R96a8db3453fc4aa0"/>
+    <p:sldLayoutId xmlns:r="http://schemas.openxmlformats.org/officeDocument/2006/relationships" id="2147483650" r:id="Rd8ce1a4bcce642fd"/>
+    <p:sldLayoutId xmlns:r="http://schemas.openxmlformats.org/officeDocument/2006/relationships" id="2147483651" r:id="Rc9f41cb234f74b37"/>
+    <p:sldLayoutId xmlns:r="http://schemas.openxmlformats.org/officeDocument/2006/relationships" id="2147483652" r:id="R77b7abadfd904623"/>
+    <p:sldLayoutId xmlns:r="http://schemas.openxmlformats.org/officeDocument/2006/relationships" id="2147483653" r:id="R88fbb8905754497a"/>
+    <p:sldLayoutId xmlns:r="http://schemas.openxmlformats.org/officeDocument/2006/relationships" id="2147483654" r:id="R2b2c05f3cfc34a5f"/>
   </p:sldLayoutIdLst>
   <p:txStyles>
     <p:titleStyle>
@@ -3867,7 +4435,7 @@
           <p:cNvPr id="2" name="">
             <a:extLst xmlns:a="http://schemas.openxmlformats.org/drawingml/2006/main">
               <a:ext uri="{FF2B5EF4-FFF2-40B4-BE49-F238E27FC236}">
-                <a16:creationId xmlns:a16="http://schemas.microsoft.com/office/drawing/2014/main" id="{9552F374-A154-4DD9-9E26-1A55C72F06B6}"/>
+                <a16:creationId xmlns:a16="http://schemas.microsoft.com/office/drawing/2014/main" id="{B2D8F204-4D95-4EA1-B049-17CFFC59A137}"/>
               </a:ext>
             </a:extLst>
           </p:cNvPr>
@@ -3877,7 +4445,7 @@
           <p:nvPr/>
         </p:nvPicPr>
         <p:blipFill>
-          <a:blip xmlns:r="http://schemas.openxmlformats.org/officeDocument/2006/relationships" xmlns:a="http://schemas.openxmlformats.org/drawingml/2006/main" r:embed="R9de0ac0a6b7f4a92"/>
+          <a:blip xmlns:r="http://schemas.openxmlformats.org/officeDocument/2006/relationships" xmlns:a="http://schemas.openxmlformats.org/drawingml/2006/main" r:embed="R23b7a911e5a94348"/>
           <a:stretch xmlns:a="http://schemas.openxmlformats.org/drawingml/2006/main"/>
         </p:blipFill>
         <p:spPr>
@@ -3893,7 +4461,3289 @@
     </p:spTree>
     <p:extLst>
       <p:ext uri="{BB962C8B-B14F-4D97-AF65-F5344CB8AC3E}">
-        <p14:creationId xmlns:p14="http://schemas.microsoft.com/office/powerpoint/2010/main" val="2081965982"/>
+        <p14:creationId xmlns:p14="http://schemas.microsoft.com/office/powerpoint/2010/main" val="2075919175"/>
+      </p:ext>
+    </p:extLst>
+  </p:cSld>
+</p:sld>
+</file>
+
+<file path=ppt/slides/slide10.xml><?xml version="1.0" encoding="utf-8"?>
+<p:sld xmlns:p="http://schemas.openxmlformats.org/presentationml/2006/main">
+  <p:cSld>
+    <p:bg>
+      <p:bgPr>
+        <a:solidFill xmlns:a="http://schemas.openxmlformats.org/drawingml/2006/main">
+          <a:srgbClr val="0B1220"/>
+        </a:solidFill>
+      </p:bgPr>
+    </p:bg>
+    <p:spTree>
+      <p:nvGrpSpPr>
+        <p:cNvPr id="1" name=""/>
+        <p:cNvGrpSpPr/>
+        <p:nvPr/>
+      </p:nvGrpSpPr>
+      <p:grpSpPr>
+        <a:xfrm xmlns:a="http://schemas.openxmlformats.org/drawingml/2006/main"/>
+      </p:grpSpPr>
+      <p:sp>
+        <p:nvSpPr>
+          <p:cNvPr id="5" name="">
+            <a:extLst xmlns:a="http://schemas.openxmlformats.org/drawingml/2006/main">
+              <a:ext uri="{FF2B5EF4-FFF2-40B4-BE49-F238E27FC236}">
+                <a16:creationId xmlns:a16="http://schemas.microsoft.com/office/drawing/2014/main" id="{507E65A4-9547-4740-B716-1139303090EE}"/>
+              </a:ext>
+            </a:extLst>
+          </p:cNvPr>
+          <p:cNvSpPr>
+            <a:spLocks xmlns:a="http://schemas.openxmlformats.org/drawingml/2006/main" noGrp="1"/>
+          </p:cNvSpPr>
+          <p:nvPr/>
+        </p:nvSpPr>
+        <p:spPr>
+          <a:xfrm xmlns:a="http://schemas.openxmlformats.org/drawingml/2006/main">
+            <a:off x="685800" y="476250"/>
+            <a:ext cx="10668000" cy="714375"/>
+          </a:xfrm>
+          <a:prstGeom xmlns:a="http://schemas.openxmlformats.org/drawingml/2006/main" prst="rect">
+            <a:avLst/>
+          </a:prstGeom>
+          <a:noFill xmlns:a="http://schemas.openxmlformats.org/drawingml/2006/main"/>
+          <a:ln xmlns:a="http://schemas.openxmlformats.org/drawingml/2006/main" w="0">
+            <a:noFill/>
+            <a:prstDash val="solid"/>
+          </a:ln>
+        </p:spPr>
+        <p:txBody>
+          <a:bodyPr xmlns:a="http://schemas.openxmlformats.org/drawingml/2006/main"/>
+          <a:lstStyle xmlns:a="http://schemas.openxmlformats.org/drawingml/2006/main">
+            <a:defPPr>
+              <a:defRPr sz="3450" b="1">
+                <a:solidFill>
+                  <a:srgbClr val="56DDC0"/>
+                </a:solidFill>
+              </a:defRPr>
+            </a:defPPr>
+            <a:lvl1pPr>
+              <a:defRPr sz="3450" b="1">
+                <a:solidFill>
+                  <a:srgbClr val="56DDC0"/>
+                </a:solidFill>
+              </a:defRPr>
+            </a:lvl1pPr>
+            <a:lvl2pPr>
+              <a:defRPr sz="3450" b="1">
+                <a:solidFill>
+                  <a:srgbClr val="56DDC0"/>
+                </a:solidFill>
+              </a:defRPr>
+            </a:lvl2pPr>
+            <a:lvl3pPr>
+              <a:defRPr sz="3450" b="1">
+                <a:solidFill>
+                  <a:srgbClr val="56DDC0"/>
+                </a:solidFill>
+              </a:defRPr>
+            </a:lvl3pPr>
+            <a:lvl4pPr>
+              <a:defRPr sz="3450" b="1">
+                <a:solidFill>
+                  <a:srgbClr val="56DDC0"/>
+                </a:solidFill>
+              </a:defRPr>
+            </a:lvl4pPr>
+            <a:lvl5pPr>
+              <a:defRPr sz="3450" b="1">
+                <a:solidFill>
+                  <a:srgbClr val="56DDC0"/>
+                </a:solidFill>
+              </a:defRPr>
+            </a:lvl5pPr>
+            <a:lvl6pPr>
+              <a:defRPr sz="3450" b="1">
+                <a:solidFill>
+                  <a:srgbClr val="56DDC0"/>
+                </a:solidFill>
+              </a:defRPr>
+            </a:lvl6pPr>
+            <a:lvl7pPr>
+              <a:defRPr sz="3450" b="1">
+                <a:solidFill>
+                  <a:srgbClr val="56DDC0"/>
+                </a:solidFill>
+              </a:defRPr>
+            </a:lvl7pPr>
+            <a:lvl8pPr>
+              <a:defRPr sz="3450" b="1">
+                <a:solidFill>
+                  <a:srgbClr val="56DDC0"/>
+                </a:solidFill>
+              </a:defRPr>
+            </a:lvl8pPr>
+            <a:lvl9pPr>
+              <a:defRPr sz="3450" b="1">
+                <a:solidFill>
+                  <a:srgbClr val="56DDC0"/>
+                </a:solidFill>
+              </a:defRPr>
+            </a:lvl9pPr>
+          </a:lstStyle>
+          <a:p xmlns:a="http://schemas.openxmlformats.org/drawingml/2006/main">
+            <a:pPr>
+              <a:defRPr sz="3450" b="1">
+                <a:solidFill>
+                  <a:srgbClr val="56DDC0"/>
+                </a:solidFill>
+              </a:defRPr>
+            </a:pPr>
+            <a:r>
+              <a:rPr sz="3450" b="1">
+                <a:solidFill>
+                  <a:srgbClr val="56DDC0"/>
+                </a:solidFill>
+              </a:rPr>
+              <a:t>ChatGPT, Claude und weitere Modelle</a:t>
+            </a:r>
+          </a:p>
+        </p:txBody>
+      </p:sp>
+      <p:sp>
+        <p:nvSpPr>
+          <p:cNvPr id="2" name="">
+            <a:extLst xmlns:a="http://schemas.openxmlformats.org/drawingml/2006/main">
+              <a:ext uri="{FF2B5EF4-FFF2-40B4-BE49-F238E27FC236}">
+                <a16:creationId xmlns:a16="http://schemas.microsoft.com/office/drawing/2014/main" id="{E991BD84-13A7-4977-8E84-09D05702230C}"/>
+              </a:ext>
+            </a:extLst>
+          </p:cNvPr>
+          <p:cNvSpPr>
+            <a:spLocks xmlns:a="http://schemas.openxmlformats.org/drawingml/2006/main" noGrp="1"/>
+          </p:cNvSpPr>
+          <p:nvPr/>
+        </p:nvSpPr>
+        <p:spPr>
+          <a:xfrm xmlns:a="http://schemas.openxmlformats.org/drawingml/2006/main">
+            <a:off x="685800" y="1619250"/>
+            <a:ext cx="10668000" cy="1524000"/>
+          </a:xfrm>
+          <a:prstGeom xmlns:a="http://schemas.openxmlformats.org/drawingml/2006/main" prst="rect">
+            <a:avLst/>
+          </a:prstGeom>
+          <a:noFill xmlns:a="http://schemas.openxmlformats.org/drawingml/2006/main"/>
+          <a:ln xmlns:a="http://schemas.openxmlformats.org/drawingml/2006/main" w="0">
+            <a:noFill/>
+            <a:prstDash val="solid"/>
+          </a:ln>
+        </p:spPr>
+        <p:txBody>
+          <a:bodyPr xmlns:a="http://schemas.openxmlformats.org/drawingml/2006/main"/>
+          <a:lstStyle xmlns:a="http://schemas.openxmlformats.org/drawingml/2006/main">
+            <a:defPPr>
+              <a:defRPr sz="3150" b="1">
+                <a:solidFill>
+                  <a:srgbClr val="E8EDF6"/>
+                </a:solidFill>
+              </a:defRPr>
+            </a:defPPr>
+            <a:lvl1pPr>
+              <a:defRPr sz="3150" b="1">
+                <a:solidFill>
+                  <a:srgbClr val="E8EDF6"/>
+                </a:solidFill>
+              </a:defRPr>
+            </a:lvl1pPr>
+            <a:lvl2pPr>
+              <a:defRPr sz="3150" b="1">
+                <a:solidFill>
+                  <a:srgbClr val="E8EDF6"/>
+                </a:solidFill>
+              </a:defRPr>
+            </a:lvl2pPr>
+            <a:lvl3pPr>
+              <a:defRPr sz="3150" b="1">
+                <a:solidFill>
+                  <a:srgbClr val="E8EDF6"/>
+                </a:solidFill>
+              </a:defRPr>
+            </a:lvl3pPr>
+            <a:lvl4pPr>
+              <a:defRPr sz="3150" b="1">
+                <a:solidFill>
+                  <a:srgbClr val="E8EDF6"/>
+                </a:solidFill>
+              </a:defRPr>
+            </a:lvl4pPr>
+            <a:lvl5pPr>
+              <a:defRPr sz="3150" b="1">
+                <a:solidFill>
+                  <a:srgbClr val="E8EDF6"/>
+                </a:solidFill>
+              </a:defRPr>
+            </a:lvl5pPr>
+            <a:lvl6pPr>
+              <a:defRPr sz="3150" b="1">
+                <a:solidFill>
+                  <a:srgbClr val="E8EDF6"/>
+                </a:solidFill>
+              </a:defRPr>
+            </a:lvl6pPr>
+            <a:lvl7pPr>
+              <a:defRPr sz="3150" b="1">
+                <a:solidFill>
+                  <a:srgbClr val="E8EDF6"/>
+                </a:solidFill>
+              </a:defRPr>
+            </a:lvl7pPr>
+            <a:lvl8pPr>
+              <a:defRPr sz="3150" b="1">
+                <a:solidFill>
+                  <a:srgbClr val="E8EDF6"/>
+                </a:solidFill>
+              </a:defRPr>
+            </a:lvl8pPr>
+            <a:lvl9pPr>
+              <a:defRPr sz="3150" b="1">
+                <a:solidFill>
+                  <a:srgbClr val="E8EDF6"/>
+                </a:solidFill>
+              </a:defRPr>
+            </a:lvl9pPr>
+          </a:lstStyle>
+          <a:p xmlns:a="http://schemas.openxmlformats.org/drawingml/2006/main">
+            <a:pPr>
+              <a:defRPr sz="3150" b="1">
+                <a:solidFill>
+                  <a:srgbClr val="E8EDF6"/>
+                </a:solidFill>
+              </a:defRPr>
+            </a:pPr>
+            <a:r>
+              <a:rPr sz="3150" b="1">
+                <a:solidFill>
+                  <a:srgbClr val="E8EDF6"/>
+                </a:solidFill>
+              </a:rPr>
+              <a:t>Die Aufgabe bestimmt die Auswahl.</a:t>
+            </a:r>
+          </a:p>
+          <a:p xmlns:a="http://schemas.openxmlformats.org/drawingml/2006/main">
+            <a:pPr>
+              <a:defRPr sz="3150" b="1">
+                <a:solidFill>
+                  <a:srgbClr val="E8EDF6"/>
+                </a:solidFill>
+              </a:defRPr>
+            </a:pPr>
+            <a:r>
+              <a:rPr sz="3150" b="1">
+                <a:solidFill>
+                  <a:srgbClr val="E8EDF6"/>
+                </a:solidFill>
+              </a:rPr>
+              <a:t>Eigene Testfälle liefern den Vergleich.</a:t>
+            </a:r>
+          </a:p>
+        </p:txBody>
+      </p:sp>
+      <p:sp>
+        <p:nvSpPr>
+          <p:cNvPr id="3" name="">
+            <a:extLst xmlns:a="http://schemas.openxmlformats.org/drawingml/2006/main">
+              <a:ext uri="{FF2B5EF4-FFF2-40B4-BE49-F238E27FC236}">
+                <a16:creationId xmlns:a16="http://schemas.microsoft.com/office/drawing/2014/main" id="{EAA04E4C-3D88-4B01-B73F-17940B5E1847}"/>
+              </a:ext>
+            </a:extLst>
+          </p:cNvPr>
+          <p:cNvSpPr>
+            <a:spLocks xmlns:a="http://schemas.openxmlformats.org/drawingml/2006/main" noGrp="1"/>
+          </p:cNvSpPr>
+          <p:nvPr/>
+        </p:nvSpPr>
+        <p:spPr>
+          <a:xfrm xmlns:a="http://schemas.openxmlformats.org/drawingml/2006/main">
+            <a:off x="685800" y="3429000"/>
+            <a:ext cx="10668000" cy="1428750"/>
+          </a:xfrm>
+          <a:prstGeom xmlns:a="http://schemas.openxmlformats.org/drawingml/2006/main" prst="rect">
+            <a:avLst/>
+          </a:prstGeom>
+          <a:noFill xmlns:a="http://schemas.openxmlformats.org/drawingml/2006/main"/>
+          <a:ln xmlns:a="http://schemas.openxmlformats.org/drawingml/2006/main" w="0">
+            <a:noFill/>
+            <a:prstDash val="solid"/>
+          </a:ln>
+        </p:spPr>
+        <p:txBody>
+          <a:bodyPr xmlns:a="http://schemas.openxmlformats.org/drawingml/2006/main"/>
+          <a:lstStyle xmlns:a="http://schemas.openxmlformats.org/drawingml/2006/main">
+            <a:defPPr>
+              <a:defRPr sz="2100" b="0">
+                <a:solidFill>
+                  <a:srgbClr val="C1D0E1"/>
+                </a:solidFill>
+              </a:defRPr>
+            </a:defPPr>
+            <a:lvl1pPr>
+              <a:defRPr sz="2100" b="0">
+                <a:solidFill>
+                  <a:srgbClr val="C1D0E1"/>
+                </a:solidFill>
+              </a:defRPr>
+            </a:lvl1pPr>
+            <a:lvl2pPr>
+              <a:defRPr sz="2100" b="0">
+                <a:solidFill>
+                  <a:srgbClr val="C1D0E1"/>
+                </a:solidFill>
+              </a:defRPr>
+            </a:lvl2pPr>
+            <a:lvl3pPr>
+              <a:defRPr sz="2100" b="0">
+                <a:solidFill>
+                  <a:srgbClr val="C1D0E1"/>
+                </a:solidFill>
+              </a:defRPr>
+            </a:lvl3pPr>
+            <a:lvl4pPr>
+              <a:defRPr sz="2100" b="0">
+                <a:solidFill>
+                  <a:srgbClr val="C1D0E1"/>
+                </a:solidFill>
+              </a:defRPr>
+            </a:lvl4pPr>
+            <a:lvl5pPr>
+              <a:defRPr sz="2100" b="0">
+                <a:solidFill>
+                  <a:srgbClr val="C1D0E1"/>
+                </a:solidFill>
+              </a:defRPr>
+            </a:lvl5pPr>
+            <a:lvl6pPr>
+              <a:defRPr sz="2100" b="0">
+                <a:solidFill>
+                  <a:srgbClr val="C1D0E1"/>
+                </a:solidFill>
+              </a:defRPr>
+            </a:lvl6pPr>
+            <a:lvl7pPr>
+              <a:defRPr sz="2100" b="0">
+                <a:solidFill>
+                  <a:srgbClr val="C1D0E1"/>
+                </a:solidFill>
+              </a:defRPr>
+            </a:lvl7pPr>
+            <a:lvl8pPr>
+              <a:defRPr sz="2100" b="0">
+                <a:solidFill>
+                  <a:srgbClr val="C1D0E1"/>
+                </a:solidFill>
+              </a:defRPr>
+            </a:lvl8pPr>
+            <a:lvl9pPr>
+              <a:defRPr sz="2100" b="0">
+                <a:solidFill>
+                  <a:srgbClr val="C1D0E1"/>
+                </a:solidFill>
+              </a:defRPr>
+            </a:lvl9pPr>
+          </a:lstStyle>
+          <a:p xmlns:a="http://schemas.openxmlformats.org/drawingml/2006/main">
+            <a:pPr>
+              <a:defRPr sz="2100" b="0">
+                <a:solidFill>
+                  <a:srgbClr val="C1D0E1"/>
+                </a:solidFill>
+              </a:defRPr>
+            </a:pPr>
+            <a:r>
+              <a:rPr sz="2100" b="0">
+                <a:solidFill>
+                  <a:srgbClr val="C1D0E1"/>
+                </a:solidFill>
+              </a:rPr>
+              <a:t>Optionale OpenAI- und Anthropic-Adapter formulieren Entwürfe.</a:t>
+            </a:r>
+          </a:p>
+          <a:p xmlns:a="http://schemas.openxmlformats.org/drawingml/2006/main">
+            <a:pPr>
+              <a:defRPr sz="2100" b="0">
+                <a:solidFill>
+                  <a:srgbClr val="C1D0E1"/>
+                </a:solidFill>
+              </a:defRPr>
+            </a:pPr>
+            <a:r>
+              <a:rPr sz="2100" b="0">
+                <a:solidFill>
+                  <a:srgbClr val="C1D0E1"/>
+                </a:solidFill>
+              </a:rPr>
+              <a:t>Gemini und lokale Modelle bleiben Architekturoptionen.</a:t>
+            </a:r>
+          </a:p>
+        </p:txBody>
+      </p:sp>
+      <p:sp>
+        <p:nvSpPr>
+          <p:cNvPr id="4" name="">
+            <a:extLst xmlns:a="http://schemas.openxmlformats.org/drawingml/2006/main">
+              <a:ext uri="{FF2B5EF4-FFF2-40B4-BE49-F238E27FC236}">
+                <a16:creationId xmlns:a16="http://schemas.microsoft.com/office/drawing/2014/main" id="{C77CC780-126F-4F6D-879C-AE643B59E5B9}"/>
+              </a:ext>
+            </a:extLst>
+          </p:cNvPr>
+          <p:cNvSpPr>
+            <a:spLocks xmlns:a="http://schemas.openxmlformats.org/drawingml/2006/main" noGrp="1"/>
+          </p:cNvSpPr>
+          <p:nvPr/>
+        </p:nvSpPr>
+        <p:spPr>
+          <a:xfrm xmlns:a="http://schemas.openxmlformats.org/drawingml/2006/main">
+            <a:off x="685800" y="5619750"/>
+            <a:ext cx="10668000" cy="666750"/>
+          </a:xfrm>
+          <a:prstGeom xmlns:a="http://schemas.openxmlformats.org/drawingml/2006/main" prst="rect">
+            <a:avLst/>
+          </a:prstGeom>
+          <a:noFill xmlns:a="http://schemas.openxmlformats.org/drawingml/2006/main"/>
+          <a:ln xmlns:a="http://schemas.openxmlformats.org/drawingml/2006/main" w="0">
+            <a:noFill/>
+            <a:prstDash val="solid"/>
+          </a:ln>
+        </p:spPr>
+        <p:txBody>
+          <a:bodyPr xmlns:a="http://schemas.openxmlformats.org/drawingml/2006/main"/>
+          <a:lstStyle xmlns:a="http://schemas.openxmlformats.org/drawingml/2006/main">
+            <a:defPPr>
+              <a:defRPr sz="1725" b="0">
+                <a:solidFill>
+                  <a:srgbClr val="FF9D8A"/>
+                </a:solidFill>
+              </a:defRPr>
+            </a:defPPr>
+            <a:lvl1pPr>
+              <a:defRPr sz="1725" b="0">
+                <a:solidFill>
+                  <a:srgbClr val="FF9D8A"/>
+                </a:solidFill>
+              </a:defRPr>
+            </a:lvl1pPr>
+            <a:lvl2pPr>
+              <a:defRPr sz="1725" b="0">
+                <a:solidFill>
+                  <a:srgbClr val="FF9D8A"/>
+                </a:solidFill>
+              </a:defRPr>
+            </a:lvl2pPr>
+            <a:lvl3pPr>
+              <a:defRPr sz="1725" b="0">
+                <a:solidFill>
+                  <a:srgbClr val="FF9D8A"/>
+                </a:solidFill>
+              </a:defRPr>
+            </a:lvl3pPr>
+            <a:lvl4pPr>
+              <a:defRPr sz="1725" b="0">
+                <a:solidFill>
+                  <a:srgbClr val="FF9D8A"/>
+                </a:solidFill>
+              </a:defRPr>
+            </a:lvl4pPr>
+            <a:lvl5pPr>
+              <a:defRPr sz="1725" b="0">
+                <a:solidFill>
+                  <a:srgbClr val="FF9D8A"/>
+                </a:solidFill>
+              </a:defRPr>
+            </a:lvl5pPr>
+            <a:lvl6pPr>
+              <a:defRPr sz="1725" b="0">
+                <a:solidFill>
+                  <a:srgbClr val="FF9D8A"/>
+                </a:solidFill>
+              </a:defRPr>
+            </a:lvl6pPr>
+            <a:lvl7pPr>
+              <a:defRPr sz="1725" b="0">
+                <a:solidFill>
+                  <a:srgbClr val="FF9D8A"/>
+                </a:solidFill>
+              </a:defRPr>
+            </a:lvl7pPr>
+            <a:lvl8pPr>
+              <a:defRPr sz="1725" b="0">
+                <a:solidFill>
+                  <a:srgbClr val="FF9D8A"/>
+                </a:solidFill>
+              </a:defRPr>
+            </a:lvl8pPr>
+            <a:lvl9pPr>
+              <a:defRPr sz="1725" b="0">
+                <a:solidFill>
+                  <a:srgbClr val="FF9D8A"/>
+                </a:solidFill>
+              </a:defRPr>
+            </a:lvl9pPr>
+          </a:lstStyle>
+          <a:p xmlns:a="http://schemas.openxmlformats.org/drawingml/2006/main">
+            <a:pPr>
+              <a:defRPr sz="1725" b="0">
+                <a:solidFill>
+                  <a:srgbClr val="FF9D8A"/>
+                </a:solidFill>
+              </a:defRPr>
+            </a:pPr>
+            <a:r>
+              <a:rPr sz="1725" b="0">
+                <a:solidFill>
+                  <a:srgbClr val="FF9D8A"/>
+                </a:solidFill>
+              </a:rPr>
+              <a:t>Ein Markenname ist kein Konfidenzintervall.</a:t>
+            </a:r>
+          </a:p>
+        </p:txBody>
+      </p:sp>
+    </p:spTree>
+    <p:extLst>
+      <p:ext uri="{BB962C8B-B14F-4D97-AF65-F5344CB8AC3E}">
+        <p14:creationId xmlns:p14="http://schemas.microsoft.com/office/powerpoint/2010/main" val="179202447"/>
+      </p:ext>
+    </p:extLst>
+  </p:cSld>
+</p:sld>
+</file>
+
+<file path=ppt/slides/slide11.xml><?xml version="1.0" encoding="utf-8"?>
+<p:sld xmlns:p="http://schemas.openxmlformats.org/presentationml/2006/main">
+  <p:cSld>
+    <p:bg>
+      <p:bgPr>
+        <a:solidFill xmlns:a="http://schemas.openxmlformats.org/drawingml/2006/main">
+          <a:srgbClr val="0B1220"/>
+        </a:solidFill>
+      </p:bgPr>
+    </p:bg>
+    <p:spTree>
+      <p:nvGrpSpPr>
+        <p:cNvPr id="1" name=""/>
+        <p:cNvGrpSpPr/>
+        <p:nvPr/>
+      </p:nvGrpSpPr>
+      <p:grpSpPr>
+        <a:xfrm xmlns:a="http://schemas.openxmlformats.org/drawingml/2006/main"/>
+      </p:grpSpPr>
+      <p:sp>
+        <p:nvSpPr>
+          <p:cNvPr id="5" name="">
+            <a:extLst xmlns:a="http://schemas.openxmlformats.org/drawingml/2006/main">
+              <a:ext uri="{FF2B5EF4-FFF2-40B4-BE49-F238E27FC236}">
+                <a16:creationId xmlns:a16="http://schemas.microsoft.com/office/drawing/2014/main" id="{9746BADB-0B8C-4505-A6EB-89D35266BD5E}"/>
+              </a:ext>
+            </a:extLst>
+          </p:cNvPr>
+          <p:cNvSpPr>
+            <a:spLocks xmlns:a="http://schemas.openxmlformats.org/drawingml/2006/main" noGrp="1"/>
+          </p:cNvSpPr>
+          <p:nvPr/>
+        </p:nvSpPr>
+        <p:spPr>
+          <a:xfrm xmlns:a="http://schemas.openxmlformats.org/drawingml/2006/main">
+            <a:off x="685800" y="476250"/>
+            <a:ext cx="10668000" cy="714375"/>
+          </a:xfrm>
+          <a:prstGeom xmlns:a="http://schemas.openxmlformats.org/drawingml/2006/main" prst="rect">
+            <a:avLst/>
+          </a:prstGeom>
+          <a:noFill xmlns:a="http://schemas.openxmlformats.org/drawingml/2006/main"/>
+          <a:ln xmlns:a="http://schemas.openxmlformats.org/drawingml/2006/main" w="0">
+            <a:noFill/>
+            <a:prstDash val="solid"/>
+          </a:ln>
+        </p:spPr>
+        <p:txBody>
+          <a:bodyPr xmlns:a="http://schemas.openxmlformats.org/drawingml/2006/main"/>
+          <a:lstStyle xmlns:a="http://schemas.openxmlformats.org/drawingml/2006/main">
+            <a:defPPr>
+              <a:defRPr sz="3450" b="1">
+                <a:solidFill>
+                  <a:srgbClr val="56DDC0"/>
+                </a:solidFill>
+              </a:defRPr>
+            </a:defPPr>
+            <a:lvl1pPr>
+              <a:defRPr sz="3450" b="1">
+                <a:solidFill>
+                  <a:srgbClr val="56DDC0"/>
+                </a:solidFill>
+              </a:defRPr>
+            </a:lvl1pPr>
+            <a:lvl2pPr>
+              <a:defRPr sz="3450" b="1">
+                <a:solidFill>
+                  <a:srgbClr val="56DDC0"/>
+                </a:solidFill>
+              </a:defRPr>
+            </a:lvl2pPr>
+            <a:lvl3pPr>
+              <a:defRPr sz="3450" b="1">
+                <a:solidFill>
+                  <a:srgbClr val="56DDC0"/>
+                </a:solidFill>
+              </a:defRPr>
+            </a:lvl3pPr>
+            <a:lvl4pPr>
+              <a:defRPr sz="3450" b="1">
+                <a:solidFill>
+                  <a:srgbClr val="56DDC0"/>
+                </a:solidFill>
+              </a:defRPr>
+            </a:lvl4pPr>
+            <a:lvl5pPr>
+              <a:defRPr sz="3450" b="1">
+                <a:solidFill>
+                  <a:srgbClr val="56DDC0"/>
+                </a:solidFill>
+              </a:defRPr>
+            </a:lvl5pPr>
+            <a:lvl6pPr>
+              <a:defRPr sz="3450" b="1">
+                <a:solidFill>
+                  <a:srgbClr val="56DDC0"/>
+                </a:solidFill>
+              </a:defRPr>
+            </a:lvl6pPr>
+            <a:lvl7pPr>
+              <a:defRPr sz="3450" b="1">
+                <a:solidFill>
+                  <a:srgbClr val="56DDC0"/>
+                </a:solidFill>
+              </a:defRPr>
+            </a:lvl7pPr>
+            <a:lvl8pPr>
+              <a:defRPr sz="3450" b="1">
+                <a:solidFill>
+                  <a:srgbClr val="56DDC0"/>
+                </a:solidFill>
+              </a:defRPr>
+            </a:lvl8pPr>
+            <a:lvl9pPr>
+              <a:defRPr sz="3450" b="1">
+                <a:solidFill>
+                  <a:srgbClr val="56DDC0"/>
+                </a:solidFill>
+              </a:defRPr>
+            </a:lvl9pPr>
+          </a:lstStyle>
+          <a:p xmlns:a="http://schemas.openxmlformats.org/drawingml/2006/main">
+            <a:pPr>
+              <a:defRPr sz="3450" b="1">
+                <a:solidFill>
+                  <a:srgbClr val="56DDC0"/>
+                </a:solidFill>
+              </a:defRPr>
+            </a:pPr>
+            <a:r>
+              <a:rPr sz="3450" b="1">
+                <a:solidFill>
+                  <a:srgbClr val="56DDC0"/>
+                </a:solidFill>
+              </a:rPr>
+              <a:t>Die Agenten-Kommandozentrale</a:t>
+            </a:r>
+          </a:p>
+        </p:txBody>
+      </p:sp>
+      <p:sp>
+        <p:nvSpPr>
+          <p:cNvPr id="2" name="">
+            <a:extLst xmlns:a="http://schemas.openxmlformats.org/drawingml/2006/main">
+              <a:ext uri="{FF2B5EF4-FFF2-40B4-BE49-F238E27FC236}">
+                <a16:creationId xmlns:a16="http://schemas.microsoft.com/office/drawing/2014/main" id="{22E0AA46-B8A2-4CAE-B408-C6C4EA134857}"/>
+              </a:ext>
+            </a:extLst>
+          </p:cNvPr>
+          <p:cNvSpPr>
+            <a:spLocks xmlns:a="http://schemas.openxmlformats.org/drawingml/2006/main" noGrp="1"/>
+          </p:cNvSpPr>
+          <p:nvPr/>
+        </p:nvSpPr>
+        <p:spPr>
+          <a:xfrm xmlns:a="http://schemas.openxmlformats.org/drawingml/2006/main">
+            <a:off x="685800" y="1619250"/>
+            <a:ext cx="10668000" cy="1524000"/>
+          </a:xfrm>
+          <a:prstGeom xmlns:a="http://schemas.openxmlformats.org/drawingml/2006/main" prst="rect">
+            <a:avLst/>
+          </a:prstGeom>
+          <a:noFill xmlns:a="http://schemas.openxmlformats.org/drawingml/2006/main"/>
+          <a:ln xmlns:a="http://schemas.openxmlformats.org/drawingml/2006/main" w="0">
+            <a:noFill/>
+            <a:prstDash val="solid"/>
+          </a:ln>
+        </p:spPr>
+        <p:txBody>
+          <a:bodyPr xmlns:a="http://schemas.openxmlformats.org/drawingml/2006/main"/>
+          <a:lstStyle xmlns:a="http://schemas.openxmlformats.org/drawingml/2006/main">
+            <a:defPPr>
+              <a:defRPr sz="3150" b="1">
+                <a:solidFill>
+                  <a:srgbClr val="E8EDF6"/>
+                </a:solidFill>
+              </a:defRPr>
+            </a:defPPr>
+            <a:lvl1pPr>
+              <a:defRPr sz="3150" b="1">
+                <a:solidFill>
+                  <a:srgbClr val="E8EDF6"/>
+                </a:solidFill>
+              </a:defRPr>
+            </a:lvl1pPr>
+            <a:lvl2pPr>
+              <a:defRPr sz="3150" b="1">
+                <a:solidFill>
+                  <a:srgbClr val="E8EDF6"/>
+                </a:solidFill>
+              </a:defRPr>
+            </a:lvl2pPr>
+            <a:lvl3pPr>
+              <a:defRPr sz="3150" b="1">
+                <a:solidFill>
+                  <a:srgbClr val="E8EDF6"/>
+                </a:solidFill>
+              </a:defRPr>
+            </a:lvl3pPr>
+            <a:lvl4pPr>
+              <a:defRPr sz="3150" b="1">
+                <a:solidFill>
+                  <a:srgbClr val="E8EDF6"/>
+                </a:solidFill>
+              </a:defRPr>
+            </a:lvl4pPr>
+            <a:lvl5pPr>
+              <a:defRPr sz="3150" b="1">
+                <a:solidFill>
+                  <a:srgbClr val="E8EDF6"/>
+                </a:solidFill>
+              </a:defRPr>
+            </a:lvl5pPr>
+            <a:lvl6pPr>
+              <a:defRPr sz="3150" b="1">
+                <a:solidFill>
+                  <a:srgbClr val="E8EDF6"/>
+                </a:solidFill>
+              </a:defRPr>
+            </a:lvl6pPr>
+            <a:lvl7pPr>
+              <a:defRPr sz="3150" b="1">
+                <a:solidFill>
+                  <a:srgbClr val="E8EDF6"/>
+                </a:solidFill>
+              </a:defRPr>
+            </a:lvl7pPr>
+            <a:lvl8pPr>
+              <a:defRPr sz="3150" b="1">
+                <a:solidFill>
+                  <a:srgbClr val="E8EDF6"/>
+                </a:solidFill>
+              </a:defRPr>
+            </a:lvl8pPr>
+            <a:lvl9pPr>
+              <a:defRPr sz="3150" b="1">
+                <a:solidFill>
+                  <a:srgbClr val="E8EDF6"/>
+                </a:solidFill>
+              </a:defRPr>
+            </a:lvl9pPr>
+          </a:lstStyle>
+          <a:p xmlns:a="http://schemas.openxmlformats.org/drawingml/2006/main">
+            <a:pPr>
+              <a:defRPr sz="3150" b="1">
+                <a:solidFill>
+                  <a:srgbClr val="E8EDF6"/>
+                </a:solidFill>
+              </a:defRPr>
+            </a:pPr>
+            <a:r>
+              <a:rPr sz="3150" b="1">
+                <a:solidFill>
+                  <a:srgbClr val="E8EDF6"/>
+                </a:solidFill>
+              </a:rPr>
+              <a:t>Der Controller rechnet.</a:t>
+            </a:r>
+          </a:p>
+          <a:p xmlns:a="http://schemas.openxmlformats.org/drawingml/2006/main">
+            <a:pPr>
+              <a:defRPr sz="3150" b="1">
+                <a:solidFill>
+                  <a:srgbClr val="E8EDF6"/>
+                </a:solidFill>
+              </a:defRPr>
+            </a:pPr>
+            <a:r>
+              <a:rPr sz="3150" b="1">
+                <a:solidFill>
+                  <a:srgbClr val="E8EDF6"/>
+                </a:solidFill>
+              </a:rPr>
+              <a:t>Der Einkauf prüft den Bestand.</a:t>
+            </a:r>
+          </a:p>
+        </p:txBody>
+      </p:sp>
+      <p:sp>
+        <p:nvSpPr>
+          <p:cNvPr id="3" name="">
+            <a:extLst xmlns:a="http://schemas.openxmlformats.org/drawingml/2006/main">
+              <a:ext uri="{FF2B5EF4-FFF2-40B4-BE49-F238E27FC236}">
+                <a16:creationId xmlns:a16="http://schemas.microsoft.com/office/drawing/2014/main" id="{787FA1DC-AFCF-4C3B-B943-E32E1F989858}"/>
+              </a:ext>
+            </a:extLst>
+          </p:cNvPr>
+          <p:cNvSpPr>
+            <a:spLocks xmlns:a="http://schemas.openxmlformats.org/drawingml/2006/main" noGrp="1"/>
+          </p:cNvSpPr>
+          <p:nvPr/>
+        </p:nvSpPr>
+        <p:spPr>
+          <a:xfrm xmlns:a="http://schemas.openxmlformats.org/drawingml/2006/main">
+            <a:off x="685800" y="3429000"/>
+            <a:ext cx="10668000" cy="1428750"/>
+          </a:xfrm>
+          <a:prstGeom xmlns:a="http://schemas.openxmlformats.org/drawingml/2006/main" prst="rect">
+            <a:avLst/>
+          </a:prstGeom>
+          <a:noFill xmlns:a="http://schemas.openxmlformats.org/drawingml/2006/main"/>
+          <a:ln xmlns:a="http://schemas.openxmlformats.org/drawingml/2006/main" w="0">
+            <a:noFill/>
+            <a:prstDash val="solid"/>
+          </a:ln>
+        </p:spPr>
+        <p:txBody>
+          <a:bodyPr xmlns:a="http://schemas.openxmlformats.org/drawingml/2006/main"/>
+          <a:lstStyle xmlns:a="http://schemas.openxmlformats.org/drawingml/2006/main">
+            <a:defPPr>
+              <a:defRPr sz="2100" b="0">
+                <a:solidFill>
+                  <a:srgbClr val="C1D0E1"/>
+                </a:solidFill>
+              </a:defRPr>
+            </a:defPPr>
+            <a:lvl1pPr>
+              <a:defRPr sz="2100" b="0">
+                <a:solidFill>
+                  <a:srgbClr val="C1D0E1"/>
+                </a:solidFill>
+              </a:defRPr>
+            </a:lvl1pPr>
+            <a:lvl2pPr>
+              <a:defRPr sz="2100" b="0">
+                <a:solidFill>
+                  <a:srgbClr val="C1D0E1"/>
+                </a:solidFill>
+              </a:defRPr>
+            </a:lvl2pPr>
+            <a:lvl3pPr>
+              <a:defRPr sz="2100" b="0">
+                <a:solidFill>
+                  <a:srgbClr val="C1D0E1"/>
+                </a:solidFill>
+              </a:defRPr>
+            </a:lvl3pPr>
+            <a:lvl4pPr>
+              <a:defRPr sz="2100" b="0">
+                <a:solidFill>
+                  <a:srgbClr val="C1D0E1"/>
+                </a:solidFill>
+              </a:defRPr>
+            </a:lvl4pPr>
+            <a:lvl5pPr>
+              <a:defRPr sz="2100" b="0">
+                <a:solidFill>
+                  <a:srgbClr val="C1D0E1"/>
+                </a:solidFill>
+              </a:defRPr>
+            </a:lvl5pPr>
+            <a:lvl6pPr>
+              <a:defRPr sz="2100" b="0">
+                <a:solidFill>
+                  <a:srgbClr val="C1D0E1"/>
+                </a:solidFill>
+              </a:defRPr>
+            </a:lvl6pPr>
+            <a:lvl7pPr>
+              <a:defRPr sz="2100" b="0">
+                <a:solidFill>
+                  <a:srgbClr val="C1D0E1"/>
+                </a:solidFill>
+              </a:defRPr>
+            </a:lvl7pPr>
+            <a:lvl8pPr>
+              <a:defRPr sz="2100" b="0">
+                <a:solidFill>
+                  <a:srgbClr val="C1D0E1"/>
+                </a:solidFill>
+              </a:defRPr>
+            </a:lvl8pPr>
+            <a:lvl9pPr>
+              <a:defRPr sz="2100" b="0">
+                <a:solidFill>
+                  <a:srgbClr val="C1D0E1"/>
+                </a:solidFill>
+              </a:defRPr>
+            </a:lvl9pPr>
+          </a:lstStyle>
+          <a:p xmlns:a="http://schemas.openxmlformats.org/drawingml/2006/main">
+            <a:pPr>
+              <a:defRPr sz="2100" b="0">
+                <a:solidFill>
+                  <a:srgbClr val="C1D0E1"/>
+                </a:solidFill>
+              </a:defRPr>
+            </a:pPr>
+            <a:r>
+              <a:rPr sz="2100" b="0">
+                <a:solidFill>
+                  <a:srgbClr val="C1D0E1"/>
+                </a:solidFill>
+              </a:rPr>
+              <a:t>Das Cockpit berechnet DB und Meldebestand.</a:t>
+            </a:r>
+          </a:p>
+          <a:p xmlns:a="http://schemas.openxmlformats.org/drawingml/2006/main">
+            <a:pPr>
+              <a:defRPr sz="2100" b="0">
+                <a:solidFill>
+                  <a:srgbClr val="C1D0E1"/>
+                </a:solidFill>
+              </a:defRPr>
+            </a:pPr>
+            <a:r>
+              <a:rPr sz="2100" b="0">
+                <a:solidFill>
+                  <a:srgbClr val="C1D0E1"/>
+                </a:solidFill>
+              </a:rPr>
+              <a:t>Es sucht Handbuchquellen und protokolliert Ergebnisse.</a:t>
+            </a:r>
+          </a:p>
+        </p:txBody>
+      </p:sp>
+      <p:sp>
+        <p:nvSpPr>
+          <p:cNvPr id="4" name="">
+            <a:extLst xmlns:a="http://schemas.openxmlformats.org/drawingml/2006/main">
+              <a:ext uri="{FF2B5EF4-FFF2-40B4-BE49-F238E27FC236}">
+                <a16:creationId xmlns:a16="http://schemas.microsoft.com/office/drawing/2014/main" id="{40FC1747-CB86-44A3-966B-1286A5B756E4}"/>
+              </a:ext>
+            </a:extLst>
+          </p:cNvPr>
+          <p:cNvSpPr>
+            <a:spLocks xmlns:a="http://schemas.openxmlformats.org/drawingml/2006/main" noGrp="1"/>
+          </p:cNvSpPr>
+          <p:nvPr/>
+        </p:nvSpPr>
+        <p:spPr>
+          <a:xfrm xmlns:a="http://schemas.openxmlformats.org/drawingml/2006/main">
+            <a:off x="685800" y="5619750"/>
+            <a:ext cx="10668000" cy="666750"/>
+          </a:xfrm>
+          <a:prstGeom xmlns:a="http://schemas.openxmlformats.org/drawingml/2006/main" prst="rect">
+            <a:avLst/>
+          </a:prstGeom>
+          <a:noFill xmlns:a="http://schemas.openxmlformats.org/drawingml/2006/main"/>
+          <a:ln xmlns:a="http://schemas.openxmlformats.org/drawingml/2006/main" w="0">
+            <a:noFill/>
+            <a:prstDash val="solid"/>
+          </a:ln>
+        </p:spPr>
+        <p:txBody>
+          <a:bodyPr xmlns:a="http://schemas.openxmlformats.org/drawingml/2006/main"/>
+          <a:lstStyle xmlns:a="http://schemas.openxmlformats.org/drawingml/2006/main">
+            <a:defPPr>
+              <a:defRPr sz="1725" b="0">
+                <a:solidFill>
+                  <a:srgbClr val="FF9D8A"/>
+                </a:solidFill>
+              </a:defRPr>
+            </a:defPPr>
+            <a:lvl1pPr>
+              <a:defRPr sz="1725" b="0">
+                <a:solidFill>
+                  <a:srgbClr val="FF9D8A"/>
+                </a:solidFill>
+              </a:defRPr>
+            </a:lvl1pPr>
+            <a:lvl2pPr>
+              <a:defRPr sz="1725" b="0">
+                <a:solidFill>
+                  <a:srgbClr val="FF9D8A"/>
+                </a:solidFill>
+              </a:defRPr>
+            </a:lvl2pPr>
+            <a:lvl3pPr>
+              <a:defRPr sz="1725" b="0">
+                <a:solidFill>
+                  <a:srgbClr val="FF9D8A"/>
+                </a:solidFill>
+              </a:defRPr>
+            </a:lvl3pPr>
+            <a:lvl4pPr>
+              <a:defRPr sz="1725" b="0">
+                <a:solidFill>
+                  <a:srgbClr val="FF9D8A"/>
+                </a:solidFill>
+              </a:defRPr>
+            </a:lvl4pPr>
+            <a:lvl5pPr>
+              <a:defRPr sz="1725" b="0">
+                <a:solidFill>
+                  <a:srgbClr val="FF9D8A"/>
+                </a:solidFill>
+              </a:defRPr>
+            </a:lvl5pPr>
+            <a:lvl6pPr>
+              <a:defRPr sz="1725" b="0">
+                <a:solidFill>
+                  <a:srgbClr val="FF9D8A"/>
+                </a:solidFill>
+              </a:defRPr>
+            </a:lvl6pPr>
+            <a:lvl7pPr>
+              <a:defRPr sz="1725" b="0">
+                <a:solidFill>
+                  <a:srgbClr val="FF9D8A"/>
+                </a:solidFill>
+              </a:defRPr>
+            </a:lvl7pPr>
+            <a:lvl8pPr>
+              <a:defRPr sz="1725" b="0">
+                <a:solidFill>
+                  <a:srgbClr val="FF9D8A"/>
+                </a:solidFill>
+              </a:defRPr>
+            </a:lvl8pPr>
+            <a:lvl9pPr>
+              <a:defRPr sz="1725" b="0">
+                <a:solidFill>
+                  <a:srgbClr val="FF9D8A"/>
+                </a:solidFill>
+              </a:defRPr>
+            </a:lvl9pPr>
+          </a:lstStyle>
+          <a:p xmlns:a="http://schemas.openxmlformats.org/drawingml/2006/main">
+            <a:pPr>
+              <a:defRPr sz="1725" b="0">
+                <a:solidFill>
+                  <a:srgbClr val="FF9D8A"/>
+                </a:solidFill>
+              </a:defRPr>
+            </a:pPr>
+            <a:r>
+              <a:rPr sz="1725" b="0">
+                <a:solidFill>
+                  <a:srgbClr val="FF9D8A"/>
+                </a:solidFill>
+              </a:rPr>
+              <a:t>Die Bestellung bleibt beim Einkauf. Der Agent hat keinen Einkaufswagenführerschein.</a:t>
+            </a:r>
+          </a:p>
+        </p:txBody>
+      </p:sp>
+    </p:spTree>
+    <p:extLst>
+      <p:ext uri="{BB962C8B-B14F-4D97-AF65-F5344CB8AC3E}">
+        <p14:creationId xmlns:p14="http://schemas.microsoft.com/office/powerpoint/2010/main" val="723318041"/>
+      </p:ext>
+    </p:extLst>
+  </p:cSld>
+</p:sld>
+</file>
+
+<file path=ppt/slides/slide12.xml><?xml version="1.0" encoding="utf-8"?>
+<p:sld xmlns:p="http://schemas.openxmlformats.org/presentationml/2006/main">
+  <p:cSld>
+    <p:bg>
+      <p:bgPr>
+        <a:solidFill xmlns:a="http://schemas.openxmlformats.org/drawingml/2006/main">
+          <a:srgbClr val="0B1220"/>
+        </a:solidFill>
+      </p:bgPr>
+    </p:bg>
+    <p:spTree>
+      <p:nvGrpSpPr>
+        <p:cNvPr id="1" name=""/>
+        <p:cNvGrpSpPr/>
+        <p:nvPr/>
+      </p:nvGrpSpPr>
+      <p:grpSpPr>
+        <a:xfrm xmlns:a="http://schemas.openxmlformats.org/drawingml/2006/main"/>
+      </p:grpSpPr>
+      <p:sp>
+        <p:nvSpPr>
+          <p:cNvPr id="5" name="">
+            <a:extLst xmlns:a="http://schemas.openxmlformats.org/drawingml/2006/main">
+              <a:ext uri="{FF2B5EF4-FFF2-40B4-BE49-F238E27FC236}">
+                <a16:creationId xmlns:a16="http://schemas.microsoft.com/office/drawing/2014/main" id="{ABF8C165-15EB-4353-80D9-BC8AC5772AA5}"/>
+              </a:ext>
+            </a:extLst>
+          </p:cNvPr>
+          <p:cNvSpPr>
+            <a:spLocks xmlns:a="http://schemas.openxmlformats.org/drawingml/2006/main" noGrp="1"/>
+          </p:cNvSpPr>
+          <p:nvPr/>
+        </p:nvSpPr>
+        <p:spPr>
+          <a:xfrm xmlns:a="http://schemas.openxmlformats.org/drawingml/2006/main">
+            <a:off x="685800" y="476250"/>
+            <a:ext cx="10668000" cy="714375"/>
+          </a:xfrm>
+          <a:prstGeom xmlns:a="http://schemas.openxmlformats.org/drawingml/2006/main" prst="rect">
+            <a:avLst/>
+          </a:prstGeom>
+          <a:noFill xmlns:a="http://schemas.openxmlformats.org/drawingml/2006/main"/>
+          <a:ln xmlns:a="http://schemas.openxmlformats.org/drawingml/2006/main" w="0">
+            <a:noFill/>
+            <a:prstDash val="solid"/>
+          </a:ln>
+        </p:spPr>
+        <p:txBody>
+          <a:bodyPr xmlns:a="http://schemas.openxmlformats.org/drawingml/2006/main"/>
+          <a:lstStyle xmlns:a="http://schemas.openxmlformats.org/drawingml/2006/main">
+            <a:defPPr>
+              <a:defRPr sz="3450" b="1">
+                <a:solidFill>
+                  <a:srgbClr val="56DDC0"/>
+                </a:solidFill>
+              </a:defRPr>
+            </a:defPPr>
+            <a:lvl1pPr>
+              <a:defRPr sz="3450" b="1">
+                <a:solidFill>
+                  <a:srgbClr val="56DDC0"/>
+                </a:solidFill>
+              </a:defRPr>
+            </a:lvl1pPr>
+            <a:lvl2pPr>
+              <a:defRPr sz="3450" b="1">
+                <a:solidFill>
+                  <a:srgbClr val="56DDC0"/>
+                </a:solidFill>
+              </a:defRPr>
+            </a:lvl2pPr>
+            <a:lvl3pPr>
+              <a:defRPr sz="3450" b="1">
+                <a:solidFill>
+                  <a:srgbClr val="56DDC0"/>
+                </a:solidFill>
+              </a:defRPr>
+            </a:lvl3pPr>
+            <a:lvl4pPr>
+              <a:defRPr sz="3450" b="1">
+                <a:solidFill>
+                  <a:srgbClr val="56DDC0"/>
+                </a:solidFill>
+              </a:defRPr>
+            </a:lvl4pPr>
+            <a:lvl5pPr>
+              <a:defRPr sz="3450" b="1">
+                <a:solidFill>
+                  <a:srgbClr val="56DDC0"/>
+                </a:solidFill>
+              </a:defRPr>
+            </a:lvl5pPr>
+            <a:lvl6pPr>
+              <a:defRPr sz="3450" b="1">
+                <a:solidFill>
+                  <a:srgbClr val="56DDC0"/>
+                </a:solidFill>
+              </a:defRPr>
+            </a:lvl6pPr>
+            <a:lvl7pPr>
+              <a:defRPr sz="3450" b="1">
+                <a:solidFill>
+                  <a:srgbClr val="56DDC0"/>
+                </a:solidFill>
+              </a:defRPr>
+            </a:lvl7pPr>
+            <a:lvl8pPr>
+              <a:defRPr sz="3450" b="1">
+                <a:solidFill>
+                  <a:srgbClr val="56DDC0"/>
+                </a:solidFill>
+              </a:defRPr>
+            </a:lvl8pPr>
+            <a:lvl9pPr>
+              <a:defRPr sz="3450" b="1">
+                <a:solidFill>
+                  <a:srgbClr val="56DDC0"/>
+                </a:solidFill>
+              </a:defRPr>
+            </a:lvl9pPr>
+          </a:lstStyle>
+          <a:p xmlns:a="http://schemas.openxmlformats.org/drawingml/2006/main">
+            <a:pPr>
+              <a:defRPr sz="3450" b="1">
+                <a:solidFill>
+                  <a:srgbClr val="56DDC0"/>
+                </a:solidFill>
+              </a:defRPr>
+            </a:pPr>
+            <a:r>
+              <a:rPr sz="3450" b="1">
+                <a:solidFill>
+                  <a:srgbClr val="56DDC0"/>
+                </a:solidFill>
+              </a:rPr>
+              <a:t>Unternehmenswissen mit Fundstellen</a:t>
+            </a:r>
+          </a:p>
+        </p:txBody>
+      </p:sp>
+      <p:sp>
+        <p:nvSpPr>
+          <p:cNvPr id="2" name="">
+            <a:extLst xmlns:a="http://schemas.openxmlformats.org/drawingml/2006/main">
+              <a:ext uri="{FF2B5EF4-FFF2-40B4-BE49-F238E27FC236}">
+                <a16:creationId xmlns:a16="http://schemas.microsoft.com/office/drawing/2014/main" id="{CEDB1542-6364-4531-A421-18759D10C0F7}"/>
+              </a:ext>
+            </a:extLst>
+          </p:cNvPr>
+          <p:cNvSpPr>
+            <a:spLocks xmlns:a="http://schemas.openxmlformats.org/drawingml/2006/main" noGrp="1"/>
+          </p:cNvSpPr>
+          <p:nvPr/>
+        </p:nvSpPr>
+        <p:spPr>
+          <a:xfrm xmlns:a="http://schemas.openxmlformats.org/drawingml/2006/main">
+            <a:off x="685800" y="1619250"/>
+            <a:ext cx="10668000" cy="1524000"/>
+          </a:xfrm>
+          <a:prstGeom xmlns:a="http://schemas.openxmlformats.org/drawingml/2006/main" prst="rect">
+            <a:avLst/>
+          </a:prstGeom>
+          <a:noFill xmlns:a="http://schemas.openxmlformats.org/drawingml/2006/main"/>
+          <a:ln xmlns:a="http://schemas.openxmlformats.org/drawingml/2006/main" w="0">
+            <a:noFill/>
+            <a:prstDash val="solid"/>
+          </a:ln>
+        </p:spPr>
+        <p:txBody>
+          <a:bodyPr xmlns:a="http://schemas.openxmlformats.org/drawingml/2006/main"/>
+          <a:lstStyle xmlns:a="http://schemas.openxmlformats.org/drawingml/2006/main">
+            <a:defPPr>
+              <a:defRPr sz="3150" b="1">
+                <a:solidFill>
+                  <a:srgbClr val="E8EDF6"/>
+                </a:solidFill>
+              </a:defRPr>
+            </a:defPPr>
+            <a:lvl1pPr>
+              <a:defRPr sz="3150" b="1">
+                <a:solidFill>
+                  <a:srgbClr val="E8EDF6"/>
+                </a:solidFill>
+              </a:defRPr>
+            </a:lvl1pPr>
+            <a:lvl2pPr>
+              <a:defRPr sz="3150" b="1">
+                <a:solidFill>
+                  <a:srgbClr val="E8EDF6"/>
+                </a:solidFill>
+              </a:defRPr>
+            </a:lvl2pPr>
+            <a:lvl3pPr>
+              <a:defRPr sz="3150" b="1">
+                <a:solidFill>
+                  <a:srgbClr val="E8EDF6"/>
+                </a:solidFill>
+              </a:defRPr>
+            </a:lvl3pPr>
+            <a:lvl4pPr>
+              <a:defRPr sz="3150" b="1">
+                <a:solidFill>
+                  <a:srgbClr val="E8EDF6"/>
+                </a:solidFill>
+              </a:defRPr>
+            </a:lvl4pPr>
+            <a:lvl5pPr>
+              <a:defRPr sz="3150" b="1">
+                <a:solidFill>
+                  <a:srgbClr val="E8EDF6"/>
+                </a:solidFill>
+              </a:defRPr>
+            </a:lvl5pPr>
+            <a:lvl6pPr>
+              <a:defRPr sz="3150" b="1">
+                <a:solidFill>
+                  <a:srgbClr val="E8EDF6"/>
+                </a:solidFill>
+              </a:defRPr>
+            </a:lvl6pPr>
+            <a:lvl7pPr>
+              <a:defRPr sz="3150" b="1">
+                <a:solidFill>
+                  <a:srgbClr val="E8EDF6"/>
+                </a:solidFill>
+              </a:defRPr>
+            </a:lvl7pPr>
+            <a:lvl8pPr>
+              <a:defRPr sz="3150" b="1">
+                <a:solidFill>
+                  <a:srgbClr val="E8EDF6"/>
+                </a:solidFill>
+              </a:defRPr>
+            </a:lvl8pPr>
+            <a:lvl9pPr>
+              <a:defRPr sz="3150" b="1">
+                <a:solidFill>
+                  <a:srgbClr val="E8EDF6"/>
+                </a:solidFill>
+              </a:defRPr>
+            </a:lvl9pPr>
+          </a:lstStyle>
+          <a:p xmlns:a="http://schemas.openxmlformats.org/drawingml/2006/main">
+            <a:pPr>
+              <a:defRPr sz="3150" b="1">
+                <a:solidFill>
+                  <a:srgbClr val="E8EDF6"/>
+                </a:solidFill>
+              </a:defRPr>
+            </a:pPr>
+            <a:r>
+              <a:rPr sz="3150" b="1">
+                <a:solidFill>
+                  <a:srgbClr val="E8EDF6"/>
+                </a:solidFill>
+              </a:rPr>
+              <a:t>Antworten brauchen Quellen.</a:t>
+            </a:r>
+          </a:p>
+          <a:p xmlns:a="http://schemas.openxmlformats.org/drawingml/2006/main">
+            <a:pPr>
+              <a:defRPr sz="3150" b="1">
+                <a:solidFill>
+                  <a:srgbClr val="E8EDF6"/>
+                </a:solidFill>
+              </a:defRPr>
+            </a:pPr>
+            <a:r>
+              <a:rPr sz="3150" b="1">
+                <a:solidFill>
+                  <a:srgbClr val="E8EDF6"/>
+                </a:solidFill>
+              </a:rPr>
+              <a:t>Fehlendes Wissen braucht eine Rückfrage.</a:t>
+            </a:r>
+          </a:p>
+        </p:txBody>
+      </p:sp>
+      <p:sp>
+        <p:nvSpPr>
+          <p:cNvPr id="3" name="">
+            <a:extLst xmlns:a="http://schemas.openxmlformats.org/drawingml/2006/main">
+              <a:ext uri="{FF2B5EF4-FFF2-40B4-BE49-F238E27FC236}">
+                <a16:creationId xmlns:a16="http://schemas.microsoft.com/office/drawing/2014/main" id="{E0C9F716-1454-4B61-A67E-F3029BAEE340}"/>
+              </a:ext>
+            </a:extLst>
+          </p:cNvPr>
+          <p:cNvSpPr>
+            <a:spLocks xmlns:a="http://schemas.openxmlformats.org/drawingml/2006/main" noGrp="1"/>
+          </p:cNvSpPr>
+          <p:nvPr/>
+        </p:nvSpPr>
+        <p:spPr>
+          <a:xfrm xmlns:a="http://schemas.openxmlformats.org/drawingml/2006/main">
+            <a:off x="685800" y="3429000"/>
+            <a:ext cx="10668000" cy="1428750"/>
+          </a:xfrm>
+          <a:prstGeom xmlns:a="http://schemas.openxmlformats.org/drawingml/2006/main" prst="rect">
+            <a:avLst/>
+          </a:prstGeom>
+          <a:noFill xmlns:a="http://schemas.openxmlformats.org/drawingml/2006/main"/>
+          <a:ln xmlns:a="http://schemas.openxmlformats.org/drawingml/2006/main" w="0">
+            <a:noFill/>
+            <a:prstDash val="solid"/>
+          </a:ln>
+        </p:spPr>
+        <p:txBody>
+          <a:bodyPr xmlns:a="http://schemas.openxmlformats.org/drawingml/2006/main"/>
+          <a:lstStyle xmlns:a="http://schemas.openxmlformats.org/drawingml/2006/main">
+            <a:defPPr>
+              <a:defRPr sz="2100" b="0">
+                <a:solidFill>
+                  <a:srgbClr val="C1D0E1"/>
+                </a:solidFill>
+              </a:defRPr>
+            </a:defPPr>
+            <a:lvl1pPr>
+              <a:defRPr sz="2100" b="0">
+                <a:solidFill>
+                  <a:srgbClr val="C1D0E1"/>
+                </a:solidFill>
+              </a:defRPr>
+            </a:lvl1pPr>
+            <a:lvl2pPr>
+              <a:defRPr sz="2100" b="0">
+                <a:solidFill>
+                  <a:srgbClr val="C1D0E1"/>
+                </a:solidFill>
+              </a:defRPr>
+            </a:lvl2pPr>
+            <a:lvl3pPr>
+              <a:defRPr sz="2100" b="0">
+                <a:solidFill>
+                  <a:srgbClr val="C1D0E1"/>
+                </a:solidFill>
+              </a:defRPr>
+            </a:lvl3pPr>
+            <a:lvl4pPr>
+              <a:defRPr sz="2100" b="0">
+                <a:solidFill>
+                  <a:srgbClr val="C1D0E1"/>
+                </a:solidFill>
+              </a:defRPr>
+            </a:lvl4pPr>
+            <a:lvl5pPr>
+              <a:defRPr sz="2100" b="0">
+                <a:solidFill>
+                  <a:srgbClr val="C1D0E1"/>
+                </a:solidFill>
+              </a:defRPr>
+            </a:lvl5pPr>
+            <a:lvl6pPr>
+              <a:defRPr sz="2100" b="0">
+                <a:solidFill>
+                  <a:srgbClr val="C1D0E1"/>
+                </a:solidFill>
+              </a:defRPr>
+            </a:lvl6pPr>
+            <a:lvl7pPr>
+              <a:defRPr sz="2100" b="0">
+                <a:solidFill>
+                  <a:srgbClr val="C1D0E1"/>
+                </a:solidFill>
+              </a:defRPr>
+            </a:lvl7pPr>
+            <a:lvl8pPr>
+              <a:defRPr sz="2100" b="0">
+                <a:solidFill>
+                  <a:srgbClr val="C1D0E1"/>
+                </a:solidFill>
+              </a:defRPr>
+            </a:lvl8pPr>
+            <a:lvl9pPr>
+              <a:defRPr sz="2100" b="0">
+                <a:solidFill>
+                  <a:srgbClr val="C1D0E1"/>
+                </a:solidFill>
+              </a:defRPr>
+            </a:lvl9pPr>
+          </a:lstStyle>
+          <a:p xmlns:a="http://schemas.openxmlformats.org/drawingml/2006/main">
+            <a:pPr>
+              <a:defRPr sz="2100" b="0">
+                <a:solidFill>
+                  <a:srgbClr val="C1D0E1"/>
+                </a:solidFill>
+              </a:defRPr>
+            </a:pPr>
+            <a:r>
+              <a:rPr sz="2100" b="0">
+                <a:solidFill>
+                  <a:srgbClr val="C1D0E1"/>
+                </a:solidFill>
+              </a:rPr>
+              <a:t>TF-IDF durchsucht ein fiktives Handbuch.</a:t>
+            </a:r>
+          </a:p>
+          <a:p xmlns:a="http://schemas.openxmlformats.org/drawingml/2006/main">
+            <a:pPr>
+              <a:defRPr sz="2100" b="0">
+                <a:solidFill>
+                  <a:srgbClr val="C1D0E1"/>
+                </a:solidFill>
+              </a:defRPr>
+            </a:pPr>
+            <a:r>
+              <a:rPr sz="2100" b="0">
+                <a:solidFill>
+                  <a:srgbClr val="C1D0E1"/>
+                </a:solidFill>
+              </a:rPr>
+              <a:t>Ein optionales Sprachmodell kann aus belegtem Kontext formulieren.</a:t>
+            </a:r>
+          </a:p>
+        </p:txBody>
+      </p:sp>
+      <p:sp>
+        <p:nvSpPr>
+          <p:cNvPr id="4" name="">
+            <a:extLst xmlns:a="http://schemas.openxmlformats.org/drawingml/2006/main">
+              <a:ext uri="{FF2B5EF4-FFF2-40B4-BE49-F238E27FC236}">
+                <a16:creationId xmlns:a16="http://schemas.microsoft.com/office/drawing/2014/main" id="{7F0004C4-154D-4600-865B-0483B93C3512}"/>
+              </a:ext>
+            </a:extLst>
+          </p:cNvPr>
+          <p:cNvSpPr>
+            <a:spLocks xmlns:a="http://schemas.openxmlformats.org/drawingml/2006/main" noGrp="1"/>
+          </p:cNvSpPr>
+          <p:nvPr/>
+        </p:nvSpPr>
+        <p:spPr>
+          <a:xfrm xmlns:a="http://schemas.openxmlformats.org/drawingml/2006/main">
+            <a:off x="685800" y="5619750"/>
+            <a:ext cx="10668000" cy="666750"/>
+          </a:xfrm>
+          <a:prstGeom xmlns:a="http://schemas.openxmlformats.org/drawingml/2006/main" prst="rect">
+            <a:avLst/>
+          </a:prstGeom>
+          <a:noFill xmlns:a="http://schemas.openxmlformats.org/drawingml/2006/main"/>
+          <a:ln xmlns:a="http://schemas.openxmlformats.org/drawingml/2006/main" w="0">
+            <a:noFill/>
+            <a:prstDash val="solid"/>
+          </a:ln>
+        </p:spPr>
+        <p:txBody>
+          <a:bodyPr xmlns:a="http://schemas.openxmlformats.org/drawingml/2006/main"/>
+          <a:lstStyle xmlns:a="http://schemas.openxmlformats.org/drawingml/2006/main">
+            <a:defPPr>
+              <a:defRPr sz="1725" b="0">
+                <a:solidFill>
+                  <a:srgbClr val="FF9D8A"/>
+                </a:solidFill>
+              </a:defRPr>
+            </a:defPPr>
+            <a:lvl1pPr>
+              <a:defRPr sz="1725" b="0">
+                <a:solidFill>
+                  <a:srgbClr val="FF9D8A"/>
+                </a:solidFill>
+              </a:defRPr>
+            </a:lvl1pPr>
+            <a:lvl2pPr>
+              <a:defRPr sz="1725" b="0">
+                <a:solidFill>
+                  <a:srgbClr val="FF9D8A"/>
+                </a:solidFill>
+              </a:defRPr>
+            </a:lvl2pPr>
+            <a:lvl3pPr>
+              <a:defRPr sz="1725" b="0">
+                <a:solidFill>
+                  <a:srgbClr val="FF9D8A"/>
+                </a:solidFill>
+              </a:defRPr>
+            </a:lvl3pPr>
+            <a:lvl4pPr>
+              <a:defRPr sz="1725" b="0">
+                <a:solidFill>
+                  <a:srgbClr val="FF9D8A"/>
+                </a:solidFill>
+              </a:defRPr>
+            </a:lvl4pPr>
+            <a:lvl5pPr>
+              <a:defRPr sz="1725" b="0">
+                <a:solidFill>
+                  <a:srgbClr val="FF9D8A"/>
+                </a:solidFill>
+              </a:defRPr>
+            </a:lvl5pPr>
+            <a:lvl6pPr>
+              <a:defRPr sz="1725" b="0">
+                <a:solidFill>
+                  <a:srgbClr val="FF9D8A"/>
+                </a:solidFill>
+              </a:defRPr>
+            </a:lvl6pPr>
+            <a:lvl7pPr>
+              <a:defRPr sz="1725" b="0">
+                <a:solidFill>
+                  <a:srgbClr val="FF9D8A"/>
+                </a:solidFill>
+              </a:defRPr>
+            </a:lvl7pPr>
+            <a:lvl8pPr>
+              <a:defRPr sz="1725" b="0">
+                <a:solidFill>
+                  <a:srgbClr val="FF9D8A"/>
+                </a:solidFill>
+              </a:defRPr>
+            </a:lvl8pPr>
+            <a:lvl9pPr>
+              <a:defRPr sz="1725" b="0">
+                <a:solidFill>
+                  <a:srgbClr val="FF9D8A"/>
+                </a:solidFill>
+              </a:defRPr>
+            </a:lvl9pPr>
+          </a:lstStyle>
+          <a:p xmlns:a="http://schemas.openxmlformats.org/drawingml/2006/main">
+            <a:pPr>
+              <a:defRPr sz="1725" b="0">
+                <a:solidFill>
+                  <a:srgbClr val="FF9D8A"/>
+                </a:solidFill>
+              </a:defRPr>
+            </a:pPr>
+            <a:r>
+              <a:rPr sz="1725" b="0">
+                <a:solidFill>
+                  <a:srgbClr val="FF9D8A"/>
+                </a:solidFill>
+              </a:rPr>
+              <a:t>RAG verhindert nicht den Urlaub. Es verhindert den Anruf im Urlaub.</a:t>
+            </a:r>
+          </a:p>
+        </p:txBody>
+      </p:sp>
+    </p:spTree>
+    <p:extLst>
+      <p:ext uri="{BB962C8B-B14F-4D97-AF65-F5344CB8AC3E}">
+        <p14:creationId xmlns:p14="http://schemas.microsoft.com/office/powerpoint/2010/main" val="1653954949"/>
+      </p:ext>
+    </p:extLst>
+  </p:cSld>
+</p:sld>
+</file>
+
+<file path=ppt/slides/slide13.xml><?xml version="1.0" encoding="utf-8"?>
+<p:sld xmlns:p="http://schemas.openxmlformats.org/presentationml/2006/main">
+  <p:cSld>
+    <p:bg>
+      <p:bgPr>
+        <a:solidFill xmlns:a="http://schemas.openxmlformats.org/drawingml/2006/main">
+          <a:srgbClr val="0B1220"/>
+        </a:solidFill>
+      </p:bgPr>
+    </p:bg>
+    <p:spTree>
+      <p:nvGrpSpPr>
+        <p:cNvPr id="1" name=""/>
+        <p:cNvGrpSpPr/>
+        <p:nvPr/>
+      </p:nvGrpSpPr>
+      <p:grpSpPr>
+        <a:xfrm xmlns:a="http://schemas.openxmlformats.org/drawingml/2006/main"/>
+      </p:grpSpPr>
+      <p:sp>
+        <p:nvSpPr>
+          <p:cNvPr id="5" name="">
+            <a:extLst xmlns:a="http://schemas.openxmlformats.org/drawingml/2006/main">
+              <a:ext uri="{FF2B5EF4-FFF2-40B4-BE49-F238E27FC236}">
+                <a16:creationId xmlns:a16="http://schemas.microsoft.com/office/drawing/2014/main" id="{9D3C1D00-73DF-40FD-873A-497143333C92}"/>
+              </a:ext>
+            </a:extLst>
+          </p:cNvPr>
+          <p:cNvSpPr>
+            <a:spLocks xmlns:a="http://schemas.openxmlformats.org/drawingml/2006/main" noGrp="1"/>
+          </p:cNvSpPr>
+          <p:nvPr/>
+        </p:nvSpPr>
+        <p:spPr>
+          <a:xfrm xmlns:a="http://schemas.openxmlformats.org/drawingml/2006/main">
+            <a:off x="685800" y="476250"/>
+            <a:ext cx="10668000" cy="714375"/>
+          </a:xfrm>
+          <a:prstGeom xmlns:a="http://schemas.openxmlformats.org/drawingml/2006/main" prst="rect">
+            <a:avLst/>
+          </a:prstGeom>
+          <a:noFill xmlns:a="http://schemas.openxmlformats.org/drawingml/2006/main"/>
+          <a:ln xmlns:a="http://schemas.openxmlformats.org/drawingml/2006/main" w="0">
+            <a:noFill/>
+            <a:prstDash val="solid"/>
+          </a:ln>
+        </p:spPr>
+        <p:txBody>
+          <a:bodyPr xmlns:a="http://schemas.openxmlformats.org/drawingml/2006/main"/>
+          <a:lstStyle xmlns:a="http://schemas.openxmlformats.org/drawingml/2006/main">
+            <a:defPPr>
+              <a:defRPr sz="3450" b="1">
+                <a:solidFill>
+                  <a:srgbClr val="56DDC0"/>
+                </a:solidFill>
+              </a:defRPr>
+            </a:defPPr>
+            <a:lvl1pPr>
+              <a:defRPr sz="3450" b="1">
+                <a:solidFill>
+                  <a:srgbClr val="56DDC0"/>
+                </a:solidFill>
+              </a:defRPr>
+            </a:lvl1pPr>
+            <a:lvl2pPr>
+              <a:defRPr sz="3450" b="1">
+                <a:solidFill>
+                  <a:srgbClr val="56DDC0"/>
+                </a:solidFill>
+              </a:defRPr>
+            </a:lvl2pPr>
+            <a:lvl3pPr>
+              <a:defRPr sz="3450" b="1">
+                <a:solidFill>
+                  <a:srgbClr val="56DDC0"/>
+                </a:solidFill>
+              </a:defRPr>
+            </a:lvl3pPr>
+            <a:lvl4pPr>
+              <a:defRPr sz="3450" b="1">
+                <a:solidFill>
+                  <a:srgbClr val="56DDC0"/>
+                </a:solidFill>
+              </a:defRPr>
+            </a:lvl4pPr>
+            <a:lvl5pPr>
+              <a:defRPr sz="3450" b="1">
+                <a:solidFill>
+                  <a:srgbClr val="56DDC0"/>
+                </a:solidFill>
+              </a:defRPr>
+            </a:lvl5pPr>
+            <a:lvl6pPr>
+              <a:defRPr sz="3450" b="1">
+                <a:solidFill>
+                  <a:srgbClr val="56DDC0"/>
+                </a:solidFill>
+              </a:defRPr>
+            </a:lvl6pPr>
+            <a:lvl7pPr>
+              <a:defRPr sz="3450" b="1">
+                <a:solidFill>
+                  <a:srgbClr val="56DDC0"/>
+                </a:solidFill>
+              </a:defRPr>
+            </a:lvl7pPr>
+            <a:lvl8pPr>
+              <a:defRPr sz="3450" b="1">
+                <a:solidFill>
+                  <a:srgbClr val="56DDC0"/>
+                </a:solidFill>
+              </a:defRPr>
+            </a:lvl8pPr>
+            <a:lvl9pPr>
+              <a:defRPr sz="3450" b="1">
+                <a:solidFill>
+                  <a:srgbClr val="56DDC0"/>
+                </a:solidFill>
+              </a:defRPr>
+            </a:lvl9pPr>
+          </a:lstStyle>
+          <a:p xmlns:a="http://schemas.openxmlformats.org/drawingml/2006/main">
+            <a:pPr>
+              <a:defRPr sz="3450" b="1">
+                <a:solidFill>
+                  <a:srgbClr val="56DDC0"/>
+                </a:solidFill>
+              </a:defRPr>
+            </a:pPr>
+            <a:r>
+              <a:rPr sz="3450" b="1">
+                <a:solidFill>
+                  <a:srgbClr val="56DDC0"/>
+                </a:solidFill>
+              </a:rPr>
+              <a:t>Content und Produkteigenschaften</a:t>
+            </a:r>
+          </a:p>
+        </p:txBody>
+      </p:sp>
+      <p:sp>
+        <p:nvSpPr>
+          <p:cNvPr id="2" name="">
+            <a:extLst xmlns:a="http://schemas.openxmlformats.org/drawingml/2006/main">
+              <a:ext uri="{FF2B5EF4-FFF2-40B4-BE49-F238E27FC236}">
+                <a16:creationId xmlns:a16="http://schemas.microsoft.com/office/drawing/2014/main" id="{25741E2B-1AA2-4FFB-87DD-1CA4B6E202C5}"/>
+              </a:ext>
+            </a:extLst>
+          </p:cNvPr>
+          <p:cNvSpPr>
+            <a:spLocks xmlns:a="http://schemas.openxmlformats.org/drawingml/2006/main" noGrp="1"/>
+          </p:cNvSpPr>
+          <p:nvPr/>
+        </p:nvSpPr>
+        <p:spPr>
+          <a:xfrm xmlns:a="http://schemas.openxmlformats.org/drawingml/2006/main">
+            <a:off x="685800" y="1619250"/>
+            <a:ext cx="10668000" cy="1524000"/>
+          </a:xfrm>
+          <a:prstGeom xmlns:a="http://schemas.openxmlformats.org/drawingml/2006/main" prst="rect">
+            <a:avLst/>
+          </a:prstGeom>
+          <a:noFill xmlns:a="http://schemas.openxmlformats.org/drawingml/2006/main"/>
+          <a:ln xmlns:a="http://schemas.openxmlformats.org/drawingml/2006/main" w="0">
+            <a:noFill/>
+            <a:prstDash val="solid"/>
+          </a:ln>
+        </p:spPr>
+        <p:txBody>
+          <a:bodyPr xmlns:a="http://schemas.openxmlformats.org/drawingml/2006/main"/>
+          <a:lstStyle xmlns:a="http://schemas.openxmlformats.org/drawingml/2006/main">
+            <a:defPPr>
+              <a:defRPr sz="3150" b="1">
+                <a:solidFill>
+                  <a:srgbClr val="E8EDF6"/>
+                </a:solidFill>
+              </a:defRPr>
+            </a:defPPr>
+            <a:lvl1pPr>
+              <a:defRPr sz="3150" b="1">
+                <a:solidFill>
+                  <a:srgbClr val="E8EDF6"/>
+                </a:solidFill>
+              </a:defRPr>
+            </a:lvl1pPr>
+            <a:lvl2pPr>
+              <a:defRPr sz="3150" b="1">
+                <a:solidFill>
+                  <a:srgbClr val="E8EDF6"/>
+                </a:solidFill>
+              </a:defRPr>
+            </a:lvl2pPr>
+            <a:lvl3pPr>
+              <a:defRPr sz="3150" b="1">
+                <a:solidFill>
+                  <a:srgbClr val="E8EDF6"/>
+                </a:solidFill>
+              </a:defRPr>
+            </a:lvl3pPr>
+            <a:lvl4pPr>
+              <a:defRPr sz="3150" b="1">
+                <a:solidFill>
+                  <a:srgbClr val="E8EDF6"/>
+                </a:solidFill>
+              </a:defRPr>
+            </a:lvl4pPr>
+            <a:lvl5pPr>
+              <a:defRPr sz="3150" b="1">
+                <a:solidFill>
+                  <a:srgbClr val="E8EDF6"/>
+                </a:solidFill>
+              </a:defRPr>
+            </a:lvl5pPr>
+            <a:lvl6pPr>
+              <a:defRPr sz="3150" b="1">
+                <a:solidFill>
+                  <a:srgbClr val="E8EDF6"/>
+                </a:solidFill>
+              </a:defRPr>
+            </a:lvl6pPr>
+            <a:lvl7pPr>
+              <a:defRPr sz="3150" b="1">
+                <a:solidFill>
+                  <a:srgbClr val="E8EDF6"/>
+                </a:solidFill>
+              </a:defRPr>
+            </a:lvl7pPr>
+            <a:lvl8pPr>
+              <a:defRPr sz="3150" b="1">
+                <a:solidFill>
+                  <a:srgbClr val="E8EDF6"/>
+                </a:solidFill>
+              </a:defRPr>
+            </a:lvl8pPr>
+            <a:lvl9pPr>
+              <a:defRPr sz="3150" b="1">
+                <a:solidFill>
+                  <a:srgbClr val="E8EDF6"/>
+                </a:solidFill>
+              </a:defRPr>
+            </a:lvl9pPr>
+          </a:lstStyle>
+          <a:p xmlns:a="http://schemas.openxmlformats.org/drawingml/2006/main">
+            <a:pPr>
+              <a:defRPr sz="3150" b="1">
+                <a:solidFill>
+                  <a:srgbClr val="E8EDF6"/>
+                </a:solidFill>
+              </a:defRPr>
+            </a:pPr>
+            <a:r>
+              <a:rPr sz="3150" b="1">
+                <a:solidFill>
+                  <a:srgbClr val="E8EDF6"/>
+                </a:solidFill>
+              </a:rPr>
+              <a:t>Kreative Varianten brauchen</a:t>
+            </a:r>
+          </a:p>
+          <a:p xmlns:a="http://schemas.openxmlformats.org/drawingml/2006/main">
+            <a:pPr>
+              <a:defRPr sz="3150" b="1">
+                <a:solidFill>
+                  <a:srgbClr val="E8EDF6"/>
+                </a:solidFill>
+              </a:defRPr>
+            </a:pPr>
+            <a:r>
+              <a:rPr sz="3150" b="1">
+                <a:solidFill>
+                  <a:srgbClr val="E8EDF6"/>
+                </a:solidFill>
+              </a:rPr>
+              <a:t>verlässliche Produktfakten.</a:t>
+            </a:r>
+          </a:p>
+        </p:txBody>
+      </p:sp>
+      <p:sp>
+        <p:nvSpPr>
+          <p:cNvPr id="3" name="">
+            <a:extLst xmlns:a="http://schemas.openxmlformats.org/drawingml/2006/main">
+              <a:ext uri="{FF2B5EF4-FFF2-40B4-BE49-F238E27FC236}">
+                <a16:creationId xmlns:a16="http://schemas.microsoft.com/office/drawing/2014/main" id="{67B75CA1-7C47-428A-8FA7-FF2CAE7E9456}"/>
+              </a:ext>
+            </a:extLst>
+          </p:cNvPr>
+          <p:cNvSpPr>
+            <a:spLocks xmlns:a="http://schemas.openxmlformats.org/drawingml/2006/main" noGrp="1"/>
+          </p:cNvSpPr>
+          <p:nvPr/>
+        </p:nvSpPr>
+        <p:spPr>
+          <a:xfrm xmlns:a="http://schemas.openxmlformats.org/drawingml/2006/main">
+            <a:off x="685800" y="3429000"/>
+            <a:ext cx="10668000" cy="1428750"/>
+          </a:xfrm>
+          <a:prstGeom xmlns:a="http://schemas.openxmlformats.org/drawingml/2006/main" prst="rect">
+            <a:avLst/>
+          </a:prstGeom>
+          <a:noFill xmlns:a="http://schemas.openxmlformats.org/drawingml/2006/main"/>
+          <a:ln xmlns:a="http://schemas.openxmlformats.org/drawingml/2006/main" w="0">
+            <a:noFill/>
+            <a:prstDash val="solid"/>
+          </a:ln>
+        </p:spPr>
+        <p:txBody>
+          <a:bodyPr xmlns:a="http://schemas.openxmlformats.org/drawingml/2006/main"/>
+          <a:lstStyle xmlns:a="http://schemas.openxmlformats.org/drawingml/2006/main">
+            <a:defPPr>
+              <a:defRPr sz="2100" b="0">
+                <a:solidFill>
+                  <a:srgbClr val="C1D0E1"/>
+                </a:solidFill>
+              </a:defRPr>
+            </a:defPPr>
+            <a:lvl1pPr>
+              <a:defRPr sz="2100" b="0">
+                <a:solidFill>
+                  <a:srgbClr val="C1D0E1"/>
+                </a:solidFill>
+              </a:defRPr>
+            </a:lvl1pPr>
+            <a:lvl2pPr>
+              <a:defRPr sz="2100" b="0">
+                <a:solidFill>
+                  <a:srgbClr val="C1D0E1"/>
+                </a:solidFill>
+              </a:defRPr>
+            </a:lvl2pPr>
+            <a:lvl3pPr>
+              <a:defRPr sz="2100" b="0">
+                <a:solidFill>
+                  <a:srgbClr val="C1D0E1"/>
+                </a:solidFill>
+              </a:defRPr>
+            </a:lvl3pPr>
+            <a:lvl4pPr>
+              <a:defRPr sz="2100" b="0">
+                <a:solidFill>
+                  <a:srgbClr val="C1D0E1"/>
+                </a:solidFill>
+              </a:defRPr>
+            </a:lvl4pPr>
+            <a:lvl5pPr>
+              <a:defRPr sz="2100" b="0">
+                <a:solidFill>
+                  <a:srgbClr val="C1D0E1"/>
+                </a:solidFill>
+              </a:defRPr>
+            </a:lvl5pPr>
+            <a:lvl6pPr>
+              <a:defRPr sz="2100" b="0">
+                <a:solidFill>
+                  <a:srgbClr val="C1D0E1"/>
+                </a:solidFill>
+              </a:defRPr>
+            </a:lvl6pPr>
+            <a:lvl7pPr>
+              <a:defRPr sz="2100" b="0">
+                <a:solidFill>
+                  <a:srgbClr val="C1D0E1"/>
+                </a:solidFill>
+              </a:defRPr>
+            </a:lvl7pPr>
+            <a:lvl8pPr>
+              <a:defRPr sz="2100" b="0">
+                <a:solidFill>
+                  <a:srgbClr val="C1D0E1"/>
+                </a:solidFill>
+              </a:defRPr>
+            </a:lvl8pPr>
+            <a:lvl9pPr>
+              <a:defRPr sz="2100" b="0">
+                <a:solidFill>
+                  <a:srgbClr val="C1D0E1"/>
+                </a:solidFill>
+              </a:defRPr>
+            </a:lvl9pPr>
+          </a:lstStyle>
+          <a:p xmlns:a="http://schemas.openxmlformats.org/drawingml/2006/main">
+            <a:pPr>
+              <a:defRPr sz="2100" b="0">
+                <a:solidFill>
+                  <a:srgbClr val="C1D0E1"/>
+                </a:solidFill>
+              </a:defRPr>
+            </a:pPr>
+            <a:r>
+              <a:rPr sz="2100" b="0">
+                <a:solidFill>
+                  <a:srgbClr val="C1D0E1"/>
+                </a:solidFill>
+              </a:rPr>
+              <a:t>Das Contentstudio erstellt nachvollziehbare Vorlagen.</a:t>
+            </a:r>
+          </a:p>
+          <a:p xmlns:a="http://schemas.openxmlformats.org/drawingml/2006/main">
+            <a:pPr>
+              <a:defRPr sz="2100" b="0">
+                <a:solidFill>
+                  <a:srgbClr val="C1D0E1"/>
+                </a:solidFill>
+              </a:defRPr>
+            </a:pPr>
+            <a:r>
+              <a:rPr sz="2100" b="0">
+                <a:solidFill>
+                  <a:srgbClr val="C1D0E1"/>
+                </a:solidFill>
+              </a:rPr>
+              <a:t>Marketing prüft Claims und misst die Wirkung im Experiment.</a:t>
+            </a:r>
+          </a:p>
+        </p:txBody>
+      </p:sp>
+      <p:sp>
+        <p:nvSpPr>
+          <p:cNvPr id="4" name="">
+            <a:extLst xmlns:a="http://schemas.openxmlformats.org/drawingml/2006/main">
+              <a:ext uri="{FF2B5EF4-FFF2-40B4-BE49-F238E27FC236}">
+                <a16:creationId xmlns:a16="http://schemas.microsoft.com/office/drawing/2014/main" id="{B4C5B387-0CFB-415C-8FB2-40BFA111B759}"/>
+              </a:ext>
+            </a:extLst>
+          </p:cNvPr>
+          <p:cNvSpPr>
+            <a:spLocks xmlns:a="http://schemas.openxmlformats.org/drawingml/2006/main" noGrp="1"/>
+          </p:cNvSpPr>
+          <p:nvPr/>
+        </p:nvSpPr>
+        <p:spPr>
+          <a:xfrm xmlns:a="http://schemas.openxmlformats.org/drawingml/2006/main">
+            <a:off x="685800" y="5619750"/>
+            <a:ext cx="10668000" cy="666750"/>
+          </a:xfrm>
+          <a:prstGeom xmlns:a="http://schemas.openxmlformats.org/drawingml/2006/main" prst="rect">
+            <a:avLst/>
+          </a:prstGeom>
+          <a:noFill xmlns:a="http://schemas.openxmlformats.org/drawingml/2006/main"/>
+          <a:ln xmlns:a="http://schemas.openxmlformats.org/drawingml/2006/main" w="0">
+            <a:noFill/>
+            <a:prstDash val="solid"/>
+          </a:ln>
+        </p:spPr>
+        <p:txBody>
+          <a:bodyPr xmlns:a="http://schemas.openxmlformats.org/drawingml/2006/main"/>
+          <a:lstStyle xmlns:a="http://schemas.openxmlformats.org/drawingml/2006/main">
+            <a:defPPr>
+              <a:defRPr sz="1725" b="0">
+                <a:solidFill>
+                  <a:srgbClr val="FF9D8A"/>
+                </a:solidFill>
+              </a:defRPr>
+            </a:defPPr>
+            <a:lvl1pPr>
+              <a:defRPr sz="1725" b="0">
+                <a:solidFill>
+                  <a:srgbClr val="FF9D8A"/>
+                </a:solidFill>
+              </a:defRPr>
+            </a:lvl1pPr>
+            <a:lvl2pPr>
+              <a:defRPr sz="1725" b="0">
+                <a:solidFill>
+                  <a:srgbClr val="FF9D8A"/>
+                </a:solidFill>
+              </a:defRPr>
+            </a:lvl2pPr>
+            <a:lvl3pPr>
+              <a:defRPr sz="1725" b="0">
+                <a:solidFill>
+                  <a:srgbClr val="FF9D8A"/>
+                </a:solidFill>
+              </a:defRPr>
+            </a:lvl3pPr>
+            <a:lvl4pPr>
+              <a:defRPr sz="1725" b="0">
+                <a:solidFill>
+                  <a:srgbClr val="FF9D8A"/>
+                </a:solidFill>
+              </a:defRPr>
+            </a:lvl4pPr>
+            <a:lvl5pPr>
+              <a:defRPr sz="1725" b="0">
+                <a:solidFill>
+                  <a:srgbClr val="FF9D8A"/>
+                </a:solidFill>
+              </a:defRPr>
+            </a:lvl5pPr>
+            <a:lvl6pPr>
+              <a:defRPr sz="1725" b="0">
+                <a:solidFill>
+                  <a:srgbClr val="FF9D8A"/>
+                </a:solidFill>
+              </a:defRPr>
+            </a:lvl6pPr>
+            <a:lvl7pPr>
+              <a:defRPr sz="1725" b="0">
+                <a:solidFill>
+                  <a:srgbClr val="FF9D8A"/>
+                </a:solidFill>
+              </a:defRPr>
+            </a:lvl7pPr>
+            <a:lvl8pPr>
+              <a:defRPr sz="1725" b="0">
+                <a:solidFill>
+                  <a:srgbClr val="FF9D8A"/>
+                </a:solidFill>
+              </a:defRPr>
+            </a:lvl8pPr>
+            <a:lvl9pPr>
+              <a:defRPr sz="1725" b="0">
+                <a:solidFill>
+                  <a:srgbClr val="FF9D8A"/>
+                </a:solidFill>
+              </a:defRPr>
+            </a:lvl9pPr>
+          </a:lstStyle>
+          <a:p xmlns:a="http://schemas.openxmlformats.org/drawingml/2006/main">
+            <a:pPr>
+              <a:defRPr sz="1725" b="0">
+                <a:solidFill>
+                  <a:srgbClr val="FF9D8A"/>
+                </a:solidFill>
+              </a:defRPr>
+            </a:pPr>
+            <a:r>
+              <a:rPr sz="1725" b="0">
+                <a:solidFill>
+                  <a:srgbClr val="FF9D8A"/>
+                </a:solidFill>
+              </a:rPr>
+              <a:t>„Wasserfest“ entsteht nicht durch einen besonders flüssigen Prompt.</a:t>
+            </a:r>
+          </a:p>
+        </p:txBody>
+      </p:sp>
+    </p:spTree>
+    <p:extLst>
+      <p:ext uri="{BB962C8B-B14F-4D97-AF65-F5344CB8AC3E}">
+        <p14:creationId xmlns:p14="http://schemas.microsoft.com/office/powerpoint/2010/main" val="1379609654"/>
+      </p:ext>
+    </p:extLst>
+  </p:cSld>
+</p:sld>
+</file>
+
+<file path=ppt/slides/slide14.xml><?xml version="1.0" encoding="utf-8"?>
+<p:sld xmlns:p="http://schemas.openxmlformats.org/presentationml/2006/main">
+  <p:cSld>
+    <p:bg>
+      <p:bgPr>
+        <a:solidFill xmlns:a="http://schemas.openxmlformats.org/drawingml/2006/main">
+          <a:srgbClr val="0B1220"/>
+        </a:solidFill>
+      </p:bgPr>
+    </p:bg>
+    <p:spTree>
+      <p:nvGrpSpPr>
+        <p:cNvPr id="1" name=""/>
+        <p:cNvGrpSpPr/>
+        <p:nvPr/>
+      </p:nvGrpSpPr>
+      <p:grpSpPr>
+        <a:xfrm xmlns:a="http://schemas.openxmlformats.org/drawingml/2006/main"/>
+      </p:grpSpPr>
+      <p:sp>
+        <p:nvSpPr>
+          <p:cNvPr id="5" name="">
+            <a:extLst xmlns:a="http://schemas.openxmlformats.org/drawingml/2006/main">
+              <a:ext uri="{FF2B5EF4-FFF2-40B4-BE49-F238E27FC236}">
+                <a16:creationId xmlns:a16="http://schemas.microsoft.com/office/drawing/2014/main" id="{60FAD7AB-7FB1-4FC9-8E4E-35B023D015A5}"/>
+              </a:ext>
+            </a:extLst>
+          </p:cNvPr>
+          <p:cNvSpPr>
+            <a:spLocks xmlns:a="http://schemas.openxmlformats.org/drawingml/2006/main" noGrp="1"/>
+          </p:cNvSpPr>
+          <p:nvPr/>
+        </p:nvSpPr>
+        <p:spPr>
+          <a:xfrm xmlns:a="http://schemas.openxmlformats.org/drawingml/2006/main">
+            <a:off x="685800" y="476250"/>
+            <a:ext cx="10668000" cy="714375"/>
+          </a:xfrm>
+          <a:prstGeom xmlns:a="http://schemas.openxmlformats.org/drawingml/2006/main" prst="rect">
+            <a:avLst/>
+          </a:prstGeom>
+          <a:noFill xmlns:a="http://schemas.openxmlformats.org/drawingml/2006/main"/>
+          <a:ln xmlns:a="http://schemas.openxmlformats.org/drawingml/2006/main" w="0">
+            <a:noFill/>
+            <a:prstDash val="solid"/>
+          </a:ln>
+        </p:spPr>
+        <p:txBody>
+          <a:bodyPr xmlns:a="http://schemas.openxmlformats.org/drawingml/2006/main"/>
+          <a:lstStyle xmlns:a="http://schemas.openxmlformats.org/drawingml/2006/main">
+            <a:defPPr>
+              <a:defRPr sz="3450" b="1">
+                <a:solidFill>
+                  <a:srgbClr val="56DDC0"/>
+                </a:solidFill>
+              </a:defRPr>
+            </a:defPPr>
+            <a:lvl1pPr>
+              <a:defRPr sz="3450" b="1">
+                <a:solidFill>
+                  <a:srgbClr val="56DDC0"/>
+                </a:solidFill>
+              </a:defRPr>
+            </a:lvl1pPr>
+            <a:lvl2pPr>
+              <a:defRPr sz="3450" b="1">
+                <a:solidFill>
+                  <a:srgbClr val="56DDC0"/>
+                </a:solidFill>
+              </a:defRPr>
+            </a:lvl2pPr>
+            <a:lvl3pPr>
+              <a:defRPr sz="3450" b="1">
+                <a:solidFill>
+                  <a:srgbClr val="56DDC0"/>
+                </a:solidFill>
+              </a:defRPr>
+            </a:lvl3pPr>
+            <a:lvl4pPr>
+              <a:defRPr sz="3450" b="1">
+                <a:solidFill>
+                  <a:srgbClr val="56DDC0"/>
+                </a:solidFill>
+              </a:defRPr>
+            </a:lvl4pPr>
+            <a:lvl5pPr>
+              <a:defRPr sz="3450" b="1">
+                <a:solidFill>
+                  <a:srgbClr val="56DDC0"/>
+                </a:solidFill>
+              </a:defRPr>
+            </a:lvl5pPr>
+            <a:lvl6pPr>
+              <a:defRPr sz="3450" b="1">
+                <a:solidFill>
+                  <a:srgbClr val="56DDC0"/>
+                </a:solidFill>
+              </a:defRPr>
+            </a:lvl6pPr>
+            <a:lvl7pPr>
+              <a:defRPr sz="3450" b="1">
+                <a:solidFill>
+                  <a:srgbClr val="56DDC0"/>
+                </a:solidFill>
+              </a:defRPr>
+            </a:lvl7pPr>
+            <a:lvl8pPr>
+              <a:defRPr sz="3450" b="1">
+                <a:solidFill>
+                  <a:srgbClr val="56DDC0"/>
+                </a:solidFill>
+              </a:defRPr>
+            </a:lvl8pPr>
+            <a:lvl9pPr>
+              <a:defRPr sz="3450" b="1">
+                <a:solidFill>
+                  <a:srgbClr val="56DDC0"/>
+                </a:solidFill>
+              </a:defRPr>
+            </a:lvl9pPr>
+          </a:lstStyle>
+          <a:p xmlns:a="http://schemas.openxmlformats.org/drawingml/2006/main">
+            <a:pPr>
+              <a:defRPr sz="3450" b="1">
+                <a:solidFill>
+                  <a:srgbClr val="56DDC0"/>
+                </a:solidFill>
+              </a:defRPr>
+            </a:pPr>
+            <a:r>
+              <a:rPr sz="3450" b="1">
+                <a:solidFill>
+                  <a:srgbClr val="56DDC0"/>
+                </a:solidFill>
+              </a:rPr>
+              <a:t>Der KI-Business-Case</a:t>
+            </a:r>
+          </a:p>
+        </p:txBody>
+      </p:sp>
+      <p:sp>
+        <p:nvSpPr>
+          <p:cNvPr id="2" name="">
+            <a:extLst xmlns:a="http://schemas.openxmlformats.org/drawingml/2006/main">
+              <a:ext uri="{FF2B5EF4-FFF2-40B4-BE49-F238E27FC236}">
+                <a16:creationId xmlns:a16="http://schemas.microsoft.com/office/drawing/2014/main" id="{AA5EA766-A593-4204-B525-2E9344B2E873}"/>
+              </a:ext>
+            </a:extLst>
+          </p:cNvPr>
+          <p:cNvSpPr>
+            <a:spLocks xmlns:a="http://schemas.openxmlformats.org/drawingml/2006/main" noGrp="1"/>
+          </p:cNvSpPr>
+          <p:nvPr/>
+        </p:nvSpPr>
+        <p:spPr>
+          <a:xfrm xmlns:a="http://schemas.openxmlformats.org/drawingml/2006/main">
+            <a:off x="685800" y="1619250"/>
+            <a:ext cx="10668000" cy="1524000"/>
+          </a:xfrm>
+          <a:prstGeom xmlns:a="http://schemas.openxmlformats.org/drawingml/2006/main" prst="rect">
+            <a:avLst/>
+          </a:prstGeom>
+          <a:noFill xmlns:a="http://schemas.openxmlformats.org/drawingml/2006/main"/>
+          <a:ln xmlns:a="http://schemas.openxmlformats.org/drawingml/2006/main" w="0">
+            <a:noFill/>
+            <a:prstDash val="solid"/>
+          </a:ln>
+        </p:spPr>
+        <p:txBody>
+          <a:bodyPr xmlns:a="http://schemas.openxmlformats.org/drawingml/2006/main"/>
+          <a:lstStyle xmlns:a="http://schemas.openxmlformats.org/drawingml/2006/main">
+            <a:defPPr>
+              <a:defRPr sz="3150" b="1">
+                <a:solidFill>
+                  <a:srgbClr val="E8EDF6"/>
+                </a:solidFill>
+              </a:defRPr>
+            </a:defPPr>
+            <a:lvl1pPr>
+              <a:defRPr sz="3150" b="1">
+                <a:solidFill>
+                  <a:srgbClr val="E8EDF6"/>
+                </a:solidFill>
+              </a:defRPr>
+            </a:lvl1pPr>
+            <a:lvl2pPr>
+              <a:defRPr sz="3150" b="1">
+                <a:solidFill>
+                  <a:srgbClr val="E8EDF6"/>
+                </a:solidFill>
+              </a:defRPr>
+            </a:lvl2pPr>
+            <a:lvl3pPr>
+              <a:defRPr sz="3150" b="1">
+                <a:solidFill>
+                  <a:srgbClr val="E8EDF6"/>
+                </a:solidFill>
+              </a:defRPr>
+            </a:lvl3pPr>
+            <a:lvl4pPr>
+              <a:defRPr sz="3150" b="1">
+                <a:solidFill>
+                  <a:srgbClr val="E8EDF6"/>
+                </a:solidFill>
+              </a:defRPr>
+            </a:lvl4pPr>
+            <a:lvl5pPr>
+              <a:defRPr sz="3150" b="1">
+                <a:solidFill>
+                  <a:srgbClr val="E8EDF6"/>
+                </a:solidFill>
+              </a:defRPr>
+            </a:lvl5pPr>
+            <a:lvl6pPr>
+              <a:defRPr sz="3150" b="1">
+                <a:solidFill>
+                  <a:srgbClr val="E8EDF6"/>
+                </a:solidFill>
+              </a:defRPr>
+            </a:lvl6pPr>
+            <a:lvl7pPr>
+              <a:defRPr sz="3150" b="1">
+                <a:solidFill>
+                  <a:srgbClr val="E8EDF6"/>
+                </a:solidFill>
+              </a:defRPr>
+            </a:lvl7pPr>
+            <a:lvl8pPr>
+              <a:defRPr sz="3150" b="1">
+                <a:solidFill>
+                  <a:srgbClr val="E8EDF6"/>
+                </a:solidFill>
+              </a:defRPr>
+            </a:lvl8pPr>
+            <a:lvl9pPr>
+              <a:defRPr sz="3150" b="1">
+                <a:solidFill>
+                  <a:srgbClr val="E8EDF6"/>
+                </a:solidFill>
+              </a:defRPr>
+            </a:lvl9pPr>
+          </a:lstStyle>
+          <a:p xmlns:a="http://schemas.openxmlformats.org/drawingml/2006/main">
+            <a:pPr>
+              <a:defRPr sz="3150" b="1">
+                <a:solidFill>
+                  <a:srgbClr val="E8EDF6"/>
+                </a:solidFill>
+              </a:defRPr>
+            </a:pPr>
+            <a:r>
+              <a:rPr sz="3150" b="1">
+                <a:solidFill>
+                  <a:srgbClr val="E8EDF6"/>
+                </a:solidFill>
+              </a:rPr>
+              <a:t>Zeitgewinn ist Kapazität.</a:t>
+            </a:r>
+          </a:p>
+          <a:p xmlns:a="http://schemas.openxmlformats.org/drawingml/2006/main">
+            <a:pPr>
+              <a:defRPr sz="3150" b="1">
+                <a:solidFill>
+                  <a:srgbClr val="E8EDF6"/>
+                </a:solidFill>
+              </a:defRPr>
+            </a:pPr>
+            <a:r>
+              <a:rPr sz="3150" b="1">
+                <a:solidFill>
+                  <a:srgbClr val="E8EDF6"/>
+                </a:solidFill>
+              </a:rPr>
+              <a:t>Budgetnutzen braucht weitere Annahmen.</a:t>
+            </a:r>
+          </a:p>
+        </p:txBody>
+      </p:sp>
+      <p:sp>
+        <p:nvSpPr>
+          <p:cNvPr id="3" name="">
+            <a:extLst xmlns:a="http://schemas.openxmlformats.org/drawingml/2006/main">
+              <a:ext uri="{FF2B5EF4-FFF2-40B4-BE49-F238E27FC236}">
+                <a16:creationId xmlns:a16="http://schemas.microsoft.com/office/drawing/2014/main" id="{75CDD99B-FDC1-4361-9828-F7B1D344888E}"/>
+              </a:ext>
+            </a:extLst>
+          </p:cNvPr>
+          <p:cNvSpPr>
+            <a:spLocks xmlns:a="http://schemas.openxmlformats.org/drawingml/2006/main" noGrp="1"/>
+          </p:cNvSpPr>
+          <p:nvPr/>
+        </p:nvSpPr>
+        <p:spPr>
+          <a:xfrm xmlns:a="http://schemas.openxmlformats.org/drawingml/2006/main">
+            <a:off x="685800" y="3429000"/>
+            <a:ext cx="10668000" cy="1428750"/>
+          </a:xfrm>
+          <a:prstGeom xmlns:a="http://schemas.openxmlformats.org/drawingml/2006/main" prst="rect">
+            <a:avLst/>
+          </a:prstGeom>
+          <a:noFill xmlns:a="http://schemas.openxmlformats.org/drawingml/2006/main"/>
+          <a:ln xmlns:a="http://schemas.openxmlformats.org/drawingml/2006/main" w="0">
+            <a:noFill/>
+            <a:prstDash val="solid"/>
+          </a:ln>
+        </p:spPr>
+        <p:txBody>
+          <a:bodyPr xmlns:a="http://schemas.openxmlformats.org/drawingml/2006/main"/>
+          <a:lstStyle xmlns:a="http://schemas.openxmlformats.org/drawingml/2006/main">
+            <a:defPPr>
+              <a:defRPr sz="2100" b="0">
+                <a:solidFill>
+                  <a:srgbClr val="C1D0E1"/>
+                </a:solidFill>
+              </a:defRPr>
+            </a:defPPr>
+            <a:lvl1pPr>
+              <a:defRPr sz="2100" b="0">
+                <a:solidFill>
+                  <a:srgbClr val="C1D0E1"/>
+                </a:solidFill>
+              </a:defRPr>
+            </a:lvl1pPr>
+            <a:lvl2pPr>
+              <a:defRPr sz="2100" b="0">
+                <a:solidFill>
+                  <a:srgbClr val="C1D0E1"/>
+                </a:solidFill>
+              </a:defRPr>
+            </a:lvl2pPr>
+            <a:lvl3pPr>
+              <a:defRPr sz="2100" b="0">
+                <a:solidFill>
+                  <a:srgbClr val="C1D0E1"/>
+                </a:solidFill>
+              </a:defRPr>
+            </a:lvl3pPr>
+            <a:lvl4pPr>
+              <a:defRPr sz="2100" b="0">
+                <a:solidFill>
+                  <a:srgbClr val="C1D0E1"/>
+                </a:solidFill>
+              </a:defRPr>
+            </a:lvl4pPr>
+            <a:lvl5pPr>
+              <a:defRPr sz="2100" b="0">
+                <a:solidFill>
+                  <a:srgbClr val="C1D0E1"/>
+                </a:solidFill>
+              </a:defRPr>
+            </a:lvl5pPr>
+            <a:lvl6pPr>
+              <a:defRPr sz="2100" b="0">
+                <a:solidFill>
+                  <a:srgbClr val="C1D0E1"/>
+                </a:solidFill>
+              </a:defRPr>
+            </a:lvl6pPr>
+            <a:lvl7pPr>
+              <a:defRPr sz="2100" b="0">
+                <a:solidFill>
+                  <a:srgbClr val="C1D0E1"/>
+                </a:solidFill>
+              </a:defRPr>
+            </a:lvl7pPr>
+            <a:lvl8pPr>
+              <a:defRPr sz="2100" b="0">
+                <a:solidFill>
+                  <a:srgbClr val="C1D0E1"/>
+                </a:solidFill>
+              </a:defRPr>
+            </a:lvl8pPr>
+            <a:lvl9pPr>
+              <a:defRPr sz="2100" b="0">
+                <a:solidFill>
+                  <a:srgbClr val="C1D0E1"/>
+                </a:solidFill>
+              </a:defRPr>
+            </a:lvl9pPr>
+          </a:lstStyle>
+          <a:p xmlns:a="http://schemas.openxmlformats.org/drawingml/2006/main">
+            <a:pPr>
+              <a:defRPr sz="2100" b="0">
+                <a:solidFill>
+                  <a:srgbClr val="C1D0E1"/>
+                </a:solidFill>
+              </a:defRPr>
+            </a:pPr>
+            <a:r>
+              <a:rPr sz="2100" b="0">
+                <a:solidFill>
+                  <a:srgbClr val="C1D0E1"/>
+                </a:solidFill>
+              </a:rPr>
+              <a:t>Das Cockpit berücksichtigt Prüfung, Nutzung und Realisierung.</a:t>
+            </a:r>
+          </a:p>
+          <a:p xmlns:a="http://schemas.openxmlformats.org/drawingml/2006/main">
+            <a:pPr>
+              <a:defRPr sz="2100" b="0">
+                <a:solidFill>
+                  <a:srgbClr val="C1D0E1"/>
+                </a:solidFill>
+              </a:defRPr>
+            </a:pPr>
+            <a:r>
+              <a:rPr sz="2100" b="0">
+                <a:solidFill>
+                  <a:srgbClr val="C1D0E1"/>
+                </a:solidFill>
+              </a:rPr>
+              <a:t>Modellkosten, Betreuung und Implementierung bleiben sichtbar.</a:t>
+            </a:r>
+          </a:p>
+        </p:txBody>
+      </p:sp>
+      <p:sp>
+        <p:nvSpPr>
+          <p:cNvPr id="4" name="">
+            <a:extLst xmlns:a="http://schemas.openxmlformats.org/drawingml/2006/main">
+              <a:ext uri="{FF2B5EF4-FFF2-40B4-BE49-F238E27FC236}">
+                <a16:creationId xmlns:a16="http://schemas.microsoft.com/office/drawing/2014/main" id="{FCC4196D-1683-4FF6-B659-216D7DC5882D}"/>
+              </a:ext>
+            </a:extLst>
+          </p:cNvPr>
+          <p:cNvSpPr>
+            <a:spLocks xmlns:a="http://schemas.openxmlformats.org/drawingml/2006/main" noGrp="1"/>
+          </p:cNvSpPr>
+          <p:nvPr/>
+        </p:nvSpPr>
+        <p:spPr>
+          <a:xfrm xmlns:a="http://schemas.openxmlformats.org/drawingml/2006/main">
+            <a:off x="685800" y="5619750"/>
+            <a:ext cx="10668000" cy="666750"/>
+          </a:xfrm>
+          <a:prstGeom xmlns:a="http://schemas.openxmlformats.org/drawingml/2006/main" prst="rect">
+            <a:avLst/>
+          </a:prstGeom>
+          <a:noFill xmlns:a="http://schemas.openxmlformats.org/drawingml/2006/main"/>
+          <a:ln xmlns:a="http://schemas.openxmlformats.org/drawingml/2006/main" w="0">
+            <a:noFill/>
+            <a:prstDash val="solid"/>
+          </a:ln>
+        </p:spPr>
+        <p:txBody>
+          <a:bodyPr xmlns:a="http://schemas.openxmlformats.org/drawingml/2006/main"/>
+          <a:lstStyle xmlns:a="http://schemas.openxmlformats.org/drawingml/2006/main">
+            <a:defPPr>
+              <a:defRPr sz="1725" b="0">
+                <a:solidFill>
+                  <a:srgbClr val="FF9D8A"/>
+                </a:solidFill>
+              </a:defRPr>
+            </a:defPPr>
+            <a:lvl1pPr>
+              <a:defRPr sz="1725" b="0">
+                <a:solidFill>
+                  <a:srgbClr val="FF9D8A"/>
+                </a:solidFill>
+              </a:defRPr>
+            </a:lvl1pPr>
+            <a:lvl2pPr>
+              <a:defRPr sz="1725" b="0">
+                <a:solidFill>
+                  <a:srgbClr val="FF9D8A"/>
+                </a:solidFill>
+              </a:defRPr>
+            </a:lvl2pPr>
+            <a:lvl3pPr>
+              <a:defRPr sz="1725" b="0">
+                <a:solidFill>
+                  <a:srgbClr val="FF9D8A"/>
+                </a:solidFill>
+              </a:defRPr>
+            </a:lvl3pPr>
+            <a:lvl4pPr>
+              <a:defRPr sz="1725" b="0">
+                <a:solidFill>
+                  <a:srgbClr val="FF9D8A"/>
+                </a:solidFill>
+              </a:defRPr>
+            </a:lvl4pPr>
+            <a:lvl5pPr>
+              <a:defRPr sz="1725" b="0">
+                <a:solidFill>
+                  <a:srgbClr val="FF9D8A"/>
+                </a:solidFill>
+              </a:defRPr>
+            </a:lvl5pPr>
+            <a:lvl6pPr>
+              <a:defRPr sz="1725" b="0">
+                <a:solidFill>
+                  <a:srgbClr val="FF9D8A"/>
+                </a:solidFill>
+              </a:defRPr>
+            </a:lvl6pPr>
+            <a:lvl7pPr>
+              <a:defRPr sz="1725" b="0">
+                <a:solidFill>
+                  <a:srgbClr val="FF9D8A"/>
+                </a:solidFill>
+              </a:defRPr>
+            </a:lvl7pPr>
+            <a:lvl8pPr>
+              <a:defRPr sz="1725" b="0">
+                <a:solidFill>
+                  <a:srgbClr val="FF9D8A"/>
+                </a:solidFill>
+              </a:defRPr>
+            </a:lvl8pPr>
+            <a:lvl9pPr>
+              <a:defRPr sz="1725" b="0">
+                <a:solidFill>
+                  <a:srgbClr val="FF9D8A"/>
+                </a:solidFill>
+              </a:defRPr>
+            </a:lvl9pPr>
+          </a:lstStyle>
+          <a:p xmlns:a="http://schemas.openxmlformats.org/drawingml/2006/main">
+            <a:pPr>
+              <a:defRPr sz="1725" b="0">
+                <a:solidFill>
+                  <a:srgbClr val="FF9D8A"/>
+                </a:solidFill>
+              </a:defRPr>
+            </a:pPr>
+            <a:r>
+              <a:rPr sz="1725" b="0">
+                <a:solidFill>
+                  <a:srgbClr val="FF9D8A"/>
+                </a:solidFill>
+              </a:rPr>
+              <a:t>Der Bot bekommt eine Kostenstelle. Der CFO lächelt zum ersten Mal.</a:t>
+            </a:r>
+          </a:p>
+        </p:txBody>
+      </p:sp>
+    </p:spTree>
+    <p:extLst>
+      <p:ext uri="{BB962C8B-B14F-4D97-AF65-F5344CB8AC3E}">
+        <p14:creationId xmlns:p14="http://schemas.microsoft.com/office/powerpoint/2010/main" val="58058087"/>
+      </p:ext>
+    </p:extLst>
+  </p:cSld>
+</p:sld>
+</file>
+
+<file path=ppt/slides/slide15.xml><?xml version="1.0" encoding="utf-8"?>
+<p:sld xmlns:p="http://schemas.openxmlformats.org/presentationml/2006/main">
+  <p:cSld>
+    <p:bg>
+      <p:bgPr>
+        <a:solidFill xmlns:a="http://schemas.openxmlformats.org/drawingml/2006/main">
+          <a:srgbClr val="0B1220"/>
+        </a:solidFill>
+      </p:bgPr>
+    </p:bg>
+    <p:spTree>
+      <p:nvGrpSpPr>
+        <p:cNvPr id="1" name=""/>
+        <p:cNvGrpSpPr/>
+        <p:nvPr/>
+      </p:nvGrpSpPr>
+      <p:grpSpPr>
+        <a:xfrm xmlns:a="http://schemas.openxmlformats.org/drawingml/2006/main"/>
+      </p:grpSpPr>
+      <p:sp>
+        <p:nvSpPr>
+          <p:cNvPr id="5" name="">
+            <a:extLst xmlns:a="http://schemas.openxmlformats.org/drawingml/2006/main">
+              <a:ext uri="{FF2B5EF4-FFF2-40B4-BE49-F238E27FC236}">
+                <a16:creationId xmlns:a16="http://schemas.microsoft.com/office/drawing/2014/main" id="{096B9C04-C9ED-4D92-862F-2B099BC7A1EC}"/>
+              </a:ext>
+            </a:extLst>
+          </p:cNvPr>
+          <p:cNvSpPr>
+            <a:spLocks xmlns:a="http://schemas.openxmlformats.org/drawingml/2006/main" noGrp="1"/>
+          </p:cNvSpPr>
+          <p:nvPr/>
+        </p:nvSpPr>
+        <p:spPr>
+          <a:xfrm xmlns:a="http://schemas.openxmlformats.org/drawingml/2006/main">
+            <a:off x="685800" y="476250"/>
+            <a:ext cx="10668000" cy="714375"/>
+          </a:xfrm>
+          <a:prstGeom xmlns:a="http://schemas.openxmlformats.org/drawingml/2006/main" prst="rect">
+            <a:avLst/>
+          </a:prstGeom>
+          <a:noFill xmlns:a="http://schemas.openxmlformats.org/drawingml/2006/main"/>
+          <a:ln xmlns:a="http://schemas.openxmlformats.org/drawingml/2006/main" w="0">
+            <a:noFill/>
+            <a:prstDash val="solid"/>
+          </a:ln>
+        </p:spPr>
+        <p:txBody>
+          <a:bodyPr xmlns:a="http://schemas.openxmlformats.org/drawingml/2006/main"/>
+          <a:lstStyle xmlns:a="http://schemas.openxmlformats.org/drawingml/2006/main">
+            <a:defPPr>
+              <a:defRPr sz="3450" b="1">
+                <a:solidFill>
+                  <a:srgbClr val="56DDC0"/>
+                </a:solidFill>
+              </a:defRPr>
+            </a:defPPr>
+            <a:lvl1pPr>
+              <a:defRPr sz="3450" b="1">
+                <a:solidFill>
+                  <a:srgbClr val="56DDC0"/>
+                </a:solidFill>
+              </a:defRPr>
+            </a:lvl1pPr>
+            <a:lvl2pPr>
+              <a:defRPr sz="3450" b="1">
+                <a:solidFill>
+                  <a:srgbClr val="56DDC0"/>
+                </a:solidFill>
+              </a:defRPr>
+            </a:lvl2pPr>
+            <a:lvl3pPr>
+              <a:defRPr sz="3450" b="1">
+                <a:solidFill>
+                  <a:srgbClr val="56DDC0"/>
+                </a:solidFill>
+              </a:defRPr>
+            </a:lvl3pPr>
+            <a:lvl4pPr>
+              <a:defRPr sz="3450" b="1">
+                <a:solidFill>
+                  <a:srgbClr val="56DDC0"/>
+                </a:solidFill>
+              </a:defRPr>
+            </a:lvl4pPr>
+            <a:lvl5pPr>
+              <a:defRPr sz="3450" b="1">
+                <a:solidFill>
+                  <a:srgbClr val="56DDC0"/>
+                </a:solidFill>
+              </a:defRPr>
+            </a:lvl5pPr>
+            <a:lvl6pPr>
+              <a:defRPr sz="3450" b="1">
+                <a:solidFill>
+                  <a:srgbClr val="56DDC0"/>
+                </a:solidFill>
+              </a:defRPr>
+            </a:lvl6pPr>
+            <a:lvl7pPr>
+              <a:defRPr sz="3450" b="1">
+                <a:solidFill>
+                  <a:srgbClr val="56DDC0"/>
+                </a:solidFill>
+              </a:defRPr>
+            </a:lvl7pPr>
+            <a:lvl8pPr>
+              <a:defRPr sz="3450" b="1">
+                <a:solidFill>
+                  <a:srgbClr val="56DDC0"/>
+                </a:solidFill>
+              </a:defRPr>
+            </a:lvl8pPr>
+            <a:lvl9pPr>
+              <a:defRPr sz="3450" b="1">
+                <a:solidFill>
+                  <a:srgbClr val="56DDC0"/>
+                </a:solidFill>
+              </a:defRPr>
+            </a:lvl9pPr>
+          </a:lstStyle>
+          <a:p xmlns:a="http://schemas.openxmlformats.org/drawingml/2006/main">
+            <a:pPr>
+              <a:defRPr sz="3450" b="1">
+                <a:solidFill>
+                  <a:srgbClr val="56DDC0"/>
+                </a:solidFill>
+              </a:defRPr>
+            </a:pPr>
+            <a:r>
+              <a:rPr sz="3450" b="1">
+                <a:solidFill>
+                  <a:srgbClr val="56DDC0"/>
+                </a:solidFill>
+              </a:rPr>
+              <a:t>Der begrenzte Pilot</a:t>
+            </a:r>
+          </a:p>
+        </p:txBody>
+      </p:sp>
+      <p:sp>
+        <p:nvSpPr>
+          <p:cNvPr id="2" name="">
+            <a:extLst xmlns:a="http://schemas.openxmlformats.org/drawingml/2006/main">
+              <a:ext uri="{FF2B5EF4-FFF2-40B4-BE49-F238E27FC236}">
+                <a16:creationId xmlns:a16="http://schemas.microsoft.com/office/drawing/2014/main" id="{5AC33154-8EAE-4B31-8978-75C61566248F}"/>
+              </a:ext>
+            </a:extLst>
+          </p:cNvPr>
+          <p:cNvSpPr>
+            <a:spLocks xmlns:a="http://schemas.openxmlformats.org/drawingml/2006/main" noGrp="1"/>
+          </p:cNvSpPr>
+          <p:nvPr/>
+        </p:nvSpPr>
+        <p:spPr>
+          <a:xfrm xmlns:a="http://schemas.openxmlformats.org/drawingml/2006/main">
+            <a:off x="685800" y="1619250"/>
+            <a:ext cx="10668000" cy="1524000"/>
+          </a:xfrm>
+          <a:prstGeom xmlns:a="http://schemas.openxmlformats.org/drawingml/2006/main" prst="rect">
+            <a:avLst/>
+          </a:prstGeom>
+          <a:noFill xmlns:a="http://schemas.openxmlformats.org/drawingml/2006/main"/>
+          <a:ln xmlns:a="http://schemas.openxmlformats.org/drawingml/2006/main" w="0">
+            <a:noFill/>
+            <a:prstDash val="solid"/>
+          </a:ln>
+        </p:spPr>
+        <p:txBody>
+          <a:bodyPr xmlns:a="http://schemas.openxmlformats.org/drawingml/2006/main"/>
+          <a:lstStyle xmlns:a="http://schemas.openxmlformats.org/drawingml/2006/main">
+            <a:defPPr>
+              <a:defRPr sz="3150" b="1">
+                <a:solidFill>
+                  <a:srgbClr val="E8EDF6"/>
+                </a:solidFill>
+              </a:defRPr>
+            </a:defPPr>
+            <a:lvl1pPr>
+              <a:defRPr sz="3150" b="1">
+                <a:solidFill>
+                  <a:srgbClr val="E8EDF6"/>
+                </a:solidFill>
+              </a:defRPr>
+            </a:lvl1pPr>
+            <a:lvl2pPr>
+              <a:defRPr sz="3150" b="1">
+                <a:solidFill>
+                  <a:srgbClr val="E8EDF6"/>
+                </a:solidFill>
+              </a:defRPr>
+            </a:lvl2pPr>
+            <a:lvl3pPr>
+              <a:defRPr sz="3150" b="1">
+                <a:solidFill>
+                  <a:srgbClr val="E8EDF6"/>
+                </a:solidFill>
+              </a:defRPr>
+            </a:lvl3pPr>
+            <a:lvl4pPr>
+              <a:defRPr sz="3150" b="1">
+                <a:solidFill>
+                  <a:srgbClr val="E8EDF6"/>
+                </a:solidFill>
+              </a:defRPr>
+            </a:lvl4pPr>
+            <a:lvl5pPr>
+              <a:defRPr sz="3150" b="1">
+                <a:solidFill>
+                  <a:srgbClr val="E8EDF6"/>
+                </a:solidFill>
+              </a:defRPr>
+            </a:lvl5pPr>
+            <a:lvl6pPr>
+              <a:defRPr sz="3150" b="1">
+                <a:solidFill>
+                  <a:srgbClr val="E8EDF6"/>
+                </a:solidFill>
+              </a:defRPr>
+            </a:lvl6pPr>
+            <a:lvl7pPr>
+              <a:defRPr sz="3150" b="1">
+                <a:solidFill>
+                  <a:srgbClr val="E8EDF6"/>
+                </a:solidFill>
+              </a:defRPr>
+            </a:lvl7pPr>
+            <a:lvl8pPr>
+              <a:defRPr sz="3150" b="1">
+                <a:solidFill>
+                  <a:srgbClr val="E8EDF6"/>
+                </a:solidFill>
+              </a:defRPr>
+            </a:lvl8pPr>
+            <a:lvl9pPr>
+              <a:defRPr sz="3150" b="1">
+                <a:solidFill>
+                  <a:srgbClr val="E8EDF6"/>
+                </a:solidFill>
+              </a:defRPr>
+            </a:lvl9pPr>
+          </a:lstStyle>
+          <a:p xmlns:a="http://schemas.openxmlformats.org/drawingml/2006/main">
+            <a:pPr>
+              <a:defRPr sz="3150" b="1">
+                <a:solidFill>
+                  <a:srgbClr val="E8EDF6"/>
+                </a:solidFill>
+              </a:defRPr>
+            </a:pPr>
+            <a:r>
+              <a:rPr sz="3150" b="1">
+                <a:solidFill>
+                  <a:srgbClr val="E8EDF6"/>
+                </a:solidFill>
+              </a:rPr>
+              <a:t>Ein Prozess. Eine Ausgangslage.</a:t>
+            </a:r>
+          </a:p>
+          <a:p xmlns:a="http://schemas.openxmlformats.org/drawingml/2006/main">
+            <a:pPr>
+              <a:defRPr sz="3150" b="1">
+                <a:solidFill>
+                  <a:srgbClr val="E8EDF6"/>
+                </a:solidFill>
+              </a:defRPr>
+            </a:pPr>
+            <a:r>
+              <a:rPr sz="3150" b="1">
+                <a:solidFill>
+                  <a:srgbClr val="E8EDF6"/>
+                </a:solidFill>
+              </a:rPr>
+              <a:t>Eine überprüfbare Entscheidung.</a:t>
+            </a:r>
+          </a:p>
+        </p:txBody>
+      </p:sp>
+      <p:sp>
+        <p:nvSpPr>
+          <p:cNvPr id="3" name="">
+            <a:extLst xmlns:a="http://schemas.openxmlformats.org/drawingml/2006/main">
+              <a:ext uri="{FF2B5EF4-FFF2-40B4-BE49-F238E27FC236}">
+                <a16:creationId xmlns:a16="http://schemas.microsoft.com/office/drawing/2014/main" id="{654D4DF5-0E3A-4AF3-B81E-7E6A03604239}"/>
+              </a:ext>
+            </a:extLst>
+          </p:cNvPr>
+          <p:cNvSpPr>
+            <a:spLocks xmlns:a="http://schemas.openxmlformats.org/drawingml/2006/main" noGrp="1"/>
+          </p:cNvSpPr>
+          <p:nvPr/>
+        </p:nvSpPr>
+        <p:spPr>
+          <a:xfrm xmlns:a="http://schemas.openxmlformats.org/drawingml/2006/main">
+            <a:off x="685800" y="3429000"/>
+            <a:ext cx="10668000" cy="1428750"/>
+          </a:xfrm>
+          <a:prstGeom xmlns:a="http://schemas.openxmlformats.org/drawingml/2006/main" prst="rect">
+            <a:avLst/>
+          </a:prstGeom>
+          <a:noFill xmlns:a="http://schemas.openxmlformats.org/drawingml/2006/main"/>
+          <a:ln xmlns:a="http://schemas.openxmlformats.org/drawingml/2006/main" w="0">
+            <a:noFill/>
+            <a:prstDash val="solid"/>
+          </a:ln>
+        </p:spPr>
+        <p:txBody>
+          <a:bodyPr xmlns:a="http://schemas.openxmlformats.org/drawingml/2006/main"/>
+          <a:lstStyle xmlns:a="http://schemas.openxmlformats.org/drawingml/2006/main">
+            <a:defPPr>
+              <a:defRPr sz="2100" b="0">
+                <a:solidFill>
+                  <a:srgbClr val="C1D0E1"/>
+                </a:solidFill>
+              </a:defRPr>
+            </a:defPPr>
+            <a:lvl1pPr>
+              <a:defRPr sz="2100" b="0">
+                <a:solidFill>
+                  <a:srgbClr val="C1D0E1"/>
+                </a:solidFill>
+              </a:defRPr>
+            </a:lvl1pPr>
+            <a:lvl2pPr>
+              <a:defRPr sz="2100" b="0">
+                <a:solidFill>
+                  <a:srgbClr val="C1D0E1"/>
+                </a:solidFill>
+              </a:defRPr>
+            </a:lvl2pPr>
+            <a:lvl3pPr>
+              <a:defRPr sz="2100" b="0">
+                <a:solidFill>
+                  <a:srgbClr val="C1D0E1"/>
+                </a:solidFill>
+              </a:defRPr>
+            </a:lvl3pPr>
+            <a:lvl4pPr>
+              <a:defRPr sz="2100" b="0">
+                <a:solidFill>
+                  <a:srgbClr val="C1D0E1"/>
+                </a:solidFill>
+              </a:defRPr>
+            </a:lvl4pPr>
+            <a:lvl5pPr>
+              <a:defRPr sz="2100" b="0">
+                <a:solidFill>
+                  <a:srgbClr val="C1D0E1"/>
+                </a:solidFill>
+              </a:defRPr>
+            </a:lvl5pPr>
+            <a:lvl6pPr>
+              <a:defRPr sz="2100" b="0">
+                <a:solidFill>
+                  <a:srgbClr val="C1D0E1"/>
+                </a:solidFill>
+              </a:defRPr>
+            </a:lvl6pPr>
+            <a:lvl7pPr>
+              <a:defRPr sz="2100" b="0">
+                <a:solidFill>
+                  <a:srgbClr val="C1D0E1"/>
+                </a:solidFill>
+              </a:defRPr>
+            </a:lvl7pPr>
+            <a:lvl8pPr>
+              <a:defRPr sz="2100" b="0">
+                <a:solidFill>
+                  <a:srgbClr val="C1D0E1"/>
+                </a:solidFill>
+              </a:defRPr>
+            </a:lvl8pPr>
+            <a:lvl9pPr>
+              <a:defRPr sz="2100" b="0">
+                <a:solidFill>
+                  <a:srgbClr val="C1D0E1"/>
+                </a:solidFill>
+              </a:defRPr>
+            </a:lvl9pPr>
+          </a:lstStyle>
+          <a:p xmlns:a="http://schemas.openxmlformats.org/drawingml/2006/main">
+            <a:pPr>
+              <a:defRPr sz="2100" b="0">
+                <a:solidFill>
+                  <a:srgbClr val="C1D0E1"/>
+                </a:solidFill>
+              </a:defRPr>
+            </a:pPr>
+            <a:r>
+              <a:rPr sz="2100" b="0">
+                <a:solidFill>
+                  <a:srgbClr val="C1D0E1"/>
+                </a:solidFill>
+              </a:rPr>
+              <a:t>Der Pilot prüft Qualität, Fehler und Gesamtkosten.</a:t>
+            </a:r>
+          </a:p>
+          <a:p xmlns:a="http://schemas.openxmlformats.org/drawingml/2006/main">
+            <a:pPr>
+              <a:defRPr sz="2100" b="0">
+                <a:solidFill>
+                  <a:srgbClr val="C1D0E1"/>
+                </a:solidFill>
+              </a:defRPr>
+            </a:pPr>
+            <a:r>
+              <a:rPr sz="2100" b="0">
+                <a:solidFill>
+                  <a:srgbClr val="C1D0E1"/>
+                </a:solidFill>
+              </a:rPr>
+              <a:t>Eine Ausweitung folgt den gemessenen Ergebnissen.</a:t>
+            </a:r>
+          </a:p>
+        </p:txBody>
+      </p:sp>
+      <p:sp>
+        <p:nvSpPr>
+          <p:cNvPr id="4" name="">
+            <a:extLst xmlns:a="http://schemas.openxmlformats.org/drawingml/2006/main">
+              <a:ext uri="{FF2B5EF4-FFF2-40B4-BE49-F238E27FC236}">
+                <a16:creationId xmlns:a16="http://schemas.microsoft.com/office/drawing/2014/main" id="{8DB1152E-2FE5-4A40-A736-D3CA3F3977DE}"/>
+              </a:ext>
+            </a:extLst>
+          </p:cNvPr>
+          <p:cNvSpPr>
+            <a:spLocks xmlns:a="http://schemas.openxmlformats.org/drawingml/2006/main" noGrp="1"/>
+          </p:cNvSpPr>
+          <p:nvPr/>
+        </p:nvSpPr>
+        <p:spPr>
+          <a:xfrm xmlns:a="http://schemas.openxmlformats.org/drawingml/2006/main">
+            <a:off x="685800" y="5619750"/>
+            <a:ext cx="10668000" cy="666750"/>
+          </a:xfrm>
+          <a:prstGeom xmlns:a="http://schemas.openxmlformats.org/drawingml/2006/main" prst="rect">
+            <a:avLst/>
+          </a:prstGeom>
+          <a:noFill xmlns:a="http://schemas.openxmlformats.org/drawingml/2006/main"/>
+          <a:ln xmlns:a="http://schemas.openxmlformats.org/drawingml/2006/main" w="0">
+            <a:noFill/>
+            <a:prstDash val="solid"/>
+          </a:ln>
+        </p:spPr>
+        <p:txBody>
+          <a:bodyPr xmlns:a="http://schemas.openxmlformats.org/drawingml/2006/main"/>
+          <a:lstStyle xmlns:a="http://schemas.openxmlformats.org/drawingml/2006/main">
+            <a:defPPr>
+              <a:defRPr sz="1725" b="0">
+                <a:solidFill>
+                  <a:srgbClr val="FF9D8A"/>
+                </a:solidFill>
+              </a:defRPr>
+            </a:defPPr>
+            <a:lvl1pPr>
+              <a:defRPr sz="1725" b="0">
+                <a:solidFill>
+                  <a:srgbClr val="FF9D8A"/>
+                </a:solidFill>
+              </a:defRPr>
+            </a:lvl1pPr>
+            <a:lvl2pPr>
+              <a:defRPr sz="1725" b="0">
+                <a:solidFill>
+                  <a:srgbClr val="FF9D8A"/>
+                </a:solidFill>
+              </a:defRPr>
+            </a:lvl2pPr>
+            <a:lvl3pPr>
+              <a:defRPr sz="1725" b="0">
+                <a:solidFill>
+                  <a:srgbClr val="FF9D8A"/>
+                </a:solidFill>
+              </a:defRPr>
+            </a:lvl3pPr>
+            <a:lvl4pPr>
+              <a:defRPr sz="1725" b="0">
+                <a:solidFill>
+                  <a:srgbClr val="FF9D8A"/>
+                </a:solidFill>
+              </a:defRPr>
+            </a:lvl4pPr>
+            <a:lvl5pPr>
+              <a:defRPr sz="1725" b="0">
+                <a:solidFill>
+                  <a:srgbClr val="FF9D8A"/>
+                </a:solidFill>
+              </a:defRPr>
+            </a:lvl5pPr>
+            <a:lvl6pPr>
+              <a:defRPr sz="1725" b="0">
+                <a:solidFill>
+                  <a:srgbClr val="FF9D8A"/>
+                </a:solidFill>
+              </a:defRPr>
+            </a:lvl6pPr>
+            <a:lvl7pPr>
+              <a:defRPr sz="1725" b="0">
+                <a:solidFill>
+                  <a:srgbClr val="FF9D8A"/>
+                </a:solidFill>
+              </a:defRPr>
+            </a:lvl7pPr>
+            <a:lvl8pPr>
+              <a:defRPr sz="1725" b="0">
+                <a:solidFill>
+                  <a:srgbClr val="FF9D8A"/>
+                </a:solidFill>
+              </a:defRPr>
+            </a:lvl8pPr>
+            <a:lvl9pPr>
+              <a:defRPr sz="1725" b="0">
+                <a:solidFill>
+                  <a:srgbClr val="FF9D8A"/>
+                </a:solidFill>
+              </a:defRPr>
+            </a:lvl9pPr>
+          </a:lstStyle>
+          <a:p xmlns:a="http://schemas.openxmlformats.org/drawingml/2006/main">
+            <a:pPr>
+              <a:defRPr sz="1725" b="0">
+                <a:solidFill>
+                  <a:srgbClr val="FF9D8A"/>
+                </a:solidFill>
+              </a:defRPr>
+            </a:pPr>
+            <a:r>
+              <a:rPr sz="1725" b="0">
+                <a:solidFill>
+                  <a:srgbClr val="FF9D8A"/>
+                </a:solidFill>
+              </a:rPr>
+              <a:t>Ein KI-Lenkungskreis lenkt noch keinen einzigen Warenkorb.</a:t>
+            </a:r>
+          </a:p>
+        </p:txBody>
+      </p:sp>
+    </p:spTree>
+    <p:extLst>
+      <p:ext uri="{BB962C8B-B14F-4D97-AF65-F5344CB8AC3E}">
+        <p14:creationId xmlns:p14="http://schemas.microsoft.com/office/powerpoint/2010/main" val="1677110372"/>
       </p:ext>
     </p:extLst>
   </p:cSld>
@@ -3924,7 +7774,7 @@
           <p:cNvPr id="5" name="">
             <a:extLst xmlns:a="http://schemas.openxmlformats.org/drawingml/2006/main">
               <a:ext uri="{FF2B5EF4-FFF2-40B4-BE49-F238E27FC236}">
-                <a16:creationId xmlns:a16="http://schemas.microsoft.com/office/drawing/2014/main" id="{5A9D5085-794F-4CEC-BBE1-2169F3C3EAC7}"/>
+                <a16:creationId xmlns:a16="http://schemas.microsoft.com/office/drawing/2014/main" id="{8C394225-27D9-4342-AE1F-F3BD2708ECD7}"/>
               </a:ext>
             </a:extLst>
           </p:cNvPr>
@@ -4045,7 +7895,7 @@
           <p:cNvPr id="2" name="">
             <a:extLst xmlns:a="http://schemas.openxmlformats.org/drawingml/2006/main">
               <a:ext uri="{FF2B5EF4-FFF2-40B4-BE49-F238E27FC236}">
-                <a16:creationId xmlns:a16="http://schemas.microsoft.com/office/drawing/2014/main" id="{E706F61E-D5C7-4A6B-886D-4C18D39219D5}"/>
+                <a16:creationId xmlns:a16="http://schemas.microsoft.com/office/drawing/2014/main" id="{576C0F39-86DC-4F28-A7F9-5EE75095A69F}"/>
               </a:ext>
             </a:extLst>
           </p:cNvPr>
@@ -4183,7 +8033,7 @@
           <p:cNvPr id="3" name="">
             <a:extLst xmlns:a="http://schemas.openxmlformats.org/drawingml/2006/main">
               <a:ext uri="{FF2B5EF4-FFF2-40B4-BE49-F238E27FC236}">
-                <a16:creationId xmlns:a16="http://schemas.microsoft.com/office/drawing/2014/main" id="{D072DDD2-B735-435D-AF98-4FFB7282F226}"/>
+                <a16:creationId xmlns:a16="http://schemas.microsoft.com/office/drawing/2014/main" id="{957C7DEA-DE78-435F-8238-941130B5CFDB}"/>
               </a:ext>
             </a:extLst>
           </p:cNvPr>
@@ -4321,7 +8171,7 @@
           <p:cNvPr id="4" name="">
             <a:extLst xmlns:a="http://schemas.openxmlformats.org/drawingml/2006/main">
               <a:ext uri="{FF2B5EF4-FFF2-40B4-BE49-F238E27FC236}">
-                <a16:creationId xmlns:a16="http://schemas.microsoft.com/office/drawing/2014/main" id="{E9F16FB1-3E64-4871-9252-8379DE2F7F52}"/>
+                <a16:creationId xmlns:a16="http://schemas.microsoft.com/office/drawing/2014/main" id="{C12E2DCB-60BF-453C-9C01-7837787E8805}"/>
               </a:ext>
             </a:extLst>
           </p:cNvPr>
@@ -4440,7 +8290,7 @@
     </p:spTree>
     <p:extLst>
       <p:ext uri="{BB962C8B-B14F-4D97-AF65-F5344CB8AC3E}">
-        <p14:creationId xmlns:p14="http://schemas.microsoft.com/office/powerpoint/2010/main" val="1603213696"/>
+        <p14:creationId xmlns:p14="http://schemas.microsoft.com/office/powerpoint/2010/main" val="1037040012"/>
       </p:ext>
     </p:extLst>
   </p:cSld>
@@ -4471,7 +8321,7 @@
           <p:cNvPr id="5" name="">
             <a:extLst xmlns:a="http://schemas.openxmlformats.org/drawingml/2006/main">
               <a:ext uri="{FF2B5EF4-FFF2-40B4-BE49-F238E27FC236}">
-                <a16:creationId xmlns:a16="http://schemas.microsoft.com/office/drawing/2014/main" id="{19C5BC12-4C89-4B3B-A8E3-BE664DE1C559}"/>
+                <a16:creationId xmlns:a16="http://schemas.microsoft.com/office/drawing/2014/main" id="{0A733734-F24B-4621-AC84-00E3AB4E7110}"/>
               </a:ext>
             </a:extLst>
           </p:cNvPr>
@@ -4592,7 +8442,7 @@
           <p:cNvPr id="2" name="">
             <a:extLst xmlns:a="http://schemas.openxmlformats.org/drawingml/2006/main">
               <a:ext uri="{FF2B5EF4-FFF2-40B4-BE49-F238E27FC236}">
-                <a16:creationId xmlns:a16="http://schemas.microsoft.com/office/drawing/2014/main" id="{34FCAC2E-A010-4423-9EAC-8178CC7DD59F}"/>
+                <a16:creationId xmlns:a16="http://schemas.microsoft.com/office/drawing/2014/main" id="{831EB432-243D-4E4B-A3E7-F6D125B0B8CB}"/>
               </a:ext>
             </a:extLst>
           </p:cNvPr>
@@ -4730,7 +8580,7 @@
           <p:cNvPr id="3" name="">
             <a:extLst xmlns:a="http://schemas.openxmlformats.org/drawingml/2006/main">
               <a:ext uri="{FF2B5EF4-FFF2-40B4-BE49-F238E27FC236}">
-                <a16:creationId xmlns:a16="http://schemas.microsoft.com/office/drawing/2014/main" id="{D0583990-DC13-4767-BB85-6C15A23681CF}"/>
+                <a16:creationId xmlns:a16="http://schemas.microsoft.com/office/drawing/2014/main" id="{D57AD857-9C50-4F19-9742-850154650E57}"/>
               </a:ext>
             </a:extLst>
           </p:cNvPr>
@@ -4885,7 +8735,7 @@
           <p:cNvPr id="4" name="">
             <a:extLst xmlns:a="http://schemas.openxmlformats.org/drawingml/2006/main">
               <a:ext uri="{FF2B5EF4-FFF2-40B4-BE49-F238E27FC236}">
-                <a16:creationId xmlns:a16="http://schemas.microsoft.com/office/drawing/2014/main" id="{2992A5AA-8FA5-469B-88FD-013D8ED5FA91}"/>
+                <a16:creationId xmlns:a16="http://schemas.microsoft.com/office/drawing/2014/main" id="{F85BEE14-A8E5-4128-9452-BD66ADF0F9ED}"/>
               </a:ext>
             </a:extLst>
           </p:cNvPr>
@@ -5004,7 +8854,7 @@
     </p:spTree>
     <p:extLst>
       <p:ext uri="{BB962C8B-B14F-4D97-AF65-F5344CB8AC3E}">
-        <p14:creationId xmlns:p14="http://schemas.microsoft.com/office/powerpoint/2010/main" val="425155445"/>
+        <p14:creationId xmlns:p14="http://schemas.microsoft.com/office/powerpoint/2010/main" val="754768852"/>
       </p:ext>
     </p:extLst>
   </p:cSld>
@@ -5035,7 +8885,7 @@
           <p:cNvPr id="5" name="">
             <a:extLst xmlns:a="http://schemas.openxmlformats.org/drawingml/2006/main">
               <a:ext uri="{FF2B5EF4-FFF2-40B4-BE49-F238E27FC236}">
-                <a16:creationId xmlns:a16="http://schemas.microsoft.com/office/drawing/2014/main" id="{EBAA08C0-E53E-4EC6-85F6-DDF565D15855}"/>
+                <a16:creationId xmlns:a16="http://schemas.microsoft.com/office/drawing/2014/main" id="{FA45C5E3-4FC7-4C4F-87D7-B3A6BA1E4414}"/>
               </a:ext>
             </a:extLst>
           </p:cNvPr>
@@ -5156,7 +9006,7 @@
           <p:cNvPr id="2" name="">
             <a:extLst xmlns:a="http://schemas.openxmlformats.org/drawingml/2006/main">
               <a:ext uri="{FF2B5EF4-FFF2-40B4-BE49-F238E27FC236}">
-                <a16:creationId xmlns:a16="http://schemas.microsoft.com/office/drawing/2014/main" id="{53430DE4-8661-4617-AF62-F808BF40D1F9}"/>
+                <a16:creationId xmlns:a16="http://schemas.microsoft.com/office/drawing/2014/main" id="{A99DEA60-D62D-480D-8279-817384A71854}"/>
               </a:ext>
             </a:extLst>
           </p:cNvPr>
@@ -5294,7 +9144,7 @@
           <p:cNvPr id="3" name="">
             <a:extLst xmlns:a="http://schemas.openxmlformats.org/drawingml/2006/main">
               <a:ext uri="{FF2B5EF4-FFF2-40B4-BE49-F238E27FC236}">
-                <a16:creationId xmlns:a16="http://schemas.microsoft.com/office/drawing/2014/main" id="{1B054F2A-28A3-4111-BD02-0D8CB8F2515D}"/>
+                <a16:creationId xmlns:a16="http://schemas.microsoft.com/office/drawing/2014/main" id="{484AEBBF-E62F-4DCC-AD16-104297BE9F90}"/>
               </a:ext>
             </a:extLst>
           </p:cNvPr>
@@ -5432,7 +9282,7 @@
           <p:cNvPr id="4" name="">
             <a:extLst xmlns:a="http://schemas.openxmlformats.org/drawingml/2006/main">
               <a:ext uri="{FF2B5EF4-FFF2-40B4-BE49-F238E27FC236}">
-                <a16:creationId xmlns:a16="http://schemas.microsoft.com/office/drawing/2014/main" id="{0C9954AC-3A68-42E9-982E-77A771606AB5}"/>
+                <a16:creationId xmlns:a16="http://schemas.microsoft.com/office/drawing/2014/main" id="{53405DF7-C553-44F1-97B6-6E4BF69DE874}"/>
               </a:ext>
             </a:extLst>
           </p:cNvPr>
@@ -5551,7 +9401,7 @@
     </p:spTree>
     <p:extLst>
       <p:ext uri="{BB962C8B-B14F-4D97-AF65-F5344CB8AC3E}">
-        <p14:creationId xmlns:p14="http://schemas.microsoft.com/office/powerpoint/2010/main" val="712477913"/>
+        <p14:creationId xmlns:p14="http://schemas.microsoft.com/office/powerpoint/2010/main" val="1072162141"/>
       </p:ext>
     </p:extLst>
   </p:cSld>
@@ -5582,7 +9432,7 @@
           <p:cNvPr id="5" name="">
             <a:extLst xmlns:a="http://schemas.openxmlformats.org/drawingml/2006/main">
               <a:ext uri="{FF2B5EF4-FFF2-40B4-BE49-F238E27FC236}">
-                <a16:creationId xmlns:a16="http://schemas.microsoft.com/office/drawing/2014/main" id="{0A66B6AD-5E5E-4BEC-8877-848DA098B285}"/>
+                <a16:creationId xmlns:a16="http://schemas.microsoft.com/office/drawing/2014/main" id="{93E4FADA-1C99-4F41-8A22-EA6DFAE14161}"/>
               </a:ext>
             </a:extLst>
           </p:cNvPr>
@@ -5703,7 +9553,7 @@
           <p:cNvPr id="2" name="">
             <a:extLst xmlns:a="http://schemas.openxmlformats.org/drawingml/2006/main">
               <a:ext uri="{FF2B5EF4-FFF2-40B4-BE49-F238E27FC236}">
-                <a16:creationId xmlns:a16="http://schemas.microsoft.com/office/drawing/2014/main" id="{61A370B0-DE23-4F0B-82A9-F50CEF4CD3F7}"/>
+                <a16:creationId xmlns:a16="http://schemas.microsoft.com/office/drawing/2014/main" id="{CD065B7B-4A4A-4B78-97D3-BEBBADB60E19}"/>
               </a:ext>
             </a:extLst>
           </p:cNvPr>
@@ -5841,7 +9691,7 @@
           <p:cNvPr id="3" name="">
             <a:extLst xmlns:a="http://schemas.openxmlformats.org/drawingml/2006/main">
               <a:ext uri="{FF2B5EF4-FFF2-40B4-BE49-F238E27FC236}">
-                <a16:creationId xmlns:a16="http://schemas.microsoft.com/office/drawing/2014/main" id="{63FCF637-7066-4C2E-995C-D1D8559D8A96}"/>
+                <a16:creationId xmlns:a16="http://schemas.microsoft.com/office/drawing/2014/main" id="{39B6F86F-5F3F-41BF-9BCA-50FCCC3FC24C}"/>
               </a:ext>
             </a:extLst>
           </p:cNvPr>
@@ -5979,7 +9829,7 @@
           <p:cNvPr id="4" name="">
             <a:extLst xmlns:a="http://schemas.openxmlformats.org/drawingml/2006/main">
               <a:ext uri="{FF2B5EF4-FFF2-40B4-BE49-F238E27FC236}">
-                <a16:creationId xmlns:a16="http://schemas.microsoft.com/office/drawing/2014/main" id="{AFEB9A85-3501-43E5-A583-DE65F6875EA7}"/>
+                <a16:creationId xmlns:a16="http://schemas.microsoft.com/office/drawing/2014/main" id="{67D70127-A7CA-4BE8-95B2-0836EC8337F8}"/>
               </a:ext>
             </a:extLst>
           </p:cNvPr>
@@ -6098,7 +9948,7 @@
     </p:spTree>
     <p:extLst>
       <p:ext uri="{BB962C8B-B14F-4D97-AF65-F5344CB8AC3E}">
-        <p14:creationId xmlns:p14="http://schemas.microsoft.com/office/powerpoint/2010/main" val="1500908499"/>
+        <p14:creationId xmlns:p14="http://schemas.microsoft.com/office/powerpoint/2010/main" val="1102726308"/>
       </p:ext>
     </p:extLst>
   </p:cSld>
@@ -6129,7 +9979,7 @@
           <p:cNvPr id="5" name="">
             <a:extLst xmlns:a="http://schemas.openxmlformats.org/drawingml/2006/main">
               <a:ext uri="{FF2B5EF4-FFF2-40B4-BE49-F238E27FC236}">
-                <a16:creationId xmlns:a16="http://schemas.microsoft.com/office/drawing/2014/main" id="{7EC6E528-2BE6-43EC-9A19-211E11A248B5}"/>
+                <a16:creationId xmlns:a16="http://schemas.microsoft.com/office/drawing/2014/main" id="{D1DC6F81-834B-42ED-B74B-C639E410A809}"/>
               </a:ext>
             </a:extLst>
           </p:cNvPr>
@@ -6250,7 +10100,7 @@
           <p:cNvPr id="2" name="">
             <a:extLst xmlns:a="http://schemas.openxmlformats.org/drawingml/2006/main">
               <a:ext uri="{FF2B5EF4-FFF2-40B4-BE49-F238E27FC236}">
-                <a16:creationId xmlns:a16="http://schemas.microsoft.com/office/drawing/2014/main" id="{BEA735B7-50A6-47DF-9FDB-5448314A360C}"/>
+                <a16:creationId xmlns:a16="http://schemas.microsoft.com/office/drawing/2014/main" id="{7C5D98C1-B94D-49E3-9D97-4707A998375D}"/>
               </a:ext>
             </a:extLst>
           </p:cNvPr>
@@ -6388,7 +10238,7 @@
           <p:cNvPr id="3" name="">
             <a:extLst xmlns:a="http://schemas.openxmlformats.org/drawingml/2006/main">
               <a:ext uri="{FF2B5EF4-FFF2-40B4-BE49-F238E27FC236}">
-                <a16:creationId xmlns:a16="http://schemas.microsoft.com/office/drawing/2014/main" id="{F34FAEE2-750B-4C1B-BA1C-4C713C36EAE4}"/>
+                <a16:creationId xmlns:a16="http://schemas.microsoft.com/office/drawing/2014/main" id="{30DC3FA2-AC5E-4F94-A662-25D294CD4878}"/>
               </a:ext>
             </a:extLst>
           </p:cNvPr>
@@ -6543,7 +10393,7 @@
           <p:cNvPr id="4" name="">
             <a:extLst xmlns:a="http://schemas.openxmlformats.org/drawingml/2006/main">
               <a:ext uri="{FF2B5EF4-FFF2-40B4-BE49-F238E27FC236}">
-                <a16:creationId xmlns:a16="http://schemas.microsoft.com/office/drawing/2014/main" id="{9B7ED092-BEE4-49BA-AB08-162BA485E58A}"/>
+                <a16:creationId xmlns:a16="http://schemas.microsoft.com/office/drawing/2014/main" id="{6FAA3653-0960-4F04-889D-8B7A0C00806B}"/>
               </a:ext>
             </a:extLst>
           </p:cNvPr>
@@ -6662,7 +10512,7 @@
     </p:spTree>
     <p:extLst>
       <p:ext uri="{BB962C8B-B14F-4D97-AF65-F5344CB8AC3E}">
-        <p14:creationId xmlns:p14="http://schemas.microsoft.com/office/powerpoint/2010/main" val="1064964504"/>
+        <p14:creationId xmlns:p14="http://schemas.microsoft.com/office/powerpoint/2010/main" val="47963129"/>
       </p:ext>
     </p:extLst>
   </p:cSld>
@@ -6693,7 +10543,7 @@
           <p:cNvPr id="5" name="">
             <a:extLst xmlns:a="http://schemas.openxmlformats.org/drawingml/2006/main">
               <a:ext uri="{FF2B5EF4-FFF2-40B4-BE49-F238E27FC236}">
-                <a16:creationId xmlns:a16="http://schemas.microsoft.com/office/drawing/2014/main" id="{E209382B-C25A-4AED-A1A8-0DD67D7ED688}"/>
+                <a16:creationId xmlns:a16="http://schemas.microsoft.com/office/drawing/2014/main" id="{3A752B64-9FC8-4C21-A338-06000ACD8030}"/>
               </a:ext>
             </a:extLst>
           </p:cNvPr>
@@ -6814,7 +10664,7 @@
           <p:cNvPr id="2" name="">
             <a:extLst xmlns:a="http://schemas.openxmlformats.org/drawingml/2006/main">
               <a:ext uri="{FF2B5EF4-FFF2-40B4-BE49-F238E27FC236}">
-                <a16:creationId xmlns:a16="http://schemas.microsoft.com/office/drawing/2014/main" id="{3690C345-39A3-4770-93E1-1D4BB2AAC644}"/>
+                <a16:creationId xmlns:a16="http://schemas.microsoft.com/office/drawing/2014/main" id="{C15B8BD3-D337-4922-AB12-84D3AD5FE3D4}"/>
               </a:ext>
             </a:extLst>
           </p:cNvPr>
@@ -6952,7 +10802,7 @@
           <p:cNvPr id="3" name="">
             <a:extLst xmlns:a="http://schemas.openxmlformats.org/drawingml/2006/main">
               <a:ext uri="{FF2B5EF4-FFF2-40B4-BE49-F238E27FC236}">
-                <a16:creationId xmlns:a16="http://schemas.microsoft.com/office/drawing/2014/main" id="{65D8FE79-CE0F-4781-9A65-D164EBBE7459}"/>
+                <a16:creationId xmlns:a16="http://schemas.microsoft.com/office/drawing/2014/main" id="{001196DD-025F-4B5D-B5BC-614F9D37107D}"/>
               </a:ext>
             </a:extLst>
           </p:cNvPr>
@@ -7107,7 +10957,7 @@
           <p:cNvPr id="4" name="">
             <a:extLst xmlns:a="http://schemas.openxmlformats.org/drawingml/2006/main">
               <a:ext uri="{FF2B5EF4-FFF2-40B4-BE49-F238E27FC236}">
-                <a16:creationId xmlns:a16="http://schemas.microsoft.com/office/drawing/2014/main" id="{564641EC-A434-41A1-A70A-914256ADBD03}"/>
+                <a16:creationId xmlns:a16="http://schemas.microsoft.com/office/drawing/2014/main" id="{B45AE91C-1FDA-4BB8-B6DD-D487EF1CC6FC}"/>
               </a:ext>
             </a:extLst>
           </p:cNvPr>
@@ -7226,7 +11076,1101 @@
     </p:spTree>
     <p:extLst>
       <p:ext uri="{BB962C8B-B14F-4D97-AF65-F5344CB8AC3E}">
-        <p14:creationId xmlns:p14="http://schemas.microsoft.com/office/powerpoint/2010/main" val="533917939"/>
+        <p14:creationId xmlns:p14="http://schemas.microsoft.com/office/powerpoint/2010/main" val="1182246921"/>
+      </p:ext>
+    </p:extLst>
+  </p:cSld>
+</p:sld>
+</file>
+
+<file path=ppt/slides/slide8.xml><?xml version="1.0" encoding="utf-8"?>
+<p:sld xmlns:p="http://schemas.openxmlformats.org/presentationml/2006/main">
+  <p:cSld>
+    <p:bg>
+      <p:bgPr>
+        <a:solidFill xmlns:a="http://schemas.openxmlformats.org/drawingml/2006/main">
+          <a:srgbClr val="0B1220"/>
+        </a:solidFill>
+      </p:bgPr>
+    </p:bg>
+    <p:spTree>
+      <p:nvGrpSpPr>
+        <p:cNvPr id="1" name=""/>
+        <p:cNvGrpSpPr/>
+        <p:nvPr/>
+      </p:nvGrpSpPr>
+      <p:grpSpPr>
+        <a:xfrm xmlns:a="http://schemas.openxmlformats.org/drawingml/2006/main"/>
+      </p:grpSpPr>
+      <p:sp>
+        <p:nvSpPr>
+          <p:cNvPr id="5" name="">
+            <a:extLst xmlns:a="http://schemas.openxmlformats.org/drawingml/2006/main">
+              <a:ext uri="{FF2B5EF4-FFF2-40B4-BE49-F238E27FC236}">
+                <a16:creationId xmlns:a16="http://schemas.microsoft.com/office/drawing/2014/main" id="{5F83F480-C35C-4D19-86D9-C051EB6A9A05}"/>
+              </a:ext>
+            </a:extLst>
+          </p:cNvPr>
+          <p:cNvSpPr>
+            <a:spLocks xmlns:a="http://schemas.openxmlformats.org/drawingml/2006/main" noGrp="1"/>
+          </p:cNvSpPr>
+          <p:nvPr/>
+        </p:nvSpPr>
+        <p:spPr>
+          <a:xfrm xmlns:a="http://schemas.openxmlformats.org/drawingml/2006/main">
+            <a:off x="685800" y="476250"/>
+            <a:ext cx="10668000" cy="714375"/>
+          </a:xfrm>
+          <a:prstGeom xmlns:a="http://schemas.openxmlformats.org/drawingml/2006/main" prst="rect">
+            <a:avLst/>
+          </a:prstGeom>
+          <a:noFill xmlns:a="http://schemas.openxmlformats.org/drawingml/2006/main"/>
+          <a:ln xmlns:a="http://schemas.openxmlformats.org/drawingml/2006/main" w="0">
+            <a:noFill/>
+            <a:prstDash val="solid"/>
+          </a:ln>
+        </p:spPr>
+        <p:txBody>
+          <a:bodyPr xmlns:a="http://schemas.openxmlformats.org/drawingml/2006/main"/>
+          <a:lstStyle xmlns:a="http://schemas.openxmlformats.org/drawingml/2006/main">
+            <a:defPPr>
+              <a:defRPr sz="3450" b="1">
+                <a:solidFill>
+                  <a:srgbClr val="56DDC0"/>
+                </a:solidFill>
+              </a:defRPr>
+            </a:defPPr>
+            <a:lvl1pPr>
+              <a:defRPr sz="3450" b="1">
+                <a:solidFill>
+                  <a:srgbClr val="56DDC0"/>
+                </a:solidFill>
+              </a:defRPr>
+            </a:lvl1pPr>
+            <a:lvl2pPr>
+              <a:defRPr sz="3450" b="1">
+                <a:solidFill>
+                  <a:srgbClr val="56DDC0"/>
+                </a:solidFill>
+              </a:defRPr>
+            </a:lvl2pPr>
+            <a:lvl3pPr>
+              <a:defRPr sz="3450" b="1">
+                <a:solidFill>
+                  <a:srgbClr val="56DDC0"/>
+                </a:solidFill>
+              </a:defRPr>
+            </a:lvl3pPr>
+            <a:lvl4pPr>
+              <a:defRPr sz="3450" b="1">
+                <a:solidFill>
+                  <a:srgbClr val="56DDC0"/>
+                </a:solidFill>
+              </a:defRPr>
+            </a:lvl4pPr>
+            <a:lvl5pPr>
+              <a:defRPr sz="3450" b="1">
+                <a:solidFill>
+                  <a:srgbClr val="56DDC0"/>
+                </a:solidFill>
+              </a:defRPr>
+            </a:lvl5pPr>
+            <a:lvl6pPr>
+              <a:defRPr sz="3450" b="1">
+                <a:solidFill>
+                  <a:srgbClr val="56DDC0"/>
+                </a:solidFill>
+              </a:defRPr>
+            </a:lvl6pPr>
+            <a:lvl7pPr>
+              <a:defRPr sz="3450" b="1">
+                <a:solidFill>
+                  <a:srgbClr val="56DDC0"/>
+                </a:solidFill>
+              </a:defRPr>
+            </a:lvl7pPr>
+            <a:lvl8pPr>
+              <a:defRPr sz="3450" b="1">
+                <a:solidFill>
+                  <a:srgbClr val="56DDC0"/>
+                </a:solidFill>
+              </a:defRPr>
+            </a:lvl8pPr>
+            <a:lvl9pPr>
+              <a:defRPr sz="3450" b="1">
+                <a:solidFill>
+                  <a:srgbClr val="56DDC0"/>
+                </a:solidFill>
+              </a:defRPr>
+            </a:lvl9pPr>
+          </a:lstStyle>
+          <a:p xmlns:a="http://schemas.openxmlformats.org/drawingml/2006/main">
+            <a:pPr>
+              <a:defRPr sz="3450" b="1">
+                <a:solidFill>
+                  <a:srgbClr val="56DDC0"/>
+                </a:solidFill>
+              </a:defRPr>
+            </a:pPr>
+            <a:r>
+              <a:rPr sz="3450" b="1">
+                <a:solidFill>
+                  <a:srgbClr val="56DDC0"/>
+                </a:solidFill>
+              </a:rPr>
+              <a:t>KI im Unternehmen</a:t>
+            </a:r>
+          </a:p>
+        </p:txBody>
+      </p:sp>
+      <p:sp>
+        <p:nvSpPr>
+          <p:cNvPr id="2" name="">
+            <a:extLst xmlns:a="http://schemas.openxmlformats.org/drawingml/2006/main">
+              <a:ext uri="{FF2B5EF4-FFF2-40B4-BE49-F238E27FC236}">
+                <a16:creationId xmlns:a16="http://schemas.microsoft.com/office/drawing/2014/main" id="{4D9E3524-AD69-480C-9A59-99E2757ED267}"/>
+              </a:ext>
+            </a:extLst>
+          </p:cNvPr>
+          <p:cNvSpPr>
+            <a:spLocks xmlns:a="http://schemas.openxmlformats.org/drawingml/2006/main" noGrp="1"/>
+          </p:cNvSpPr>
+          <p:nvPr/>
+        </p:nvSpPr>
+        <p:spPr>
+          <a:xfrm xmlns:a="http://schemas.openxmlformats.org/drawingml/2006/main">
+            <a:off x="685800" y="1619250"/>
+            <a:ext cx="10668000" cy="1524000"/>
+          </a:xfrm>
+          <a:prstGeom xmlns:a="http://schemas.openxmlformats.org/drawingml/2006/main" prst="rect">
+            <a:avLst/>
+          </a:prstGeom>
+          <a:noFill xmlns:a="http://schemas.openxmlformats.org/drawingml/2006/main"/>
+          <a:ln xmlns:a="http://schemas.openxmlformats.org/drawingml/2006/main" w="0">
+            <a:noFill/>
+            <a:prstDash val="solid"/>
+          </a:ln>
+        </p:spPr>
+        <p:txBody>
+          <a:bodyPr xmlns:a="http://schemas.openxmlformats.org/drawingml/2006/main"/>
+          <a:lstStyle xmlns:a="http://schemas.openxmlformats.org/drawingml/2006/main">
+            <a:defPPr>
+              <a:defRPr sz="3150" b="1">
+                <a:solidFill>
+                  <a:srgbClr val="E8EDF6"/>
+                </a:solidFill>
+              </a:defRPr>
+            </a:defPPr>
+            <a:lvl1pPr>
+              <a:defRPr sz="3150" b="1">
+                <a:solidFill>
+                  <a:srgbClr val="E8EDF6"/>
+                </a:solidFill>
+              </a:defRPr>
+            </a:lvl1pPr>
+            <a:lvl2pPr>
+              <a:defRPr sz="3150" b="1">
+                <a:solidFill>
+                  <a:srgbClr val="E8EDF6"/>
+                </a:solidFill>
+              </a:defRPr>
+            </a:lvl2pPr>
+            <a:lvl3pPr>
+              <a:defRPr sz="3150" b="1">
+                <a:solidFill>
+                  <a:srgbClr val="E8EDF6"/>
+                </a:solidFill>
+              </a:defRPr>
+            </a:lvl3pPr>
+            <a:lvl4pPr>
+              <a:defRPr sz="3150" b="1">
+                <a:solidFill>
+                  <a:srgbClr val="E8EDF6"/>
+                </a:solidFill>
+              </a:defRPr>
+            </a:lvl4pPr>
+            <a:lvl5pPr>
+              <a:defRPr sz="3150" b="1">
+                <a:solidFill>
+                  <a:srgbClr val="E8EDF6"/>
+                </a:solidFill>
+              </a:defRPr>
+            </a:lvl5pPr>
+            <a:lvl6pPr>
+              <a:defRPr sz="3150" b="1">
+                <a:solidFill>
+                  <a:srgbClr val="E8EDF6"/>
+                </a:solidFill>
+              </a:defRPr>
+            </a:lvl6pPr>
+            <a:lvl7pPr>
+              <a:defRPr sz="3150" b="1">
+                <a:solidFill>
+                  <a:srgbClr val="E8EDF6"/>
+                </a:solidFill>
+              </a:defRPr>
+            </a:lvl7pPr>
+            <a:lvl8pPr>
+              <a:defRPr sz="3150" b="1">
+                <a:solidFill>
+                  <a:srgbClr val="E8EDF6"/>
+                </a:solidFill>
+              </a:defRPr>
+            </a:lvl8pPr>
+            <a:lvl9pPr>
+              <a:defRPr sz="3150" b="1">
+                <a:solidFill>
+                  <a:srgbClr val="E8EDF6"/>
+                </a:solidFill>
+              </a:defRPr>
+            </a:lvl9pPr>
+          </a:lstStyle>
+          <a:p xmlns:a="http://schemas.openxmlformats.org/drawingml/2006/main">
+            <a:pPr>
+              <a:defRPr sz="3150" b="1">
+                <a:solidFill>
+                  <a:srgbClr val="E8EDF6"/>
+                </a:solidFill>
+              </a:defRPr>
+            </a:pPr>
+            <a:r>
+              <a:rPr sz="3150" b="1">
+                <a:solidFill>
+                  <a:srgbClr val="E8EDF6"/>
+                </a:solidFill>
+              </a:rPr>
+              <a:t>Zwölf Geschäftsprobleme.</a:t>
+            </a:r>
+          </a:p>
+          <a:p xmlns:a="http://schemas.openxmlformats.org/drawingml/2006/main">
+            <a:pPr>
+              <a:defRPr sz="3150" b="1">
+                <a:solidFill>
+                  <a:srgbClr val="E8EDF6"/>
+                </a:solidFill>
+              </a:defRPr>
+            </a:pPr>
+            <a:r>
+              <a:rPr sz="3150" b="1">
+                <a:solidFill>
+                  <a:srgbClr val="E8EDF6"/>
+                </a:solidFill>
+              </a:rPr>
+              <a:t>Für jedes eine prüfbare Aufgabe.</a:t>
+            </a:r>
+          </a:p>
+        </p:txBody>
+      </p:sp>
+      <p:sp>
+        <p:nvSpPr>
+          <p:cNvPr id="3" name="">
+            <a:extLst xmlns:a="http://schemas.openxmlformats.org/drawingml/2006/main">
+              <a:ext uri="{FF2B5EF4-FFF2-40B4-BE49-F238E27FC236}">
+                <a16:creationId xmlns:a16="http://schemas.microsoft.com/office/drawing/2014/main" id="{47DCFD82-B95A-4FA7-BA4C-C3DF0A511904}"/>
+              </a:ext>
+            </a:extLst>
+          </p:cNvPr>
+          <p:cNvSpPr>
+            <a:spLocks xmlns:a="http://schemas.openxmlformats.org/drawingml/2006/main" noGrp="1"/>
+          </p:cNvSpPr>
+          <p:nvPr/>
+        </p:nvSpPr>
+        <p:spPr>
+          <a:xfrm xmlns:a="http://schemas.openxmlformats.org/drawingml/2006/main">
+            <a:off x="685800" y="3429000"/>
+            <a:ext cx="10668000" cy="1428750"/>
+          </a:xfrm>
+          <a:prstGeom xmlns:a="http://schemas.openxmlformats.org/drawingml/2006/main" prst="rect">
+            <a:avLst/>
+          </a:prstGeom>
+          <a:noFill xmlns:a="http://schemas.openxmlformats.org/drawingml/2006/main"/>
+          <a:ln xmlns:a="http://schemas.openxmlformats.org/drawingml/2006/main" w="0">
+            <a:noFill/>
+            <a:prstDash val="solid"/>
+          </a:ln>
+        </p:spPr>
+        <p:txBody>
+          <a:bodyPr xmlns:a="http://schemas.openxmlformats.org/drawingml/2006/main"/>
+          <a:lstStyle xmlns:a="http://schemas.openxmlformats.org/drawingml/2006/main">
+            <a:defPPr>
+              <a:defRPr sz="2100" b="0">
+                <a:solidFill>
+                  <a:srgbClr val="C1D0E1"/>
+                </a:solidFill>
+              </a:defRPr>
+            </a:defPPr>
+            <a:lvl1pPr>
+              <a:defRPr sz="2100" b="0">
+                <a:solidFill>
+                  <a:srgbClr val="C1D0E1"/>
+                </a:solidFill>
+              </a:defRPr>
+            </a:lvl1pPr>
+            <a:lvl2pPr>
+              <a:defRPr sz="2100" b="0">
+                <a:solidFill>
+                  <a:srgbClr val="C1D0E1"/>
+                </a:solidFill>
+              </a:defRPr>
+            </a:lvl2pPr>
+            <a:lvl3pPr>
+              <a:defRPr sz="2100" b="0">
+                <a:solidFill>
+                  <a:srgbClr val="C1D0E1"/>
+                </a:solidFill>
+              </a:defRPr>
+            </a:lvl3pPr>
+            <a:lvl4pPr>
+              <a:defRPr sz="2100" b="0">
+                <a:solidFill>
+                  <a:srgbClr val="C1D0E1"/>
+                </a:solidFill>
+              </a:defRPr>
+            </a:lvl4pPr>
+            <a:lvl5pPr>
+              <a:defRPr sz="2100" b="0">
+                <a:solidFill>
+                  <a:srgbClr val="C1D0E1"/>
+                </a:solidFill>
+              </a:defRPr>
+            </a:lvl5pPr>
+            <a:lvl6pPr>
+              <a:defRPr sz="2100" b="0">
+                <a:solidFill>
+                  <a:srgbClr val="C1D0E1"/>
+                </a:solidFill>
+              </a:defRPr>
+            </a:lvl6pPr>
+            <a:lvl7pPr>
+              <a:defRPr sz="2100" b="0">
+                <a:solidFill>
+                  <a:srgbClr val="C1D0E1"/>
+                </a:solidFill>
+              </a:defRPr>
+            </a:lvl7pPr>
+            <a:lvl8pPr>
+              <a:defRPr sz="2100" b="0">
+                <a:solidFill>
+                  <a:srgbClr val="C1D0E1"/>
+                </a:solidFill>
+              </a:defRPr>
+            </a:lvl8pPr>
+            <a:lvl9pPr>
+              <a:defRPr sz="2100" b="0">
+                <a:solidFill>
+                  <a:srgbClr val="C1D0E1"/>
+                </a:solidFill>
+              </a:defRPr>
+            </a:lvl9pPr>
+          </a:lstStyle>
+          <a:p xmlns:a="http://schemas.openxmlformats.org/drawingml/2006/main">
+            <a:pPr>
+              <a:defRPr sz="2100" b="0">
+                <a:solidFill>
+                  <a:srgbClr val="C1D0E1"/>
+                </a:solidFill>
+              </a:defRPr>
+            </a:pPr>
+            <a:r>
+              <a:rPr sz="2100" b="0">
+                <a:solidFill>
+                  <a:srgbClr val="C1D0E1"/>
+                </a:solidFill>
+              </a:rPr>
+              <a:t>Einkauf, Marketing, Kundenservice und Finanzen.</a:t>
+            </a:r>
+          </a:p>
+          <a:p xmlns:a="http://schemas.openxmlformats.org/drawingml/2006/main">
+            <a:pPr>
+              <a:defRPr sz="2100" b="0">
+                <a:solidFill>
+                  <a:srgbClr val="C1D0E1"/>
+                </a:solidFill>
+              </a:defRPr>
+            </a:pPr>
+            <a:r>
+              <a:rPr sz="2100" b="0">
+                <a:solidFill>
+                  <a:srgbClr val="C1D0E1"/>
+                </a:solidFill>
+              </a:rPr>
+              <a:t>Jede Episode nennt Datenbedarf, Entscheidung und Zielmetrik.</a:t>
+            </a:r>
+          </a:p>
+        </p:txBody>
+      </p:sp>
+      <p:sp>
+        <p:nvSpPr>
+          <p:cNvPr id="4" name="">
+            <a:extLst xmlns:a="http://schemas.openxmlformats.org/drawingml/2006/main">
+              <a:ext uri="{FF2B5EF4-FFF2-40B4-BE49-F238E27FC236}">
+                <a16:creationId xmlns:a16="http://schemas.microsoft.com/office/drawing/2014/main" id="{52DF1FE7-55EF-4797-9C5A-C0DF0588BAD5}"/>
+              </a:ext>
+            </a:extLst>
+          </p:cNvPr>
+          <p:cNvSpPr>
+            <a:spLocks xmlns:a="http://schemas.openxmlformats.org/drawingml/2006/main" noGrp="1"/>
+          </p:cNvSpPr>
+          <p:nvPr/>
+        </p:nvSpPr>
+        <p:spPr>
+          <a:xfrm xmlns:a="http://schemas.openxmlformats.org/drawingml/2006/main">
+            <a:off x="685800" y="5619750"/>
+            <a:ext cx="10668000" cy="666750"/>
+          </a:xfrm>
+          <a:prstGeom xmlns:a="http://schemas.openxmlformats.org/drawingml/2006/main" prst="rect">
+            <a:avLst/>
+          </a:prstGeom>
+          <a:noFill xmlns:a="http://schemas.openxmlformats.org/drawingml/2006/main"/>
+          <a:ln xmlns:a="http://schemas.openxmlformats.org/drawingml/2006/main" w="0">
+            <a:noFill/>
+            <a:prstDash val="solid"/>
+          </a:ln>
+        </p:spPr>
+        <p:txBody>
+          <a:bodyPr xmlns:a="http://schemas.openxmlformats.org/drawingml/2006/main"/>
+          <a:lstStyle xmlns:a="http://schemas.openxmlformats.org/drawingml/2006/main">
+            <a:defPPr>
+              <a:defRPr sz="1725" b="0">
+                <a:solidFill>
+                  <a:srgbClr val="FF9D8A"/>
+                </a:solidFill>
+              </a:defRPr>
+            </a:defPPr>
+            <a:lvl1pPr>
+              <a:defRPr sz="1725" b="0">
+                <a:solidFill>
+                  <a:srgbClr val="FF9D8A"/>
+                </a:solidFill>
+              </a:defRPr>
+            </a:lvl1pPr>
+            <a:lvl2pPr>
+              <a:defRPr sz="1725" b="0">
+                <a:solidFill>
+                  <a:srgbClr val="FF9D8A"/>
+                </a:solidFill>
+              </a:defRPr>
+            </a:lvl2pPr>
+            <a:lvl3pPr>
+              <a:defRPr sz="1725" b="0">
+                <a:solidFill>
+                  <a:srgbClr val="FF9D8A"/>
+                </a:solidFill>
+              </a:defRPr>
+            </a:lvl3pPr>
+            <a:lvl4pPr>
+              <a:defRPr sz="1725" b="0">
+                <a:solidFill>
+                  <a:srgbClr val="FF9D8A"/>
+                </a:solidFill>
+              </a:defRPr>
+            </a:lvl4pPr>
+            <a:lvl5pPr>
+              <a:defRPr sz="1725" b="0">
+                <a:solidFill>
+                  <a:srgbClr val="FF9D8A"/>
+                </a:solidFill>
+              </a:defRPr>
+            </a:lvl5pPr>
+            <a:lvl6pPr>
+              <a:defRPr sz="1725" b="0">
+                <a:solidFill>
+                  <a:srgbClr val="FF9D8A"/>
+                </a:solidFill>
+              </a:defRPr>
+            </a:lvl6pPr>
+            <a:lvl7pPr>
+              <a:defRPr sz="1725" b="0">
+                <a:solidFill>
+                  <a:srgbClr val="FF9D8A"/>
+                </a:solidFill>
+              </a:defRPr>
+            </a:lvl7pPr>
+            <a:lvl8pPr>
+              <a:defRPr sz="1725" b="0">
+                <a:solidFill>
+                  <a:srgbClr val="FF9D8A"/>
+                </a:solidFill>
+              </a:defRPr>
+            </a:lvl8pPr>
+            <a:lvl9pPr>
+              <a:defRPr sz="1725" b="0">
+                <a:solidFill>
+                  <a:srgbClr val="FF9D8A"/>
+                </a:solidFill>
+              </a:defRPr>
+            </a:lvl9pPr>
+          </a:lstStyle>
+          <a:p xmlns:a="http://schemas.openxmlformats.org/drawingml/2006/main">
+            <a:pPr>
+              <a:defRPr sz="1725" b="0">
+                <a:solidFill>
+                  <a:srgbClr val="FF9D8A"/>
+                </a:solidFill>
+              </a:defRPr>
+            </a:pPr>
+            <a:r>
+              <a:rPr sz="1725" b="0">
+                <a:solidFill>
+                  <a:srgbClr val="FF9D8A"/>
+                </a:solidFill>
+              </a:rPr>
+              <a:t>Die KI bekommt einen Firmenausweis. Noch keine Zeichnungsberechtigung.</a:t>
+            </a:r>
+          </a:p>
+        </p:txBody>
+      </p:sp>
+    </p:spTree>
+    <p:extLst>
+      <p:ext uri="{BB962C8B-B14F-4D97-AF65-F5344CB8AC3E}">
+        <p14:creationId xmlns:p14="http://schemas.microsoft.com/office/powerpoint/2010/main" val="1615878729"/>
+      </p:ext>
+    </p:extLst>
+  </p:cSld>
+</p:sld>
+</file>
+
+<file path=ppt/slides/slide9.xml><?xml version="1.0" encoding="utf-8"?>
+<p:sld xmlns:p="http://schemas.openxmlformats.org/presentationml/2006/main">
+  <p:cSld>
+    <p:bg>
+      <p:bgPr>
+        <a:solidFill xmlns:a="http://schemas.openxmlformats.org/drawingml/2006/main">
+          <a:srgbClr val="0B1220"/>
+        </a:solidFill>
+      </p:bgPr>
+    </p:bg>
+    <p:spTree>
+      <p:nvGrpSpPr>
+        <p:cNvPr id="1" name=""/>
+        <p:cNvGrpSpPr/>
+        <p:nvPr/>
+      </p:nvGrpSpPr>
+      <p:grpSpPr>
+        <a:xfrm xmlns:a="http://schemas.openxmlformats.org/drawingml/2006/main"/>
+      </p:grpSpPr>
+      <p:sp>
+        <p:nvSpPr>
+          <p:cNvPr id="5" name="">
+            <a:extLst xmlns:a="http://schemas.openxmlformats.org/drawingml/2006/main">
+              <a:ext uri="{FF2B5EF4-FFF2-40B4-BE49-F238E27FC236}">
+                <a16:creationId xmlns:a16="http://schemas.microsoft.com/office/drawing/2014/main" id="{A5AB3C31-CEE3-47D6-A212-D6B6A8BAEA76}"/>
+              </a:ext>
+            </a:extLst>
+          </p:cNvPr>
+          <p:cNvSpPr>
+            <a:spLocks xmlns:a="http://schemas.openxmlformats.org/drawingml/2006/main" noGrp="1"/>
+          </p:cNvSpPr>
+          <p:nvPr/>
+        </p:nvSpPr>
+        <p:spPr>
+          <a:xfrm xmlns:a="http://schemas.openxmlformats.org/drawingml/2006/main">
+            <a:off x="685800" y="476250"/>
+            <a:ext cx="10668000" cy="714375"/>
+          </a:xfrm>
+          <a:prstGeom xmlns:a="http://schemas.openxmlformats.org/drawingml/2006/main" prst="rect">
+            <a:avLst/>
+          </a:prstGeom>
+          <a:noFill xmlns:a="http://schemas.openxmlformats.org/drawingml/2006/main"/>
+          <a:ln xmlns:a="http://schemas.openxmlformats.org/drawingml/2006/main" w="0">
+            <a:noFill/>
+            <a:prstDash val="solid"/>
+          </a:ln>
+        </p:spPr>
+        <p:txBody>
+          <a:bodyPr xmlns:a="http://schemas.openxmlformats.org/drawingml/2006/main"/>
+          <a:lstStyle xmlns:a="http://schemas.openxmlformats.org/drawingml/2006/main">
+            <a:defPPr>
+              <a:defRPr sz="3450" b="1">
+                <a:solidFill>
+                  <a:srgbClr val="56DDC0"/>
+                </a:solidFill>
+              </a:defRPr>
+            </a:defPPr>
+            <a:lvl1pPr>
+              <a:defRPr sz="3450" b="1">
+                <a:solidFill>
+                  <a:srgbClr val="56DDC0"/>
+                </a:solidFill>
+              </a:defRPr>
+            </a:lvl1pPr>
+            <a:lvl2pPr>
+              <a:defRPr sz="3450" b="1">
+                <a:solidFill>
+                  <a:srgbClr val="56DDC0"/>
+                </a:solidFill>
+              </a:defRPr>
+            </a:lvl2pPr>
+            <a:lvl3pPr>
+              <a:defRPr sz="3450" b="1">
+                <a:solidFill>
+                  <a:srgbClr val="56DDC0"/>
+                </a:solidFill>
+              </a:defRPr>
+            </a:lvl3pPr>
+            <a:lvl4pPr>
+              <a:defRPr sz="3450" b="1">
+                <a:solidFill>
+                  <a:srgbClr val="56DDC0"/>
+                </a:solidFill>
+              </a:defRPr>
+            </a:lvl4pPr>
+            <a:lvl5pPr>
+              <a:defRPr sz="3450" b="1">
+                <a:solidFill>
+                  <a:srgbClr val="56DDC0"/>
+                </a:solidFill>
+              </a:defRPr>
+            </a:lvl5pPr>
+            <a:lvl6pPr>
+              <a:defRPr sz="3450" b="1">
+                <a:solidFill>
+                  <a:srgbClr val="56DDC0"/>
+                </a:solidFill>
+              </a:defRPr>
+            </a:lvl6pPr>
+            <a:lvl7pPr>
+              <a:defRPr sz="3450" b="1">
+                <a:solidFill>
+                  <a:srgbClr val="56DDC0"/>
+                </a:solidFill>
+              </a:defRPr>
+            </a:lvl7pPr>
+            <a:lvl8pPr>
+              <a:defRPr sz="3450" b="1">
+                <a:solidFill>
+                  <a:srgbClr val="56DDC0"/>
+                </a:solidFill>
+              </a:defRPr>
+            </a:lvl8pPr>
+            <a:lvl9pPr>
+              <a:defRPr sz="3450" b="1">
+                <a:solidFill>
+                  <a:srgbClr val="56DDC0"/>
+                </a:solidFill>
+              </a:defRPr>
+            </a:lvl9pPr>
+          </a:lstStyle>
+          <a:p xmlns:a="http://schemas.openxmlformats.org/drawingml/2006/main">
+            <a:pPr>
+              <a:defRPr sz="3450" b="1">
+                <a:solidFill>
+                  <a:srgbClr val="56DDC0"/>
+                </a:solidFill>
+              </a:defRPr>
+            </a:pPr>
+            <a:r>
+              <a:rPr sz="3450" b="1">
+                <a:solidFill>
+                  <a:srgbClr val="56DDC0"/>
+                </a:solidFill>
+              </a:rPr>
+              <a:t>Copilot, Agent und Workflow</a:t>
+            </a:r>
+          </a:p>
+        </p:txBody>
+      </p:sp>
+      <p:sp>
+        <p:nvSpPr>
+          <p:cNvPr id="2" name="">
+            <a:extLst xmlns:a="http://schemas.openxmlformats.org/drawingml/2006/main">
+              <a:ext uri="{FF2B5EF4-FFF2-40B4-BE49-F238E27FC236}">
+                <a16:creationId xmlns:a16="http://schemas.microsoft.com/office/drawing/2014/main" id="{6A259711-2BDB-41DE-9E80-B3C70AD319A8}"/>
+              </a:ext>
+            </a:extLst>
+          </p:cNvPr>
+          <p:cNvSpPr>
+            <a:spLocks xmlns:a="http://schemas.openxmlformats.org/drawingml/2006/main" noGrp="1"/>
+          </p:cNvSpPr>
+          <p:nvPr/>
+        </p:nvSpPr>
+        <p:spPr>
+          <a:xfrm xmlns:a="http://schemas.openxmlformats.org/drawingml/2006/main">
+            <a:off x="685800" y="1619250"/>
+            <a:ext cx="10668000" cy="1524000"/>
+          </a:xfrm>
+          <a:prstGeom xmlns:a="http://schemas.openxmlformats.org/drawingml/2006/main" prst="rect">
+            <a:avLst/>
+          </a:prstGeom>
+          <a:noFill xmlns:a="http://schemas.openxmlformats.org/drawingml/2006/main"/>
+          <a:ln xmlns:a="http://schemas.openxmlformats.org/drawingml/2006/main" w="0">
+            <a:noFill/>
+            <a:prstDash val="solid"/>
+          </a:ln>
+        </p:spPr>
+        <p:txBody>
+          <a:bodyPr xmlns:a="http://schemas.openxmlformats.org/drawingml/2006/main"/>
+          <a:lstStyle xmlns:a="http://schemas.openxmlformats.org/drawingml/2006/main">
+            <a:defPPr>
+              <a:defRPr sz="3150" b="1">
+                <a:solidFill>
+                  <a:srgbClr val="E8EDF6"/>
+                </a:solidFill>
+              </a:defRPr>
+            </a:defPPr>
+            <a:lvl1pPr>
+              <a:defRPr sz="3150" b="1">
+                <a:solidFill>
+                  <a:srgbClr val="E8EDF6"/>
+                </a:solidFill>
+              </a:defRPr>
+            </a:lvl1pPr>
+            <a:lvl2pPr>
+              <a:defRPr sz="3150" b="1">
+                <a:solidFill>
+                  <a:srgbClr val="E8EDF6"/>
+                </a:solidFill>
+              </a:defRPr>
+            </a:lvl2pPr>
+            <a:lvl3pPr>
+              <a:defRPr sz="3150" b="1">
+                <a:solidFill>
+                  <a:srgbClr val="E8EDF6"/>
+                </a:solidFill>
+              </a:defRPr>
+            </a:lvl3pPr>
+            <a:lvl4pPr>
+              <a:defRPr sz="3150" b="1">
+                <a:solidFill>
+                  <a:srgbClr val="E8EDF6"/>
+                </a:solidFill>
+              </a:defRPr>
+            </a:lvl4pPr>
+            <a:lvl5pPr>
+              <a:defRPr sz="3150" b="1">
+                <a:solidFill>
+                  <a:srgbClr val="E8EDF6"/>
+                </a:solidFill>
+              </a:defRPr>
+            </a:lvl5pPr>
+            <a:lvl6pPr>
+              <a:defRPr sz="3150" b="1">
+                <a:solidFill>
+                  <a:srgbClr val="E8EDF6"/>
+                </a:solidFill>
+              </a:defRPr>
+            </a:lvl6pPr>
+            <a:lvl7pPr>
+              <a:defRPr sz="3150" b="1">
+                <a:solidFill>
+                  <a:srgbClr val="E8EDF6"/>
+                </a:solidFill>
+              </a:defRPr>
+            </a:lvl7pPr>
+            <a:lvl8pPr>
+              <a:defRPr sz="3150" b="1">
+                <a:solidFill>
+                  <a:srgbClr val="E8EDF6"/>
+                </a:solidFill>
+              </a:defRPr>
+            </a:lvl8pPr>
+            <a:lvl9pPr>
+              <a:defRPr sz="3150" b="1">
+                <a:solidFill>
+                  <a:srgbClr val="E8EDF6"/>
+                </a:solidFill>
+              </a:defRPr>
+            </a:lvl9pPr>
+          </a:lstStyle>
+          <a:p xmlns:a="http://schemas.openxmlformats.org/drawingml/2006/main">
+            <a:pPr>
+              <a:defRPr sz="3150" b="1">
+                <a:solidFill>
+                  <a:srgbClr val="E8EDF6"/>
+                </a:solidFill>
+              </a:defRPr>
+            </a:pPr>
+            <a:r>
+              <a:rPr sz="3150" b="1">
+                <a:solidFill>
+                  <a:srgbClr val="E8EDF6"/>
+                </a:solidFill>
+              </a:rPr>
+              <a:t>Ein Ziel braucht Werkzeuge.</a:t>
+            </a:r>
+          </a:p>
+          <a:p xmlns:a="http://schemas.openxmlformats.org/drawingml/2006/main">
+            <a:pPr>
+              <a:defRPr sz="3150" b="1">
+                <a:solidFill>
+                  <a:srgbClr val="E8EDF6"/>
+                </a:solidFill>
+              </a:defRPr>
+            </a:pPr>
+            <a:r>
+              <a:rPr sz="3150" b="1">
+                <a:solidFill>
+                  <a:srgbClr val="E8EDF6"/>
+                </a:solidFill>
+              </a:rPr>
+              <a:t>Ein Werkzeug braucht Grenzen.</a:t>
+            </a:r>
+          </a:p>
+        </p:txBody>
+      </p:sp>
+      <p:sp>
+        <p:nvSpPr>
+          <p:cNvPr id="3" name="">
+            <a:extLst xmlns:a="http://schemas.openxmlformats.org/drawingml/2006/main">
+              <a:ext uri="{FF2B5EF4-FFF2-40B4-BE49-F238E27FC236}">
+                <a16:creationId xmlns:a16="http://schemas.microsoft.com/office/drawing/2014/main" id="{E266B330-A5B6-48DE-8852-26C0B28E80FC}"/>
+              </a:ext>
+            </a:extLst>
+          </p:cNvPr>
+          <p:cNvSpPr>
+            <a:spLocks xmlns:a="http://schemas.openxmlformats.org/drawingml/2006/main" noGrp="1"/>
+          </p:cNvSpPr>
+          <p:nvPr/>
+        </p:nvSpPr>
+        <p:spPr>
+          <a:xfrm xmlns:a="http://schemas.openxmlformats.org/drawingml/2006/main">
+            <a:off x="685800" y="3429000"/>
+            <a:ext cx="10668000" cy="1428750"/>
+          </a:xfrm>
+          <a:prstGeom xmlns:a="http://schemas.openxmlformats.org/drawingml/2006/main" prst="rect">
+            <a:avLst/>
+          </a:prstGeom>
+          <a:noFill xmlns:a="http://schemas.openxmlformats.org/drawingml/2006/main"/>
+          <a:ln xmlns:a="http://schemas.openxmlformats.org/drawingml/2006/main" w="0">
+            <a:noFill/>
+            <a:prstDash val="solid"/>
+          </a:ln>
+        </p:spPr>
+        <p:txBody>
+          <a:bodyPr xmlns:a="http://schemas.openxmlformats.org/drawingml/2006/main"/>
+          <a:lstStyle xmlns:a="http://schemas.openxmlformats.org/drawingml/2006/main">
+            <a:defPPr>
+              <a:defRPr sz="2100" b="0">
+                <a:solidFill>
+                  <a:srgbClr val="C1D0E1"/>
+                </a:solidFill>
+              </a:defRPr>
+            </a:defPPr>
+            <a:lvl1pPr>
+              <a:defRPr sz="2100" b="0">
+                <a:solidFill>
+                  <a:srgbClr val="C1D0E1"/>
+                </a:solidFill>
+              </a:defRPr>
+            </a:lvl1pPr>
+            <a:lvl2pPr>
+              <a:defRPr sz="2100" b="0">
+                <a:solidFill>
+                  <a:srgbClr val="C1D0E1"/>
+                </a:solidFill>
+              </a:defRPr>
+            </a:lvl2pPr>
+            <a:lvl3pPr>
+              <a:defRPr sz="2100" b="0">
+                <a:solidFill>
+                  <a:srgbClr val="C1D0E1"/>
+                </a:solidFill>
+              </a:defRPr>
+            </a:lvl3pPr>
+            <a:lvl4pPr>
+              <a:defRPr sz="2100" b="0">
+                <a:solidFill>
+                  <a:srgbClr val="C1D0E1"/>
+                </a:solidFill>
+              </a:defRPr>
+            </a:lvl4pPr>
+            <a:lvl5pPr>
+              <a:defRPr sz="2100" b="0">
+                <a:solidFill>
+                  <a:srgbClr val="C1D0E1"/>
+                </a:solidFill>
+              </a:defRPr>
+            </a:lvl5pPr>
+            <a:lvl6pPr>
+              <a:defRPr sz="2100" b="0">
+                <a:solidFill>
+                  <a:srgbClr val="C1D0E1"/>
+                </a:solidFill>
+              </a:defRPr>
+            </a:lvl6pPr>
+            <a:lvl7pPr>
+              <a:defRPr sz="2100" b="0">
+                <a:solidFill>
+                  <a:srgbClr val="C1D0E1"/>
+                </a:solidFill>
+              </a:defRPr>
+            </a:lvl7pPr>
+            <a:lvl8pPr>
+              <a:defRPr sz="2100" b="0">
+                <a:solidFill>
+                  <a:srgbClr val="C1D0E1"/>
+                </a:solidFill>
+              </a:defRPr>
+            </a:lvl8pPr>
+            <a:lvl9pPr>
+              <a:defRPr sz="2100" b="0">
+                <a:solidFill>
+                  <a:srgbClr val="C1D0E1"/>
+                </a:solidFill>
+              </a:defRPr>
+            </a:lvl9pPr>
+          </a:lstStyle>
+          <a:p xmlns:a="http://schemas.openxmlformats.org/drawingml/2006/main">
+            <a:pPr>
+              <a:defRPr sz="2100" b="0">
+                <a:solidFill>
+                  <a:srgbClr val="C1D0E1"/>
+                </a:solidFill>
+              </a:defRPr>
+            </a:pPr>
+            <a:r>
+              <a:rPr sz="2100" b="0">
+                <a:solidFill>
+                  <a:srgbClr val="C1D0E1"/>
+                </a:solidFill>
+              </a:rPr>
+              <a:t>Copiloten unterstützen Menschen. Agenten können Schritte wählen.</a:t>
+            </a:r>
+          </a:p>
+          <a:p xmlns:a="http://schemas.openxmlformats.org/drawingml/2006/main">
+            <a:pPr>
+              <a:defRPr sz="2100" b="0">
+                <a:solidFill>
+                  <a:srgbClr val="C1D0E1"/>
+                </a:solidFill>
+              </a:defRPr>
+            </a:pPr>
+            <a:r>
+              <a:rPr sz="2100" b="0">
+                <a:solidFill>
+                  <a:srgbClr val="C1D0E1"/>
+                </a:solidFill>
+              </a:rPr>
+              <a:t>Der lokale Flight-Ablauf führt feste Python-Werkzeuge aus.</a:t>
+            </a:r>
+          </a:p>
+        </p:txBody>
+      </p:sp>
+      <p:sp>
+        <p:nvSpPr>
+          <p:cNvPr id="4" name="">
+            <a:extLst xmlns:a="http://schemas.openxmlformats.org/drawingml/2006/main">
+              <a:ext uri="{FF2B5EF4-FFF2-40B4-BE49-F238E27FC236}">
+                <a16:creationId xmlns:a16="http://schemas.microsoft.com/office/drawing/2014/main" id="{DEA38573-FEE0-472B-8F9E-446F6820BADE}"/>
+              </a:ext>
+            </a:extLst>
+          </p:cNvPr>
+          <p:cNvSpPr>
+            <a:spLocks xmlns:a="http://schemas.openxmlformats.org/drawingml/2006/main" noGrp="1"/>
+          </p:cNvSpPr>
+          <p:nvPr/>
+        </p:nvSpPr>
+        <p:spPr>
+          <a:xfrm xmlns:a="http://schemas.openxmlformats.org/drawingml/2006/main">
+            <a:off x="685800" y="5619750"/>
+            <a:ext cx="10668000" cy="666750"/>
+          </a:xfrm>
+          <a:prstGeom xmlns:a="http://schemas.openxmlformats.org/drawingml/2006/main" prst="rect">
+            <a:avLst/>
+          </a:prstGeom>
+          <a:noFill xmlns:a="http://schemas.openxmlformats.org/drawingml/2006/main"/>
+          <a:ln xmlns:a="http://schemas.openxmlformats.org/drawingml/2006/main" w="0">
+            <a:noFill/>
+            <a:prstDash val="solid"/>
+          </a:ln>
+        </p:spPr>
+        <p:txBody>
+          <a:bodyPr xmlns:a="http://schemas.openxmlformats.org/drawingml/2006/main"/>
+          <a:lstStyle xmlns:a="http://schemas.openxmlformats.org/drawingml/2006/main">
+            <a:defPPr>
+              <a:defRPr sz="1725" b="0">
+                <a:solidFill>
+                  <a:srgbClr val="FF9D8A"/>
+                </a:solidFill>
+              </a:defRPr>
+            </a:defPPr>
+            <a:lvl1pPr>
+              <a:defRPr sz="1725" b="0">
+                <a:solidFill>
+                  <a:srgbClr val="FF9D8A"/>
+                </a:solidFill>
+              </a:defRPr>
+            </a:lvl1pPr>
+            <a:lvl2pPr>
+              <a:defRPr sz="1725" b="0">
+                <a:solidFill>
+                  <a:srgbClr val="FF9D8A"/>
+                </a:solidFill>
+              </a:defRPr>
+            </a:lvl2pPr>
+            <a:lvl3pPr>
+              <a:defRPr sz="1725" b="0">
+                <a:solidFill>
+                  <a:srgbClr val="FF9D8A"/>
+                </a:solidFill>
+              </a:defRPr>
+            </a:lvl3pPr>
+            <a:lvl4pPr>
+              <a:defRPr sz="1725" b="0">
+                <a:solidFill>
+                  <a:srgbClr val="FF9D8A"/>
+                </a:solidFill>
+              </a:defRPr>
+            </a:lvl4pPr>
+            <a:lvl5pPr>
+              <a:defRPr sz="1725" b="0">
+                <a:solidFill>
+                  <a:srgbClr val="FF9D8A"/>
+                </a:solidFill>
+              </a:defRPr>
+            </a:lvl5pPr>
+            <a:lvl6pPr>
+              <a:defRPr sz="1725" b="0">
+                <a:solidFill>
+                  <a:srgbClr val="FF9D8A"/>
+                </a:solidFill>
+              </a:defRPr>
+            </a:lvl6pPr>
+            <a:lvl7pPr>
+              <a:defRPr sz="1725" b="0">
+                <a:solidFill>
+                  <a:srgbClr val="FF9D8A"/>
+                </a:solidFill>
+              </a:defRPr>
+            </a:lvl7pPr>
+            <a:lvl8pPr>
+              <a:defRPr sz="1725" b="0">
+                <a:solidFill>
+                  <a:srgbClr val="FF9D8A"/>
+                </a:solidFill>
+              </a:defRPr>
+            </a:lvl8pPr>
+            <a:lvl9pPr>
+              <a:defRPr sz="1725" b="0">
+                <a:solidFill>
+                  <a:srgbClr val="FF9D8A"/>
+                </a:solidFill>
+              </a:defRPr>
+            </a:lvl9pPr>
+          </a:lstStyle>
+          <a:p xmlns:a="http://schemas.openxmlformats.org/drawingml/2006/main">
+            <a:pPr>
+              <a:defRPr sz="1725" b="0">
+                <a:solidFill>
+                  <a:srgbClr val="FF9D8A"/>
+                </a:solidFill>
+              </a:defRPr>
+            </a:pPr>
+            <a:r>
+              <a:rPr sz="1725" b="0">
+                <a:solidFill>
+                  <a:srgbClr val="FF9D8A"/>
+                </a:solidFill>
+              </a:rPr>
+              <a:t>Ein Chatfenster allein ist noch keine Abteilung.</a:t>
+            </a:r>
+          </a:p>
+        </p:txBody>
+      </p:sp>
+    </p:spTree>
+    <p:extLst>
+      <p:ext uri="{BB962C8B-B14F-4D97-AF65-F5344CB8AC3E}">
+        <p14:creationId xmlns:p14="http://schemas.microsoft.com/office/powerpoint/2010/main" val="755107093"/>
       </p:ext>
     </p:extLst>
   </p:cSld>
